--- a/dbms ppt.pptx
+++ b/dbms ppt.pptx
@@ -2,7 +2,7 @@
 <file path=ppt/presentation.xml><?xml version="1.0" encoding="utf-8"?>
 <p:presentation xmlns:a="http://schemas.openxmlformats.org/drawingml/2006/main" xmlns:r="http://schemas.openxmlformats.org/officeDocument/2006/relationships" xmlns:p="http://schemas.openxmlformats.org/presentationml/2006/main" saveSubsetFonts="1">
   <p:sldMasterIdLst>
-    <p:sldMasterId id="2147483648" r:id="rId1"/>
+    <p:sldMasterId id="2147483672" r:id="rId1"/>
   </p:sldMasterIdLst>
   <p:sldIdLst>
     <p:sldId id="256" r:id="rId2"/>
@@ -25,6 +25,7 @@
     <p:sldId id="269" r:id="rId19"/>
     <p:sldId id="270" r:id="rId20"/>
     <p:sldId id="271" r:id="rId21"/>
+    <p:sldId id="277" r:id="rId22"/>
   </p:sldIdLst>
   <p:sldSz cx="12192000" cy="6858000"/>
   <p:notesSz cx="6858000" cy="9144000"/>
@@ -32,7 +33,7 @@
     <a:defPPr>
       <a:defRPr lang="en-US"/>
     </a:defPPr>
-    <a:lvl1pPr marL="0" algn="l" defTabSz="914400" rtl="0" eaLnBrk="1" latinLnBrk="0" hangingPunct="1">
+    <a:lvl1pPr marL="0" algn="l" defTabSz="457200" rtl="0" eaLnBrk="1" latinLnBrk="0" hangingPunct="1">
       <a:defRPr sz="1800" kern="1200">
         <a:solidFill>
           <a:schemeClr val="tx1"/>
@@ -42,7 +43,7 @@
         <a:cs typeface="+mn-cs"/>
       </a:defRPr>
     </a:lvl1pPr>
-    <a:lvl2pPr marL="457200" algn="l" defTabSz="914400" rtl="0" eaLnBrk="1" latinLnBrk="0" hangingPunct="1">
+    <a:lvl2pPr marL="457200" algn="l" defTabSz="457200" rtl="0" eaLnBrk="1" latinLnBrk="0" hangingPunct="1">
       <a:defRPr sz="1800" kern="1200">
         <a:solidFill>
           <a:schemeClr val="tx1"/>
@@ -52,7 +53,7 @@
         <a:cs typeface="+mn-cs"/>
       </a:defRPr>
     </a:lvl2pPr>
-    <a:lvl3pPr marL="914400" algn="l" defTabSz="914400" rtl="0" eaLnBrk="1" latinLnBrk="0" hangingPunct="1">
+    <a:lvl3pPr marL="914400" algn="l" defTabSz="457200" rtl="0" eaLnBrk="1" latinLnBrk="0" hangingPunct="1">
       <a:defRPr sz="1800" kern="1200">
         <a:solidFill>
           <a:schemeClr val="tx1"/>
@@ -62,7 +63,7 @@
         <a:cs typeface="+mn-cs"/>
       </a:defRPr>
     </a:lvl3pPr>
-    <a:lvl4pPr marL="1371600" algn="l" defTabSz="914400" rtl="0" eaLnBrk="1" latinLnBrk="0" hangingPunct="1">
+    <a:lvl4pPr marL="1371600" algn="l" defTabSz="457200" rtl="0" eaLnBrk="1" latinLnBrk="0" hangingPunct="1">
       <a:defRPr sz="1800" kern="1200">
         <a:solidFill>
           <a:schemeClr val="tx1"/>
@@ -72,7 +73,7 @@
         <a:cs typeface="+mn-cs"/>
       </a:defRPr>
     </a:lvl4pPr>
-    <a:lvl5pPr marL="1828800" algn="l" defTabSz="914400" rtl="0" eaLnBrk="1" latinLnBrk="0" hangingPunct="1">
+    <a:lvl5pPr marL="1828800" algn="l" defTabSz="457200" rtl="0" eaLnBrk="1" latinLnBrk="0" hangingPunct="1">
       <a:defRPr sz="1800" kern="1200">
         <a:solidFill>
           <a:schemeClr val="tx1"/>
@@ -82,7 +83,7 @@
         <a:cs typeface="+mn-cs"/>
       </a:defRPr>
     </a:lvl5pPr>
-    <a:lvl6pPr marL="2286000" algn="l" defTabSz="914400" rtl="0" eaLnBrk="1" latinLnBrk="0" hangingPunct="1">
+    <a:lvl6pPr marL="2286000" algn="l" defTabSz="457200" rtl="0" eaLnBrk="1" latinLnBrk="0" hangingPunct="1">
       <a:defRPr sz="1800" kern="1200">
         <a:solidFill>
           <a:schemeClr val="tx1"/>
@@ -92,7 +93,7 @@
         <a:cs typeface="+mn-cs"/>
       </a:defRPr>
     </a:lvl6pPr>
-    <a:lvl7pPr marL="2743200" algn="l" defTabSz="914400" rtl="0" eaLnBrk="1" latinLnBrk="0" hangingPunct="1">
+    <a:lvl7pPr marL="2743200" algn="l" defTabSz="457200" rtl="0" eaLnBrk="1" latinLnBrk="0" hangingPunct="1">
       <a:defRPr sz="1800" kern="1200">
         <a:solidFill>
           <a:schemeClr val="tx1"/>
@@ -102,7 +103,7 @@
         <a:cs typeface="+mn-cs"/>
       </a:defRPr>
     </a:lvl7pPr>
-    <a:lvl8pPr marL="3200400" algn="l" defTabSz="914400" rtl="0" eaLnBrk="1" latinLnBrk="0" hangingPunct="1">
+    <a:lvl8pPr marL="3200400" algn="l" defTabSz="457200" rtl="0" eaLnBrk="1" latinLnBrk="0" hangingPunct="1">
       <a:defRPr sz="1800" kern="1200">
         <a:solidFill>
           <a:schemeClr val="tx1"/>
@@ -112,7 +113,7 @@
         <a:cs typeface="+mn-cs"/>
       </a:defRPr>
     </a:lvl8pPr>
-    <a:lvl9pPr marL="3657600" algn="l" defTabSz="914400" rtl="0" eaLnBrk="1" latinLnBrk="0" hangingPunct="1">
+    <a:lvl9pPr marL="3657600" algn="l" defTabSz="457200" rtl="0" eaLnBrk="1" latinLnBrk="0" hangingPunct="1">
       <a:defRPr sz="1800" kern="1200">
         <a:solidFill>
           <a:schemeClr val="tx1"/>
@@ -123,13 +124,18 @@
       </a:defRPr>
     </a:lvl9pPr>
   </p:defaultTextStyle>
+  <p:extLst>
+    <p:ext uri="{EFAFB233-063F-42B5-8137-9DF3F51BA10A}">
+      <p15:sldGuideLst xmlns:p15="http://schemas.microsoft.com/office/powerpoint/2012/main"/>
+    </p:ext>
+  </p:extLst>
 </p:presentation>
 </file>
 
 <file path=ppt/revisionInfo.xml><?xml version="1.0" encoding="utf-8"?>
 <p1510:revInfo xmlns:a="http://schemas.openxmlformats.org/drawingml/2006/main" xmlns:r="http://schemas.openxmlformats.org/officeDocument/2006/relationships" xmlns:p1510="http://schemas.microsoft.com/office/powerpoint/2015/10/main">
   <p1510:revLst>
-    <p1510:client id="{C1434CAF-8220-4C89-8D35-C695D59F5AE7}" v="8" dt="2026-07-18T17:56:57.632"/>
+    <p1510:client id="{C1434CAF-8220-4C89-8D35-C695D59F5AE7}" v="2" dt="2026-07-23T03:46:34.774"/>
   </p1510:revLst>
 </p1510:revInfo>
 </file>
@@ -139,12 +145,12 @@
   <pc:docChgLst>
     <pc:chgData name="priya yadav" userId="355f86fe1ddc0f5d" providerId="LiveId" clId="{412C2972-1147-4A08-BE72-F8DDBA41C100}"/>
     <pc:docChg chg="custSel addSld delSld modSld">
-      <pc:chgData name="priya yadav" userId="355f86fe1ddc0f5d" providerId="LiveId" clId="{412C2972-1147-4A08-BE72-F8DDBA41C100}" dt="2026-07-18T17:57:40.484" v="788" actId="2711"/>
+      <pc:chgData name="priya yadav" userId="355f86fe1ddc0f5d" providerId="LiveId" clId="{412C2972-1147-4A08-BE72-F8DDBA41C100}" dt="2026-07-23T03:48:51.608" v="900" actId="20577"/>
       <pc:docMkLst>
         <pc:docMk/>
       </pc:docMkLst>
       <pc:sldChg chg="modSp mod">
-        <pc:chgData name="priya yadav" userId="355f86fe1ddc0f5d" providerId="LiveId" clId="{412C2972-1147-4A08-BE72-F8DDBA41C100}" dt="2026-07-18T17:44:53.033" v="620" actId="255"/>
+        <pc:chgData name="priya yadav" userId="355f86fe1ddc0f5d" providerId="LiveId" clId="{412C2972-1147-4A08-BE72-F8DDBA41C100}" dt="2026-07-23T03:48:51.608" v="900" actId="20577"/>
         <pc:sldMkLst>
           <pc:docMk/>
           <pc:sldMk cId="2572730620" sldId="256"/>
@@ -157,9 +163,55 @@
             <ac:spMk id="2" creationId="{B1535A1F-5CB5-4E45-42F1-ADC0FBB19CDB}"/>
           </ac:spMkLst>
         </pc:spChg>
+        <pc:spChg chg="mod">
+          <ac:chgData name="priya yadav" userId="355f86fe1ddc0f5d" providerId="LiveId" clId="{412C2972-1147-4A08-BE72-F8DDBA41C100}" dt="2026-07-23T03:48:51.608" v="900" actId="20577"/>
+          <ac:spMkLst>
+            <pc:docMk/>
+            <pc:sldMk cId="2572730620" sldId="256"/>
+            <ac:spMk id="3" creationId="{4024E3E7-37AE-D27E-347E-B38E778380A5}"/>
+          </ac:spMkLst>
+        </pc:spChg>
+      </pc:sldChg>
+      <pc:sldChg chg="modSp">
+        <pc:chgData name="priya yadav" userId="355f86fe1ddc0f5d" providerId="LiveId" clId="{412C2972-1147-4A08-BE72-F8DDBA41C100}" dt="2026-07-23T03:46:34.774" v="863"/>
+        <pc:sldMkLst>
+          <pc:docMk/>
+          <pc:sldMk cId="163877927" sldId="257"/>
+        </pc:sldMkLst>
+        <pc:spChg chg="mod">
+          <ac:chgData name="priya yadav" userId="355f86fe1ddc0f5d" providerId="LiveId" clId="{412C2972-1147-4A08-BE72-F8DDBA41C100}" dt="2026-07-23T03:46:34.774" v="863"/>
+          <ac:spMkLst>
+            <pc:docMk/>
+            <pc:sldMk cId="163877927" sldId="257"/>
+            <ac:spMk id="2" creationId="{FF32CF83-10C6-4D62-B5B0-378D889CF9BB}"/>
+          </ac:spMkLst>
+        </pc:spChg>
+      </pc:sldChg>
+      <pc:sldChg chg="addSp delSp modSp mod">
+        <pc:chgData name="priya yadav" userId="355f86fe1ddc0f5d" providerId="LiveId" clId="{412C2972-1147-4A08-BE72-F8DDBA41C100}" dt="2026-07-23T03:36:09.068" v="794" actId="14100"/>
+        <pc:sldMkLst>
+          <pc:docMk/>
+          <pc:sldMk cId="1077986641" sldId="258"/>
+        </pc:sldMkLst>
+        <pc:picChg chg="add mod">
+          <ac:chgData name="priya yadav" userId="355f86fe1ddc0f5d" providerId="LiveId" clId="{412C2972-1147-4A08-BE72-F8DDBA41C100}" dt="2026-07-23T03:36:09.068" v="794" actId="14100"/>
+          <ac:picMkLst>
+            <pc:docMk/>
+            <pc:sldMk cId="1077986641" sldId="258"/>
+            <ac:picMk id="4" creationId="{F27E8E98-093F-0404-035B-D377E9996C7A}"/>
+          </ac:picMkLst>
+        </pc:picChg>
+        <pc:picChg chg="del">
+          <ac:chgData name="priya yadav" userId="355f86fe1ddc0f5d" providerId="LiveId" clId="{412C2972-1147-4A08-BE72-F8DDBA41C100}" dt="2026-07-23T03:32:11.416" v="789" actId="478"/>
+          <ac:picMkLst>
+            <pc:docMk/>
+            <pc:sldMk cId="1077986641" sldId="258"/>
+            <ac:picMk id="6" creationId="{11D612EB-FBCD-2228-321E-BE997DF405EE}"/>
+          </ac:picMkLst>
+        </pc:picChg>
       </pc:sldChg>
       <pc:sldChg chg="modSp mod">
-        <pc:chgData name="priya yadav" userId="355f86fe1ddc0f5d" providerId="LiveId" clId="{412C2972-1147-4A08-BE72-F8DDBA41C100}" dt="2026-07-18T17:44:32.709" v="619" actId="2711"/>
+        <pc:chgData name="priya yadav" userId="355f86fe1ddc0f5d" providerId="LiveId" clId="{412C2972-1147-4A08-BE72-F8DDBA41C100}" dt="2026-07-23T03:46:34.997" v="864" actId="27636"/>
         <pc:sldMkLst>
           <pc:docMk/>
           <pc:sldMk cId="526972726" sldId="259"/>
@@ -172,38 +224,100 @@
             <ac:spMk id="2" creationId="{8B18A52B-0191-A53B-1393-053FA355C0D8}"/>
           </ac:spMkLst>
         </pc:spChg>
+        <pc:spChg chg="mod">
+          <ac:chgData name="priya yadav" userId="355f86fe1ddc0f5d" providerId="LiveId" clId="{412C2972-1147-4A08-BE72-F8DDBA41C100}" dt="2026-07-23T03:46:34.997" v="864" actId="27636"/>
+          <ac:spMkLst>
+            <pc:docMk/>
+            <pc:sldMk cId="526972726" sldId="259"/>
+            <ac:spMk id="3" creationId="{CC5B09CE-A249-4504-C400-38CDDA0F54F9}"/>
+          </ac:spMkLst>
+        </pc:spChg>
       </pc:sldChg>
-      <pc:sldChg chg="addSp modSp mod">
-        <pc:chgData name="priya yadav" userId="355f86fe1ddc0f5d" providerId="LiveId" clId="{412C2972-1147-4A08-BE72-F8DDBA41C100}" dt="2026-07-18T17:20:15.414" v="53" actId="1076"/>
+      <pc:sldChg chg="delSp modSp mod">
+        <pc:chgData name="priya yadav" userId="355f86fe1ddc0f5d" providerId="LiveId" clId="{412C2972-1147-4A08-BE72-F8DDBA41C100}" dt="2026-07-23T03:46:34.774" v="863"/>
+        <pc:sldMkLst>
+          <pc:docMk/>
+          <pc:sldMk cId="1288728931" sldId="260"/>
+        </pc:sldMkLst>
+        <pc:spChg chg="mod">
+          <ac:chgData name="priya yadav" userId="355f86fe1ddc0f5d" providerId="LiveId" clId="{412C2972-1147-4A08-BE72-F8DDBA41C100}" dt="2026-07-23T03:46:34.774" v="863"/>
+          <ac:spMkLst>
+            <pc:docMk/>
+            <pc:sldMk cId="1288728931" sldId="260"/>
+            <ac:spMk id="2" creationId="{0E9EC653-7359-F100-C4D5-ABC6821AF005}"/>
+          </ac:spMkLst>
+        </pc:spChg>
+        <pc:spChg chg="del mod">
+          <ac:chgData name="priya yadav" userId="355f86fe1ddc0f5d" providerId="LiveId" clId="{412C2972-1147-4A08-BE72-F8DDBA41C100}" dt="2026-07-23T03:45:59.881" v="861" actId="478"/>
+          <ac:spMkLst>
+            <pc:docMk/>
+            <pc:sldMk cId="1288728931" sldId="260"/>
+            <ac:spMk id="3" creationId="{EE42B7C4-900A-5781-7784-7BC3C5A8013D}"/>
+          </ac:spMkLst>
+        </pc:spChg>
+      </pc:sldChg>
+      <pc:sldChg chg="modSp mod">
+        <pc:chgData name="priya yadav" userId="355f86fe1ddc0f5d" providerId="LiveId" clId="{412C2972-1147-4A08-BE72-F8DDBA41C100}" dt="2026-07-23T03:46:34.774" v="863"/>
+        <pc:sldMkLst>
+          <pc:docMk/>
+          <pc:sldMk cId="2226747912" sldId="261"/>
+        </pc:sldMkLst>
+        <pc:spChg chg="mod">
+          <ac:chgData name="priya yadav" userId="355f86fe1ddc0f5d" providerId="LiveId" clId="{412C2972-1147-4A08-BE72-F8DDBA41C100}" dt="2026-07-23T03:46:34.774" v="863"/>
+          <ac:spMkLst>
+            <pc:docMk/>
+            <pc:sldMk cId="2226747912" sldId="261"/>
+            <ac:spMk id="2" creationId="{8DED893D-45F2-3DE0-FE45-064538081929}"/>
+          </ac:spMkLst>
+        </pc:spChg>
+        <pc:spChg chg="mod">
+          <ac:chgData name="priya yadav" userId="355f86fe1ddc0f5d" providerId="LiveId" clId="{412C2972-1147-4A08-BE72-F8DDBA41C100}" dt="2026-07-23T03:43:03.457" v="823" actId="5793"/>
+          <ac:spMkLst>
+            <pc:docMk/>
+            <pc:sldMk cId="2226747912" sldId="261"/>
+            <ac:spMk id="3" creationId="{1D911DB8-828A-CBB1-320C-A6D3DC2C5787}"/>
+          </ac:spMkLst>
+        </pc:spChg>
+      </pc:sldChg>
+      <pc:sldChg chg="addSp delSp modSp mod">
+        <pc:chgData name="priya yadav" userId="355f86fe1ddc0f5d" providerId="LiveId" clId="{412C2972-1147-4A08-BE72-F8DDBA41C100}" dt="2026-07-23T03:46:34.774" v="863"/>
         <pc:sldMkLst>
           <pc:docMk/>
           <pc:sldMk cId="118732926" sldId="262"/>
         </pc:sldMkLst>
         <pc:spChg chg="mod">
-          <ac:chgData name="priya yadav" userId="355f86fe1ddc0f5d" providerId="LiveId" clId="{412C2972-1147-4A08-BE72-F8DDBA41C100}" dt="2026-07-18T17:19:57.730" v="47" actId="20577"/>
+          <ac:chgData name="priya yadav" userId="355f86fe1ddc0f5d" providerId="LiveId" clId="{412C2972-1147-4A08-BE72-F8DDBA41C100}" dt="2026-07-23T03:46:34.774" v="863"/>
           <ac:spMkLst>
             <pc:docMk/>
             <pc:sldMk cId="118732926" sldId="262"/>
             <ac:spMk id="2" creationId="{57D244CC-A3EE-FF9D-92FA-DB047AC8A3C8}"/>
           </ac:spMkLst>
         </pc:spChg>
-        <pc:picChg chg="add mod">
-          <ac:chgData name="priya yadav" userId="355f86fe1ddc0f5d" providerId="LiveId" clId="{412C2972-1147-4A08-BE72-F8DDBA41C100}" dt="2026-07-18T17:20:15.414" v="53" actId="1076"/>
+        <pc:picChg chg="add del mod">
+          <ac:chgData name="priya yadav" userId="355f86fe1ddc0f5d" providerId="LiveId" clId="{412C2972-1147-4A08-BE72-F8DDBA41C100}" dt="2026-07-23T03:37:52.977" v="795" actId="478"/>
           <ac:picMkLst>
             <pc:docMk/>
             <pc:sldMk cId="118732926" sldId="262"/>
             <ac:picMk id="4" creationId="{2BFB2341-0819-3B4F-E988-39C02F9AAD2E}"/>
           </ac:picMkLst>
         </pc:picChg>
+        <pc:picChg chg="add mod">
+          <ac:chgData name="priya yadav" userId="355f86fe1ddc0f5d" providerId="LiveId" clId="{412C2972-1147-4A08-BE72-F8DDBA41C100}" dt="2026-07-23T03:38:05.577" v="799" actId="14100"/>
+          <ac:picMkLst>
+            <pc:docMk/>
+            <pc:sldMk cId="118732926" sldId="262"/>
+            <ac:picMk id="5" creationId="{A250FD5E-4AAB-97DE-0A88-8D486B542886}"/>
+          </ac:picMkLst>
+        </pc:picChg>
       </pc:sldChg>
       <pc:sldChg chg="modSp new mod">
-        <pc:chgData name="priya yadav" userId="355f86fe1ddc0f5d" providerId="LiveId" clId="{412C2972-1147-4A08-BE72-F8DDBA41C100}" dt="2026-07-18T17:43:56.706" v="617" actId="2711"/>
+        <pc:chgData name="priya yadav" userId="355f86fe1ddc0f5d" providerId="LiveId" clId="{412C2972-1147-4A08-BE72-F8DDBA41C100}" dt="2026-07-23T03:46:35.021" v="865" actId="27636"/>
         <pc:sldMkLst>
           <pc:docMk/>
           <pc:sldMk cId="711429411" sldId="263"/>
         </pc:sldMkLst>
         <pc:spChg chg="mod">
-          <ac:chgData name="priya yadav" userId="355f86fe1ddc0f5d" providerId="LiveId" clId="{412C2972-1147-4A08-BE72-F8DDBA41C100}" dt="2026-07-18T17:43:56.706" v="617" actId="2711"/>
+          <ac:chgData name="priya yadav" userId="355f86fe1ddc0f5d" providerId="LiveId" clId="{412C2972-1147-4A08-BE72-F8DDBA41C100}" dt="2026-07-23T03:46:34.774" v="863"/>
           <ac:spMkLst>
             <pc:docMk/>
             <pc:sldMk cId="711429411" sldId="263"/>
@@ -211,7 +325,7 @@
           </ac:spMkLst>
         </pc:spChg>
         <pc:spChg chg="mod">
-          <ac:chgData name="priya yadav" userId="355f86fe1ddc0f5d" providerId="LiveId" clId="{412C2972-1147-4A08-BE72-F8DDBA41C100}" dt="2026-07-18T17:43:51.475" v="616" actId="2711"/>
+          <ac:chgData name="priya yadav" userId="355f86fe1ddc0f5d" providerId="LiveId" clId="{412C2972-1147-4A08-BE72-F8DDBA41C100}" dt="2026-07-23T03:46:35.021" v="865" actId="27636"/>
           <ac:spMkLst>
             <pc:docMk/>
             <pc:sldMk cId="711429411" sldId="263"/>
@@ -219,75 +333,45 @@
           </ac:spMkLst>
         </pc:spChg>
       </pc:sldChg>
-      <pc:sldChg chg="modSp new del mod">
-        <pc:chgData name="priya yadav" userId="355f86fe1ddc0f5d" providerId="LiveId" clId="{412C2972-1147-4A08-BE72-F8DDBA41C100}" dt="2026-07-18T17:23:57.524" v="218" actId="47"/>
-        <pc:sldMkLst>
-          <pc:docMk/>
-          <pc:sldMk cId="824237457" sldId="264"/>
-        </pc:sldMkLst>
-        <pc:spChg chg="mod">
-          <ac:chgData name="priya yadav" userId="355f86fe1ddc0f5d" providerId="LiveId" clId="{412C2972-1147-4A08-BE72-F8DDBA41C100}" dt="2026-07-18T17:23:52.480" v="217" actId="27636"/>
-          <ac:spMkLst>
-            <pc:docMk/>
-            <pc:sldMk cId="824237457" sldId="264"/>
-            <ac:spMk id="2" creationId="{95CCEA38-F864-EF72-49AF-3920232C5CA4}"/>
-          </ac:spMkLst>
-        </pc:spChg>
-      </pc:sldChg>
-      <pc:sldChg chg="modSp new del mod">
-        <pc:chgData name="priya yadav" userId="355f86fe1ddc0f5d" providerId="LiveId" clId="{412C2972-1147-4A08-BE72-F8DDBA41C100}" dt="2026-07-18T17:23:11.232" v="157" actId="47"/>
-        <pc:sldMkLst>
-          <pc:docMk/>
-          <pc:sldMk cId="1842484281" sldId="264"/>
-        </pc:sldMkLst>
-        <pc:spChg chg="mod">
-          <ac:chgData name="priya yadav" userId="355f86fe1ddc0f5d" providerId="LiveId" clId="{412C2972-1147-4A08-BE72-F8DDBA41C100}" dt="2026-07-18T17:22:01.981" v="130" actId="20577"/>
-          <ac:spMkLst>
-            <pc:docMk/>
-            <pc:sldMk cId="1842484281" sldId="264"/>
-            <ac:spMk id="2" creationId="{EE75DF98-0FAE-BF22-D70D-9F5CAEA74CD4}"/>
-          </ac:spMkLst>
-        </pc:spChg>
-        <pc:spChg chg="mod">
-          <ac:chgData name="priya yadav" userId="355f86fe1ddc0f5d" providerId="LiveId" clId="{412C2972-1147-4A08-BE72-F8DDBA41C100}" dt="2026-07-18T17:23:07.345" v="156" actId="20577"/>
-          <ac:spMkLst>
-            <pc:docMk/>
-            <pc:sldMk cId="1842484281" sldId="264"/>
-            <ac:spMk id="3" creationId="{25C7CE1E-7895-53A6-8848-145793E81DD2}"/>
-          </ac:spMkLst>
-        </pc:spChg>
-      </pc:sldChg>
-      <pc:sldChg chg="modSp new mod">
-        <pc:chgData name="priya yadav" userId="355f86fe1ddc0f5d" providerId="LiveId" clId="{412C2972-1147-4A08-BE72-F8DDBA41C100}" dt="2026-07-18T17:25:07.194" v="302" actId="255"/>
+      <pc:sldChg chg="addSp delSp modSp new mod">
+        <pc:chgData name="priya yadav" userId="355f86fe1ddc0f5d" providerId="LiveId" clId="{412C2972-1147-4A08-BE72-F8DDBA41C100}" dt="2026-07-23T03:46:34.774" v="863"/>
         <pc:sldMkLst>
           <pc:docMk/>
           <pc:sldMk cId="3613455201" sldId="264"/>
         </pc:sldMkLst>
         <pc:spChg chg="mod">
-          <ac:chgData name="priya yadav" userId="355f86fe1ddc0f5d" providerId="LiveId" clId="{412C2972-1147-4A08-BE72-F8DDBA41C100}" dt="2026-07-18T17:25:07.194" v="302" actId="255"/>
+          <ac:chgData name="priya yadav" userId="355f86fe1ddc0f5d" providerId="LiveId" clId="{412C2972-1147-4A08-BE72-F8DDBA41C100}" dt="2026-07-23T03:46:34.774" v="863"/>
           <ac:spMkLst>
             <pc:docMk/>
             <pc:sldMk cId="3613455201" sldId="264"/>
             <ac:spMk id="2" creationId="{43102E54-D2EF-6606-2B5B-C330D2720900}"/>
           </ac:spMkLst>
         </pc:spChg>
-        <pc:spChg chg="mod">
-          <ac:chgData name="priya yadav" userId="355f86fe1ddc0f5d" providerId="LiveId" clId="{412C2972-1147-4A08-BE72-F8DDBA41C100}" dt="2026-07-18T17:24:57.510" v="301" actId="1076"/>
+        <pc:spChg chg="del mod">
+          <ac:chgData name="priya yadav" userId="355f86fe1ddc0f5d" providerId="LiveId" clId="{412C2972-1147-4A08-BE72-F8DDBA41C100}" dt="2026-07-23T03:45:41.730" v="856" actId="478"/>
           <ac:spMkLst>
             <pc:docMk/>
             <pc:sldMk cId="3613455201" sldId="264"/>
             <ac:spMk id="3" creationId="{B5688D99-DAC5-A898-E7A4-ACA7BD32C9E9}"/>
           </ac:spMkLst>
         </pc:spChg>
+        <pc:spChg chg="add del mod">
+          <ac:chgData name="priya yadav" userId="355f86fe1ddc0f5d" providerId="LiveId" clId="{412C2972-1147-4A08-BE72-F8DDBA41C100}" dt="2026-07-23T03:45:47.339" v="858" actId="478"/>
+          <ac:spMkLst>
+            <pc:docMk/>
+            <pc:sldMk cId="3613455201" sldId="264"/>
+            <ac:spMk id="5" creationId="{4D9C9E11-FA77-A949-0F62-5551A9999630}"/>
+          </ac:spMkLst>
+        </pc:spChg>
       </pc:sldChg>
       <pc:sldChg chg="modSp new mod">
-        <pc:chgData name="priya yadav" userId="355f86fe1ddc0f5d" providerId="LiveId" clId="{412C2972-1147-4A08-BE72-F8DDBA41C100}" dt="2026-07-18T17:43:35.694" v="615" actId="2711"/>
+        <pc:chgData name="priya yadav" userId="355f86fe1ddc0f5d" providerId="LiveId" clId="{412C2972-1147-4A08-BE72-F8DDBA41C100}" dt="2026-07-23T03:46:35.048" v="866" actId="27636"/>
         <pc:sldMkLst>
           <pc:docMk/>
           <pc:sldMk cId="2634436808" sldId="265"/>
         </pc:sldMkLst>
         <pc:spChg chg="mod">
-          <ac:chgData name="priya yadav" userId="355f86fe1ddc0f5d" providerId="LiveId" clId="{412C2972-1147-4A08-BE72-F8DDBA41C100}" dt="2026-07-18T17:25:25.920" v="318" actId="2711"/>
+          <ac:chgData name="priya yadav" userId="355f86fe1ddc0f5d" providerId="LiveId" clId="{412C2972-1147-4A08-BE72-F8DDBA41C100}" dt="2026-07-23T03:46:34.774" v="863"/>
           <ac:spMkLst>
             <pc:docMk/>
             <pc:sldMk cId="2634436808" sldId="265"/>
@@ -295,7 +379,7 @@
           </ac:spMkLst>
         </pc:spChg>
         <pc:spChg chg="mod">
-          <ac:chgData name="priya yadav" userId="355f86fe1ddc0f5d" providerId="LiveId" clId="{412C2972-1147-4A08-BE72-F8DDBA41C100}" dt="2026-07-18T17:43:35.694" v="615" actId="2711"/>
+          <ac:chgData name="priya yadav" userId="355f86fe1ddc0f5d" providerId="LiveId" clId="{412C2972-1147-4A08-BE72-F8DDBA41C100}" dt="2026-07-23T03:46:35.048" v="866" actId="27636"/>
           <ac:spMkLst>
             <pc:docMk/>
             <pc:sldMk cId="2634436808" sldId="265"/>
@@ -304,17 +388,25 @@
         </pc:spChg>
       </pc:sldChg>
       <pc:sldChg chg="addSp modSp new mod">
-        <pc:chgData name="priya yadav" userId="355f86fe1ddc0f5d" providerId="LiveId" clId="{412C2972-1147-4A08-BE72-F8DDBA41C100}" dt="2026-07-18T17:30:52.452" v="399" actId="14100"/>
+        <pc:chgData name="priya yadav" userId="355f86fe1ddc0f5d" providerId="LiveId" clId="{412C2972-1147-4A08-BE72-F8DDBA41C100}" dt="2026-07-23T03:46:35.054" v="867" actId="27636"/>
         <pc:sldMkLst>
           <pc:docMk/>
           <pc:sldMk cId="3476999839" sldId="266"/>
         </pc:sldMkLst>
         <pc:spChg chg="mod">
-          <ac:chgData name="priya yadav" userId="355f86fe1ddc0f5d" providerId="LiveId" clId="{412C2972-1147-4A08-BE72-F8DDBA41C100}" dt="2026-07-18T17:30:21.933" v="393" actId="14100"/>
+          <ac:chgData name="priya yadav" userId="355f86fe1ddc0f5d" providerId="LiveId" clId="{412C2972-1147-4A08-BE72-F8DDBA41C100}" dt="2026-07-23T03:46:35.054" v="867" actId="27636"/>
           <ac:spMkLst>
             <pc:docMk/>
             <pc:sldMk cId="3476999839" sldId="266"/>
             <ac:spMk id="2" creationId="{A69A0B94-A0CD-BB78-D940-74B07CC68CA7}"/>
+          </ac:spMkLst>
+        </pc:spChg>
+        <pc:spChg chg="mod">
+          <ac:chgData name="priya yadav" userId="355f86fe1ddc0f5d" providerId="LiveId" clId="{412C2972-1147-4A08-BE72-F8DDBA41C100}" dt="2026-07-23T03:46:34.774" v="863"/>
+          <ac:spMkLst>
+            <pc:docMk/>
+            <pc:sldMk cId="3476999839" sldId="266"/>
+            <ac:spMk id="3" creationId="{5C65DEBC-EDD4-4057-22C3-D882AC54E3C0}"/>
           </ac:spMkLst>
         </pc:spChg>
         <pc:picChg chg="add mod">
@@ -327,13 +419,13 @@
         </pc:picChg>
       </pc:sldChg>
       <pc:sldChg chg="modSp new mod">
-        <pc:chgData name="priya yadav" userId="355f86fe1ddc0f5d" providerId="LiveId" clId="{412C2972-1147-4A08-BE72-F8DDBA41C100}" dt="2026-07-18T17:43:23.164" v="614" actId="2711"/>
+        <pc:chgData name="priya yadav" userId="355f86fe1ddc0f5d" providerId="LiveId" clId="{412C2972-1147-4A08-BE72-F8DDBA41C100}" dt="2026-07-23T03:46:35.092" v="868" actId="27636"/>
         <pc:sldMkLst>
           <pc:docMk/>
           <pc:sldMk cId="3618769604" sldId="267"/>
         </pc:sldMkLst>
         <pc:spChg chg="mod">
-          <ac:chgData name="priya yadav" userId="355f86fe1ddc0f5d" providerId="LiveId" clId="{412C2972-1147-4A08-BE72-F8DDBA41C100}" dt="2026-07-18T17:43:23.164" v="614" actId="2711"/>
+          <ac:chgData name="priya yadav" userId="355f86fe1ddc0f5d" providerId="LiveId" clId="{412C2972-1147-4A08-BE72-F8DDBA41C100}" dt="2026-07-23T03:46:34.774" v="863"/>
           <ac:spMkLst>
             <pc:docMk/>
             <pc:sldMk cId="3618769604" sldId="267"/>
@@ -341,7 +433,7 @@
           </ac:spMkLst>
         </pc:spChg>
         <pc:spChg chg="mod">
-          <ac:chgData name="priya yadav" userId="355f86fe1ddc0f5d" providerId="LiveId" clId="{412C2972-1147-4A08-BE72-F8DDBA41C100}" dt="2026-07-18T17:43:17.848" v="613" actId="2711"/>
+          <ac:chgData name="priya yadav" userId="355f86fe1ddc0f5d" providerId="LiveId" clId="{412C2972-1147-4A08-BE72-F8DDBA41C100}" dt="2026-07-23T03:46:35.092" v="868" actId="27636"/>
           <ac:spMkLst>
             <pc:docMk/>
             <pc:sldMk cId="3618769604" sldId="267"/>
@@ -349,22 +441,22 @@
           </ac:spMkLst>
         </pc:spChg>
       </pc:sldChg>
-      <pc:sldChg chg="modSp new mod">
-        <pc:chgData name="priya yadav" userId="355f86fe1ddc0f5d" providerId="LiveId" clId="{412C2972-1147-4A08-BE72-F8DDBA41C100}" dt="2026-07-18T17:36:16.462" v="500" actId="14100"/>
+      <pc:sldChg chg="delSp modSp new mod">
+        <pc:chgData name="priya yadav" userId="355f86fe1ddc0f5d" providerId="LiveId" clId="{412C2972-1147-4A08-BE72-F8DDBA41C100}" dt="2026-07-23T03:46:34.774" v="863"/>
         <pc:sldMkLst>
           <pc:docMk/>
           <pc:sldMk cId="2084741734" sldId="268"/>
         </pc:sldMkLst>
         <pc:spChg chg="mod">
-          <ac:chgData name="priya yadav" userId="355f86fe1ddc0f5d" providerId="LiveId" clId="{412C2972-1147-4A08-BE72-F8DDBA41C100}" dt="2026-07-18T17:35:59.297" v="471" actId="255"/>
+          <ac:chgData name="priya yadav" userId="355f86fe1ddc0f5d" providerId="LiveId" clId="{412C2972-1147-4A08-BE72-F8DDBA41C100}" dt="2026-07-23T03:46:34.774" v="863"/>
           <ac:spMkLst>
             <pc:docMk/>
             <pc:sldMk cId="2084741734" sldId="268"/>
             <ac:spMk id="2" creationId="{F341EA8A-167C-740E-4848-5A094926DCA1}"/>
           </ac:spMkLst>
         </pc:spChg>
-        <pc:spChg chg="mod">
-          <ac:chgData name="priya yadav" userId="355f86fe1ddc0f5d" providerId="LiveId" clId="{412C2972-1147-4A08-BE72-F8DDBA41C100}" dt="2026-07-18T17:36:16.462" v="500" actId="14100"/>
+        <pc:spChg chg="del mod">
+          <ac:chgData name="priya yadav" userId="355f86fe1ddc0f5d" providerId="LiveId" clId="{412C2972-1147-4A08-BE72-F8DDBA41C100}" dt="2026-07-23T03:45:25.640" v="852" actId="478"/>
           <ac:spMkLst>
             <pc:docMk/>
             <pc:sldMk cId="2084741734" sldId="268"/>
@@ -373,13 +465,13 @@
         </pc:spChg>
       </pc:sldChg>
       <pc:sldChg chg="modSp new mod">
-        <pc:chgData name="priya yadav" userId="355f86fe1ddc0f5d" providerId="LiveId" clId="{412C2972-1147-4A08-BE72-F8DDBA41C100}" dt="2026-07-18T17:43:00.765" v="611" actId="2711"/>
+        <pc:chgData name="priya yadav" userId="355f86fe1ddc0f5d" providerId="LiveId" clId="{412C2972-1147-4A08-BE72-F8DDBA41C100}" dt="2026-07-23T03:46:35.150" v="870" actId="27636"/>
         <pc:sldMkLst>
           <pc:docMk/>
           <pc:sldMk cId="3961269671" sldId="269"/>
         </pc:sldMkLst>
         <pc:spChg chg="mod">
-          <ac:chgData name="priya yadav" userId="355f86fe1ddc0f5d" providerId="LiveId" clId="{412C2972-1147-4A08-BE72-F8DDBA41C100}" dt="2026-07-18T17:42:53.281" v="610" actId="2711"/>
+          <ac:chgData name="priya yadav" userId="355f86fe1ddc0f5d" providerId="LiveId" clId="{412C2972-1147-4A08-BE72-F8DDBA41C100}" dt="2026-07-23T03:46:34.774" v="863"/>
           <ac:spMkLst>
             <pc:docMk/>
             <pc:sldMk cId="3961269671" sldId="269"/>
@@ -387,7 +479,7 @@
           </ac:spMkLst>
         </pc:spChg>
         <pc:spChg chg="mod">
-          <ac:chgData name="priya yadav" userId="355f86fe1ddc0f5d" providerId="LiveId" clId="{412C2972-1147-4A08-BE72-F8DDBA41C100}" dt="2026-07-18T17:43:00.765" v="611" actId="2711"/>
+          <ac:chgData name="priya yadav" userId="355f86fe1ddc0f5d" providerId="LiveId" clId="{412C2972-1147-4A08-BE72-F8DDBA41C100}" dt="2026-07-23T03:46:35.150" v="870" actId="27636"/>
           <ac:spMkLst>
             <pc:docMk/>
             <pc:sldMk cId="3961269671" sldId="269"/>
@@ -395,37 +487,45 @@
           </ac:spMkLst>
         </pc:spChg>
       </pc:sldChg>
-      <pc:sldChg chg="addSp modSp new mod">
-        <pc:chgData name="priya yadav" userId="355f86fe1ddc0f5d" providerId="LiveId" clId="{412C2972-1147-4A08-BE72-F8DDBA41C100}" dt="2026-07-18T17:42:46.782" v="609" actId="2711"/>
+      <pc:sldChg chg="addSp delSp modSp new mod">
+        <pc:chgData name="priya yadav" userId="355f86fe1ddc0f5d" providerId="LiveId" clId="{412C2972-1147-4A08-BE72-F8DDBA41C100}" dt="2026-07-23T03:46:34.774" v="863"/>
         <pc:sldMkLst>
           <pc:docMk/>
           <pc:sldMk cId="1106817348" sldId="270"/>
         </pc:sldMkLst>
         <pc:spChg chg="mod">
-          <ac:chgData name="priya yadav" userId="355f86fe1ddc0f5d" providerId="LiveId" clId="{412C2972-1147-4A08-BE72-F8DDBA41C100}" dt="2026-07-18T17:42:46.782" v="609" actId="2711"/>
+          <ac:chgData name="priya yadav" userId="355f86fe1ddc0f5d" providerId="LiveId" clId="{412C2972-1147-4A08-BE72-F8DDBA41C100}" dt="2026-07-23T03:46:34.774" v="863"/>
           <ac:spMkLst>
             <pc:docMk/>
             <pc:sldMk cId="1106817348" sldId="270"/>
             <ac:spMk id="2" creationId="{06D07353-DCBD-CA0D-94FC-CCA2DD4CCE39}"/>
           </ac:spMkLst>
         </pc:spChg>
-        <pc:picChg chg="add mod">
-          <ac:chgData name="priya yadav" userId="355f86fe1ddc0f5d" providerId="LiveId" clId="{412C2972-1147-4A08-BE72-F8DDBA41C100}" dt="2026-07-18T17:41:33.819" v="587" actId="14100"/>
+        <pc:picChg chg="add del mod">
+          <ac:chgData name="priya yadav" userId="355f86fe1ddc0f5d" providerId="LiveId" clId="{412C2972-1147-4A08-BE72-F8DDBA41C100}" dt="2026-07-23T03:38:34.621" v="800" actId="478"/>
           <ac:picMkLst>
             <pc:docMk/>
             <pc:sldMk cId="1106817348" sldId="270"/>
             <ac:picMk id="4" creationId="{44FBBC45-3BAC-D9B4-966F-EE0221C24C73}"/>
           </ac:picMkLst>
         </pc:picChg>
+        <pc:picChg chg="add mod">
+          <ac:chgData name="priya yadav" userId="355f86fe1ddc0f5d" providerId="LiveId" clId="{412C2972-1147-4A08-BE72-F8DDBA41C100}" dt="2026-07-23T03:45:06.261" v="848" actId="1036"/>
+          <ac:picMkLst>
+            <pc:docMk/>
+            <pc:sldMk cId="1106817348" sldId="270"/>
+            <ac:picMk id="5" creationId="{EF93C610-FD67-F096-8CC5-763379E06B57}"/>
+          </ac:picMkLst>
+        </pc:picChg>
       </pc:sldChg>
       <pc:sldChg chg="modSp new mod">
-        <pc:chgData name="priya yadav" userId="355f86fe1ddc0f5d" providerId="LiveId" clId="{412C2972-1147-4A08-BE72-F8DDBA41C100}" dt="2026-07-18T17:42:39.950" v="608" actId="2711"/>
+        <pc:chgData name="priya yadav" userId="355f86fe1ddc0f5d" providerId="LiveId" clId="{412C2972-1147-4A08-BE72-F8DDBA41C100}" dt="2026-07-23T03:46:35.171" v="871" actId="27636"/>
         <pc:sldMkLst>
           <pc:docMk/>
           <pc:sldMk cId="2538712348" sldId="271"/>
         </pc:sldMkLst>
         <pc:spChg chg="mod">
-          <ac:chgData name="priya yadav" userId="355f86fe1ddc0f5d" providerId="LiveId" clId="{412C2972-1147-4A08-BE72-F8DDBA41C100}" dt="2026-07-18T17:42:39.950" v="608" actId="2711"/>
+          <ac:chgData name="priya yadav" userId="355f86fe1ddc0f5d" providerId="LiveId" clId="{412C2972-1147-4A08-BE72-F8DDBA41C100}" dt="2026-07-23T03:46:34.774" v="863"/>
           <ac:spMkLst>
             <pc:docMk/>
             <pc:sldMk cId="2538712348" sldId="271"/>
@@ -433,7 +533,7 @@
           </ac:spMkLst>
         </pc:spChg>
         <pc:spChg chg="mod">
-          <ac:chgData name="priya yadav" userId="355f86fe1ddc0f5d" providerId="LiveId" clId="{412C2972-1147-4A08-BE72-F8DDBA41C100}" dt="2026-07-18T17:42:34.336" v="607" actId="27636"/>
+          <ac:chgData name="priya yadav" userId="355f86fe1ddc0f5d" providerId="LiveId" clId="{412C2972-1147-4A08-BE72-F8DDBA41C100}" dt="2026-07-23T03:46:35.171" v="871" actId="27636"/>
           <ac:spMkLst>
             <pc:docMk/>
             <pc:sldMk cId="2538712348" sldId="271"/>
@@ -441,44 +541,45 @@
           </ac:spMkLst>
         </pc:spChg>
       </pc:sldChg>
-      <pc:sldChg chg="modSp new mod">
-        <pc:chgData name="priya yadav" userId="355f86fe1ddc0f5d" providerId="LiveId" clId="{412C2972-1147-4A08-BE72-F8DDBA41C100}" dt="2026-07-18T17:47:01.392" v="688" actId="27636"/>
+      <pc:sldChg chg="addSp delSp modSp new mod">
+        <pc:chgData name="priya yadav" userId="355f86fe1ddc0f5d" providerId="LiveId" clId="{412C2972-1147-4A08-BE72-F8DDBA41C100}" dt="2026-07-23T03:46:34.774" v="863"/>
         <pc:sldMkLst>
           <pc:docMk/>
           <pc:sldMk cId="1202135391" sldId="272"/>
         </pc:sldMkLst>
         <pc:spChg chg="mod">
-          <ac:chgData name="priya yadav" userId="355f86fe1ddc0f5d" providerId="LiveId" clId="{412C2972-1147-4A08-BE72-F8DDBA41C100}" dt="2026-07-18T17:46:41.312" v="657" actId="255"/>
+          <ac:chgData name="priya yadav" userId="355f86fe1ddc0f5d" providerId="LiveId" clId="{412C2972-1147-4A08-BE72-F8DDBA41C100}" dt="2026-07-23T03:46:34.774" v="863"/>
           <ac:spMkLst>
             <pc:docMk/>
             <pc:sldMk cId="1202135391" sldId="272"/>
             <ac:spMk id="2" creationId="{333CF35C-5519-9C2E-21D7-94F072C385F1}"/>
           </ac:spMkLst>
         </pc:spChg>
-        <pc:spChg chg="mod">
-          <ac:chgData name="priya yadav" userId="355f86fe1ddc0f5d" providerId="LiveId" clId="{412C2972-1147-4A08-BE72-F8DDBA41C100}" dt="2026-07-18T17:47:01.392" v="688" actId="27636"/>
+        <pc:spChg chg="del mod">
+          <ac:chgData name="priya yadav" userId="355f86fe1ddc0f5d" providerId="LiveId" clId="{412C2972-1147-4A08-BE72-F8DDBA41C100}" dt="2026-07-23T03:43:45.009" v="828" actId="478"/>
           <ac:spMkLst>
             <pc:docMk/>
             <pc:sldMk cId="1202135391" sldId="272"/>
             <ac:spMk id="3" creationId="{E4B2A50F-E8ED-1B71-356C-D724D49FF054}"/>
           </ac:spMkLst>
         </pc:spChg>
-      </pc:sldChg>
-      <pc:sldChg chg="new del">
-        <pc:chgData name="priya yadav" userId="355f86fe1ddc0f5d" providerId="LiveId" clId="{412C2972-1147-4A08-BE72-F8DDBA41C100}" dt="2026-07-18T17:47:23.670" v="691" actId="47"/>
-        <pc:sldMkLst>
-          <pc:docMk/>
-          <pc:sldMk cId="2591437053" sldId="273"/>
-        </pc:sldMkLst>
+        <pc:spChg chg="add del mod">
+          <ac:chgData name="priya yadav" userId="355f86fe1ddc0f5d" providerId="LiveId" clId="{412C2972-1147-4A08-BE72-F8DDBA41C100}" dt="2026-07-23T03:43:52.520" v="830" actId="478"/>
+          <ac:spMkLst>
+            <pc:docMk/>
+            <pc:sldMk cId="1202135391" sldId="272"/>
+            <ac:spMk id="5" creationId="{5BE0B966-86A3-0B86-FB79-3706F0D9CADE}"/>
+          </ac:spMkLst>
+        </pc:spChg>
       </pc:sldChg>
       <pc:sldChg chg="modSp new mod">
-        <pc:chgData name="priya yadav" userId="355f86fe1ddc0f5d" providerId="LiveId" clId="{412C2972-1147-4A08-BE72-F8DDBA41C100}" dt="2026-07-18T17:50:30.223" v="723" actId="2711"/>
+        <pc:chgData name="priya yadav" userId="355f86fe1ddc0f5d" providerId="LiveId" clId="{412C2972-1147-4A08-BE72-F8DDBA41C100}" dt="2026-07-23T03:46:35.122" v="869" actId="27636"/>
         <pc:sldMkLst>
           <pc:docMk/>
           <pc:sldMk cId="1343772686" sldId="274"/>
         </pc:sldMkLst>
         <pc:spChg chg="mod">
-          <ac:chgData name="priya yadav" userId="355f86fe1ddc0f5d" providerId="LiveId" clId="{412C2972-1147-4A08-BE72-F8DDBA41C100}" dt="2026-07-18T17:47:39.231" v="712" actId="2711"/>
+          <ac:chgData name="priya yadav" userId="355f86fe1ddc0f5d" providerId="LiveId" clId="{412C2972-1147-4A08-BE72-F8DDBA41C100}" dt="2026-07-23T03:46:34.774" v="863"/>
           <ac:spMkLst>
             <pc:docMk/>
             <pc:sldMk cId="1343772686" sldId="274"/>
@@ -486,7 +587,7 @@
           </ac:spMkLst>
         </pc:spChg>
         <pc:spChg chg="mod">
-          <ac:chgData name="priya yadav" userId="355f86fe1ddc0f5d" providerId="LiveId" clId="{412C2972-1147-4A08-BE72-F8DDBA41C100}" dt="2026-07-18T17:50:30.223" v="723" actId="2711"/>
+          <ac:chgData name="priya yadav" userId="355f86fe1ddc0f5d" providerId="LiveId" clId="{412C2972-1147-4A08-BE72-F8DDBA41C100}" dt="2026-07-23T03:46:35.122" v="869" actId="27636"/>
           <ac:spMkLst>
             <pc:docMk/>
             <pc:sldMk cId="1343772686" sldId="274"/>
@@ -508,14 +609,6 @@
             <ac:spMk id="2" creationId="{FAE31797-C334-7169-820D-6803F1D21B4E}"/>
           </ac:spMkLst>
         </pc:spChg>
-        <pc:spChg chg="del mod">
-          <ac:chgData name="priya yadav" userId="355f86fe1ddc0f5d" providerId="LiveId" clId="{412C2972-1147-4A08-BE72-F8DDBA41C100}" dt="2026-07-18T17:52:09.501" v="757" actId="478"/>
-          <ac:spMkLst>
-            <pc:docMk/>
-            <pc:sldMk cId="1234660622" sldId="275"/>
-            <ac:spMk id="3" creationId="{D578F6CC-0E2C-FBF8-FDD0-F6E95F0FF04D}"/>
-          </ac:spMkLst>
-        </pc:spChg>
         <pc:picChg chg="add mod">
           <ac:chgData name="priya yadav" userId="355f86fe1ddc0f5d" providerId="LiveId" clId="{412C2972-1147-4A08-BE72-F8DDBA41C100}" dt="2026-07-18T17:54:27.613" v="762" actId="14100"/>
           <ac:picMkLst>
@@ -526,13 +619,13 @@
         </pc:picChg>
       </pc:sldChg>
       <pc:sldChg chg="modSp new mod">
-        <pc:chgData name="priya yadav" userId="355f86fe1ddc0f5d" providerId="LiveId" clId="{412C2972-1147-4A08-BE72-F8DDBA41C100}" dt="2026-07-18T17:57:40.484" v="788" actId="2711"/>
+        <pc:chgData name="priya yadav" userId="355f86fe1ddc0f5d" providerId="LiveId" clId="{412C2972-1147-4A08-BE72-F8DDBA41C100}" dt="2026-07-23T03:46:34.774" v="863"/>
         <pc:sldMkLst>
           <pc:docMk/>
           <pc:sldMk cId="954684660" sldId="276"/>
         </pc:sldMkLst>
         <pc:spChg chg="mod">
-          <ac:chgData name="priya yadav" userId="355f86fe1ddc0f5d" providerId="LiveId" clId="{412C2972-1147-4A08-BE72-F8DDBA41C100}" dt="2026-07-18T17:57:40.484" v="788" actId="2711"/>
+          <ac:chgData name="priya yadav" userId="355f86fe1ddc0f5d" providerId="LiveId" clId="{412C2972-1147-4A08-BE72-F8DDBA41C100}" dt="2026-07-23T03:46:34.774" v="863"/>
           <ac:spMkLst>
             <pc:docMk/>
             <pc:sldMk cId="954684660" sldId="276"/>
@@ -540,11 +633,26 @@
           </ac:spMkLst>
         </pc:spChg>
         <pc:spChg chg="mod">
-          <ac:chgData name="priya yadav" userId="355f86fe1ddc0f5d" providerId="LiveId" clId="{412C2972-1147-4A08-BE72-F8DDBA41C100}" dt="2026-07-18T17:57:33.094" v="787" actId="27636"/>
+          <ac:chgData name="priya yadav" userId="355f86fe1ddc0f5d" providerId="LiveId" clId="{412C2972-1147-4A08-BE72-F8DDBA41C100}" dt="2026-07-23T03:44:39.927" v="847" actId="14100"/>
           <ac:spMkLst>
             <pc:docMk/>
             <pc:sldMk cId="954684660" sldId="276"/>
             <ac:spMk id="3" creationId="{D075E8D3-8FF8-E76D-D9F1-EDD01B915250}"/>
+          </ac:spMkLst>
+        </pc:spChg>
+      </pc:sldChg>
+      <pc:sldChg chg="addSp modSp new mod">
+        <pc:chgData name="priya yadav" userId="355f86fe1ddc0f5d" providerId="LiveId" clId="{412C2972-1147-4A08-BE72-F8DDBA41C100}" dt="2026-07-23T03:42:06.809" v="811" actId="14100"/>
+        <pc:sldMkLst>
+          <pc:docMk/>
+          <pc:sldMk cId="586358492" sldId="277"/>
+        </pc:sldMkLst>
+        <pc:spChg chg="add mod">
+          <ac:chgData name="priya yadav" userId="355f86fe1ddc0f5d" providerId="LiveId" clId="{412C2972-1147-4A08-BE72-F8DDBA41C100}" dt="2026-07-23T03:42:06.809" v="811" actId="14100"/>
+          <ac:spMkLst>
+            <pc:docMk/>
+            <pc:sldMk cId="586358492" sldId="277"/>
+            <ac:spMk id="3" creationId="{4A9069D1-4E77-5CA7-F157-621587741273}"/>
           </ac:spMkLst>
         </pc:spChg>
       </pc:sldChg>
@@ -572,13 +680,7 @@
       </p:grpSpPr>
       <p:sp>
         <p:nvSpPr>
-          <p:cNvPr id="2" name="Title 1">
-            <a:extLst>
-              <a:ext uri="{FF2B5EF4-FFF2-40B4-BE49-F238E27FC236}">
-                <a16:creationId xmlns:a16="http://schemas.microsoft.com/office/drawing/2014/main" id="{8875AE9C-7860-C5AB-B8E2-DF2AC6D00404}"/>
-              </a:ext>
-            </a:extLst>
-          </p:cNvPr>
+          <p:cNvPr id="2" name="Title 1"/>
           <p:cNvSpPr>
             <a:spLocks noGrp="1"/>
           </p:cNvSpPr>
@@ -588,15 +690,15 @@
         </p:nvSpPr>
         <p:spPr>
           <a:xfrm>
-            <a:off x="1524000" y="1122363"/>
-            <a:ext cx="9144000" cy="2387600"/>
+            <a:off x="1154955" y="1447800"/>
+            <a:ext cx="8825658" cy="3329581"/>
           </a:xfrm>
         </p:spPr>
         <p:txBody>
           <a:bodyPr anchor="b"/>
           <a:lstStyle>
-            <a:lvl1pPr algn="ctr">
-              <a:defRPr sz="6000"/>
+            <a:lvl1pPr>
+              <a:defRPr sz="7200"/>
             </a:lvl1pPr>
           </a:lstStyle>
           <a:p>
@@ -604,19 +706,13 @@
               <a:rPr lang="en-US"/>
               <a:t>Click to edit Master title style</a:t>
             </a:r>
-            <a:endParaRPr lang="en-IN"/>
-          </a:p>
-        </p:txBody>
-      </p:sp>
-      <p:sp>
-        <p:nvSpPr>
-          <p:cNvPr id="3" name="Subtitle 2">
-            <a:extLst>
-              <a:ext uri="{FF2B5EF4-FFF2-40B4-BE49-F238E27FC236}">
-                <a16:creationId xmlns:a16="http://schemas.microsoft.com/office/drawing/2014/main" id="{B44FBC6A-F606-74F2-9479-2FBA0A286F3C}"/>
-              </a:ext>
-            </a:extLst>
-          </p:cNvPr>
+            <a:endParaRPr lang="en-US" dirty="0"/>
+          </a:p>
+        </p:txBody>
+      </p:sp>
+      <p:sp>
+        <p:nvSpPr>
+          <p:cNvPr id="3" name="Subtitle 2"/>
           <p:cNvSpPr>
             <a:spLocks noGrp="1"/>
           </p:cNvSpPr>
@@ -626,48 +722,103 @@
         </p:nvSpPr>
         <p:spPr>
           <a:xfrm>
-            <a:off x="1524000" y="3602038"/>
-            <a:ext cx="9144000" cy="1655762"/>
+            <a:off x="1154955" y="4777380"/>
+            <a:ext cx="8825658" cy="861420"/>
           </a:xfrm>
         </p:spPr>
         <p:txBody>
-          <a:bodyPr/>
+          <a:bodyPr anchor="t"/>
           <a:lstStyle>
-            <a:lvl1pPr marL="0" indent="0" algn="ctr">
-              <a:buNone/>
-              <a:defRPr sz="2400"/>
+            <a:lvl1pPr marL="0" indent="0" algn="l">
+              <a:buNone/>
+              <a:defRPr cap="all">
+                <a:solidFill>
+                  <a:schemeClr val="bg2">
+                    <a:lumMod val="40000"/>
+                    <a:lumOff val="60000"/>
+                  </a:schemeClr>
+                </a:solidFill>
+              </a:defRPr>
             </a:lvl1pPr>
             <a:lvl2pPr marL="457200" indent="0" algn="ctr">
               <a:buNone/>
-              <a:defRPr sz="2000"/>
+              <a:defRPr>
+                <a:solidFill>
+                  <a:schemeClr val="tx1">
+                    <a:tint val="75000"/>
+                  </a:schemeClr>
+                </a:solidFill>
+              </a:defRPr>
             </a:lvl2pPr>
             <a:lvl3pPr marL="914400" indent="0" algn="ctr">
               <a:buNone/>
-              <a:defRPr sz="1800"/>
+              <a:defRPr>
+                <a:solidFill>
+                  <a:schemeClr val="tx1">
+                    <a:tint val="75000"/>
+                  </a:schemeClr>
+                </a:solidFill>
+              </a:defRPr>
             </a:lvl3pPr>
             <a:lvl4pPr marL="1371600" indent="0" algn="ctr">
               <a:buNone/>
-              <a:defRPr sz="1600"/>
+              <a:defRPr>
+                <a:solidFill>
+                  <a:schemeClr val="tx1">
+                    <a:tint val="75000"/>
+                  </a:schemeClr>
+                </a:solidFill>
+              </a:defRPr>
             </a:lvl4pPr>
             <a:lvl5pPr marL="1828800" indent="0" algn="ctr">
               <a:buNone/>
-              <a:defRPr sz="1600"/>
+              <a:defRPr>
+                <a:solidFill>
+                  <a:schemeClr val="tx1">
+                    <a:tint val="75000"/>
+                  </a:schemeClr>
+                </a:solidFill>
+              </a:defRPr>
             </a:lvl5pPr>
             <a:lvl6pPr marL="2286000" indent="0" algn="ctr">
               <a:buNone/>
-              <a:defRPr sz="1600"/>
+              <a:defRPr>
+                <a:solidFill>
+                  <a:schemeClr val="tx1">
+                    <a:tint val="75000"/>
+                  </a:schemeClr>
+                </a:solidFill>
+              </a:defRPr>
             </a:lvl6pPr>
             <a:lvl7pPr marL="2743200" indent="0" algn="ctr">
               <a:buNone/>
-              <a:defRPr sz="1600"/>
+              <a:defRPr>
+                <a:solidFill>
+                  <a:schemeClr val="tx1">
+                    <a:tint val="75000"/>
+                  </a:schemeClr>
+                </a:solidFill>
+              </a:defRPr>
             </a:lvl7pPr>
             <a:lvl8pPr marL="3200400" indent="0" algn="ctr">
               <a:buNone/>
-              <a:defRPr sz="1600"/>
+              <a:defRPr>
+                <a:solidFill>
+                  <a:schemeClr val="tx1">
+                    <a:tint val="75000"/>
+                  </a:schemeClr>
+                </a:solidFill>
+              </a:defRPr>
             </a:lvl8pPr>
             <a:lvl9pPr marL="3657600" indent="0" algn="ctr">
               <a:buNone/>
-              <a:defRPr sz="1600"/>
+              <a:defRPr>
+                <a:solidFill>
+                  <a:schemeClr val="tx1">
+                    <a:tint val="75000"/>
+                  </a:schemeClr>
+                </a:solidFill>
+              </a:defRPr>
             </a:lvl9pPr>
           </a:lstStyle>
           <a:p>
@@ -675,19 +826,13 @@
               <a:rPr lang="en-US"/>
               <a:t>Click to edit Master subtitle style</a:t>
             </a:r>
-            <a:endParaRPr lang="en-IN"/>
-          </a:p>
-        </p:txBody>
-      </p:sp>
-      <p:sp>
-        <p:nvSpPr>
-          <p:cNvPr id="4" name="Date Placeholder 3">
-            <a:extLst>
-              <a:ext uri="{FF2B5EF4-FFF2-40B4-BE49-F238E27FC236}">
-                <a16:creationId xmlns:a16="http://schemas.microsoft.com/office/drawing/2014/main" id="{ED943996-C3CF-B1ED-C9F2-37D991C3B30F}"/>
-              </a:ext>
-            </a:extLst>
-          </p:cNvPr>
+            <a:endParaRPr lang="en-US" dirty="0"/>
+          </a:p>
+        </p:txBody>
+      </p:sp>
+      <p:sp>
+        <p:nvSpPr>
+          <p:cNvPr id="4" name="Date Placeholder 3"/>
           <p:cNvSpPr>
             <a:spLocks noGrp="1"/>
           </p:cNvSpPr>
@@ -702,7 +847,7 @@
           <a:p>
             <a:fld id="{051FC713-0BD0-4E67-99B4-F2FDDCE837D7}" type="datetimeFigureOut">
               <a:rPr lang="en-IN" smtClean="0"/>
-              <a:t>18-07-2026</a:t>
+              <a:t>23-07-2026</a:t>
             </a:fld>
             <a:endParaRPr lang="en-IN"/>
           </a:p>
@@ -710,13 +855,7 @@
       </p:sp>
       <p:sp>
         <p:nvSpPr>
-          <p:cNvPr id="5" name="Footer Placeholder 4">
-            <a:extLst>
-              <a:ext uri="{FF2B5EF4-FFF2-40B4-BE49-F238E27FC236}">
-                <a16:creationId xmlns:a16="http://schemas.microsoft.com/office/drawing/2014/main" id="{75B2A7C7-6EED-8ADE-DE7F-4C46A136A193}"/>
-              </a:ext>
-            </a:extLst>
-          </p:cNvPr>
+          <p:cNvPr id="5" name="Footer Placeholder 4"/>
           <p:cNvSpPr>
             <a:spLocks noGrp="1"/>
           </p:cNvSpPr>
@@ -735,13 +874,7 @@
       </p:sp>
       <p:sp>
         <p:nvSpPr>
-          <p:cNvPr id="6" name="Slide Number Placeholder 5">
-            <a:extLst>
-              <a:ext uri="{FF2B5EF4-FFF2-40B4-BE49-F238E27FC236}">
-                <a16:creationId xmlns:a16="http://schemas.microsoft.com/office/drawing/2014/main" id="{98C8B27B-88B9-2BEC-DC23-61AAB5215DF1}"/>
-              </a:ext>
-            </a:extLst>
-          </p:cNvPr>
+          <p:cNvPr id="6" name="Slide Number Placeholder 5"/>
           <p:cNvSpPr>
             <a:spLocks noGrp="1"/>
           </p:cNvSpPr>
@@ -765,7 +898,7 @@
     </p:spTree>
     <p:extLst>
       <p:ext uri="{BB962C8B-B14F-4D97-AF65-F5344CB8AC3E}">
-        <p14:creationId xmlns:p14="http://schemas.microsoft.com/office/powerpoint/2010/main" val="249167130"/>
+        <p14:creationId xmlns:p14="http://schemas.microsoft.com/office/powerpoint/2010/main" val="83017479"/>
       </p:ext>
     </p:extLst>
   </p:cSld>
@@ -776,6 +909,2572 @@
 </file>
 
 <file path=ppt/slideLayouts/slideLayout10.xml><?xml version="1.0" encoding="utf-8"?>
+<p:sldLayout xmlns:a="http://schemas.openxmlformats.org/drawingml/2006/main" xmlns:r="http://schemas.openxmlformats.org/officeDocument/2006/relationships" xmlns:p="http://schemas.openxmlformats.org/presentationml/2006/main" preserve="1">
+  <p:cSld name="Panoramic Picture with Caption">
+    <p:spTree>
+      <p:nvGrpSpPr>
+        <p:cNvPr id="1" name=""/>
+        <p:cNvGrpSpPr/>
+        <p:nvPr/>
+      </p:nvGrpSpPr>
+      <p:grpSpPr>
+        <a:xfrm>
+          <a:off x="0" y="0"/>
+          <a:ext cx="0" cy="0"/>
+          <a:chOff x="0" y="0"/>
+          <a:chExt cx="0" cy="0"/>
+        </a:xfrm>
+      </p:grpSpPr>
+      <p:sp>
+        <p:nvSpPr>
+          <p:cNvPr id="2" name="Title 1"/>
+          <p:cNvSpPr>
+            <a:spLocks noGrp="1"/>
+          </p:cNvSpPr>
+          <p:nvPr>
+            <p:ph type="title"/>
+          </p:nvPr>
+        </p:nvSpPr>
+        <p:spPr>
+          <a:xfrm>
+            <a:off x="1154956" y="4800587"/>
+            <a:ext cx="8825657" cy="566738"/>
+          </a:xfrm>
+        </p:spPr>
+        <p:txBody>
+          <a:bodyPr anchor="b">
+            <a:normAutofit/>
+          </a:bodyPr>
+          <a:lstStyle>
+            <a:lvl1pPr algn="l">
+              <a:defRPr sz="2400" b="0"/>
+            </a:lvl1pPr>
+          </a:lstStyle>
+          <a:p>
+            <a:r>
+              <a:rPr lang="en-US"/>
+              <a:t>Click to edit Master title style</a:t>
+            </a:r>
+            <a:endParaRPr lang="en-US" dirty="0"/>
+          </a:p>
+        </p:txBody>
+      </p:sp>
+      <p:sp>
+        <p:nvSpPr>
+          <p:cNvPr id="3" name="Picture Placeholder 2"/>
+          <p:cNvSpPr>
+            <a:spLocks noGrp="1" noChangeAspect="1"/>
+          </p:cNvSpPr>
+          <p:nvPr>
+            <p:ph type="pic" idx="1"/>
+          </p:nvPr>
+        </p:nvSpPr>
+        <p:spPr>
+          <a:xfrm>
+            <a:off x="1154955" y="685800"/>
+            <a:ext cx="8825658" cy="3640666"/>
+          </a:xfrm>
+          <a:prstGeom prst="roundRect">
+            <a:avLst>
+              <a:gd name="adj" fmla="val 1858"/>
+            </a:avLst>
+          </a:prstGeom>
+          <a:effectLst>
+            <a:outerShdw blurRad="50800" dist="50800" dir="5400000" algn="tl" rotWithShape="0">
+              <a:srgbClr val="000000">
+                <a:alpha val="43000"/>
+              </a:srgbClr>
+            </a:outerShdw>
+          </a:effectLst>
+        </p:spPr>
+        <p:txBody>
+          <a:bodyPr anchor="t">
+            <a:normAutofit/>
+          </a:bodyPr>
+          <a:lstStyle>
+            <a:lvl1pPr marL="0" indent="0" algn="ctr">
+              <a:buNone/>
+              <a:defRPr sz="1600"/>
+            </a:lvl1pPr>
+            <a:lvl2pPr marL="457200" indent="0">
+              <a:buNone/>
+              <a:defRPr sz="1600"/>
+            </a:lvl2pPr>
+            <a:lvl3pPr marL="914400" indent="0">
+              <a:buNone/>
+              <a:defRPr sz="1600"/>
+            </a:lvl3pPr>
+            <a:lvl4pPr marL="1371600" indent="0">
+              <a:buNone/>
+              <a:defRPr sz="1600"/>
+            </a:lvl4pPr>
+            <a:lvl5pPr marL="1828800" indent="0">
+              <a:buNone/>
+              <a:defRPr sz="1600"/>
+            </a:lvl5pPr>
+            <a:lvl6pPr marL="2286000" indent="0">
+              <a:buNone/>
+              <a:defRPr sz="1600"/>
+            </a:lvl6pPr>
+            <a:lvl7pPr marL="2743200" indent="0">
+              <a:buNone/>
+              <a:defRPr sz="1600"/>
+            </a:lvl7pPr>
+            <a:lvl8pPr marL="3200400" indent="0">
+              <a:buNone/>
+              <a:defRPr sz="1600"/>
+            </a:lvl8pPr>
+            <a:lvl9pPr marL="3657600" indent="0">
+              <a:buNone/>
+              <a:defRPr sz="1600"/>
+            </a:lvl9pPr>
+          </a:lstStyle>
+          <a:p>
+            <a:r>
+              <a:rPr lang="en-US"/>
+              <a:t>Click icon to add picture</a:t>
+            </a:r>
+            <a:endParaRPr lang="en-US" dirty="0"/>
+          </a:p>
+        </p:txBody>
+      </p:sp>
+      <p:sp>
+        <p:nvSpPr>
+          <p:cNvPr id="4" name="Text Placeholder 3"/>
+          <p:cNvSpPr>
+            <a:spLocks noGrp="1"/>
+          </p:cNvSpPr>
+          <p:nvPr>
+            <p:ph type="body" sz="half" idx="2"/>
+          </p:nvPr>
+        </p:nvSpPr>
+        <p:spPr>
+          <a:xfrm>
+            <a:off x="1154956" y="5367325"/>
+            <a:ext cx="8825656" cy="493712"/>
+          </a:xfrm>
+        </p:spPr>
+        <p:txBody>
+          <a:bodyPr>
+            <a:normAutofit/>
+          </a:bodyPr>
+          <a:lstStyle>
+            <a:lvl1pPr marL="0" indent="0">
+              <a:buNone/>
+              <a:defRPr sz="1200"/>
+            </a:lvl1pPr>
+            <a:lvl2pPr marL="457200" indent="0">
+              <a:buNone/>
+              <a:defRPr sz="1200"/>
+            </a:lvl2pPr>
+            <a:lvl3pPr marL="914400" indent="0">
+              <a:buNone/>
+              <a:defRPr sz="1000"/>
+            </a:lvl3pPr>
+            <a:lvl4pPr marL="1371600" indent="0">
+              <a:buNone/>
+              <a:defRPr sz="900"/>
+            </a:lvl4pPr>
+            <a:lvl5pPr marL="1828800" indent="0">
+              <a:buNone/>
+              <a:defRPr sz="900"/>
+            </a:lvl5pPr>
+            <a:lvl6pPr marL="2286000" indent="0">
+              <a:buNone/>
+              <a:defRPr sz="900"/>
+            </a:lvl6pPr>
+            <a:lvl7pPr marL="2743200" indent="0">
+              <a:buNone/>
+              <a:defRPr sz="900"/>
+            </a:lvl7pPr>
+            <a:lvl8pPr marL="3200400" indent="0">
+              <a:buNone/>
+              <a:defRPr sz="900"/>
+            </a:lvl8pPr>
+            <a:lvl9pPr marL="3657600" indent="0">
+              <a:buNone/>
+              <a:defRPr sz="900"/>
+            </a:lvl9pPr>
+          </a:lstStyle>
+          <a:p>
+            <a:pPr lvl="0"/>
+            <a:r>
+              <a:rPr lang="en-US"/>
+              <a:t>Click to edit Master text styles</a:t>
+            </a:r>
+          </a:p>
+        </p:txBody>
+      </p:sp>
+      <p:sp>
+        <p:nvSpPr>
+          <p:cNvPr id="5" name="Date Placeholder 4"/>
+          <p:cNvSpPr>
+            <a:spLocks noGrp="1"/>
+          </p:cNvSpPr>
+          <p:nvPr>
+            <p:ph type="dt" sz="half" idx="10"/>
+          </p:nvPr>
+        </p:nvSpPr>
+        <p:spPr/>
+        <p:txBody>
+          <a:bodyPr/>
+          <a:lstStyle/>
+          <a:p>
+            <a:fld id="{051FC713-0BD0-4E67-99B4-F2FDDCE837D7}" type="datetimeFigureOut">
+              <a:rPr lang="en-IN" smtClean="0"/>
+              <a:t>23-07-2026</a:t>
+            </a:fld>
+            <a:endParaRPr lang="en-IN"/>
+          </a:p>
+        </p:txBody>
+      </p:sp>
+      <p:sp>
+        <p:nvSpPr>
+          <p:cNvPr id="6" name="Footer Placeholder 5"/>
+          <p:cNvSpPr>
+            <a:spLocks noGrp="1"/>
+          </p:cNvSpPr>
+          <p:nvPr>
+            <p:ph type="ftr" sz="quarter" idx="11"/>
+          </p:nvPr>
+        </p:nvSpPr>
+        <p:spPr/>
+        <p:txBody>
+          <a:bodyPr/>
+          <a:lstStyle/>
+          <a:p>
+            <a:endParaRPr lang="en-IN"/>
+          </a:p>
+        </p:txBody>
+      </p:sp>
+      <p:sp>
+        <p:nvSpPr>
+          <p:cNvPr id="7" name="Slide Number Placeholder 6"/>
+          <p:cNvSpPr>
+            <a:spLocks noGrp="1"/>
+          </p:cNvSpPr>
+          <p:nvPr>
+            <p:ph type="sldNum" sz="quarter" idx="12"/>
+          </p:nvPr>
+        </p:nvSpPr>
+        <p:spPr/>
+        <p:txBody>
+          <a:bodyPr/>
+          <a:lstStyle/>
+          <a:p>
+            <a:fld id="{4E2B1D73-CC5E-470E-B919-F6C029CFEF81}" type="slidenum">
+              <a:rPr lang="en-IN" smtClean="0"/>
+              <a:t>‹#›</a:t>
+            </a:fld>
+            <a:endParaRPr lang="en-IN"/>
+          </a:p>
+        </p:txBody>
+      </p:sp>
+    </p:spTree>
+    <p:extLst>
+      <p:ext uri="{BB962C8B-B14F-4D97-AF65-F5344CB8AC3E}">
+        <p14:creationId xmlns:p14="http://schemas.microsoft.com/office/powerpoint/2010/main" val="1478183005"/>
+      </p:ext>
+    </p:extLst>
+  </p:cSld>
+  <p:clrMapOvr>
+    <a:masterClrMapping/>
+  </p:clrMapOvr>
+</p:sldLayout>
+</file>
+
+<file path=ppt/slideLayouts/slideLayout11.xml><?xml version="1.0" encoding="utf-8"?>
+<p:sldLayout xmlns:a="http://schemas.openxmlformats.org/drawingml/2006/main" xmlns:r="http://schemas.openxmlformats.org/officeDocument/2006/relationships" xmlns:p="http://schemas.openxmlformats.org/presentationml/2006/main" preserve="1">
+  <p:cSld name="Title and Caption">
+    <p:spTree>
+      <p:nvGrpSpPr>
+        <p:cNvPr id="1" name=""/>
+        <p:cNvGrpSpPr/>
+        <p:nvPr/>
+      </p:nvGrpSpPr>
+      <p:grpSpPr>
+        <a:xfrm>
+          <a:off x="0" y="0"/>
+          <a:ext cx="0" cy="0"/>
+          <a:chOff x="0" y="0"/>
+          <a:chExt cx="0" cy="0"/>
+        </a:xfrm>
+      </p:grpSpPr>
+      <p:sp>
+        <p:nvSpPr>
+          <p:cNvPr id="2" name="Title 1"/>
+          <p:cNvSpPr>
+            <a:spLocks noGrp="1"/>
+          </p:cNvSpPr>
+          <p:nvPr>
+            <p:ph type="title"/>
+          </p:nvPr>
+        </p:nvSpPr>
+        <p:spPr>
+          <a:xfrm>
+            <a:off x="1154954" y="1447800"/>
+            <a:ext cx="8825659" cy="1981200"/>
+          </a:xfrm>
+        </p:spPr>
+        <p:txBody>
+          <a:bodyPr/>
+          <a:lstStyle>
+            <a:lvl1pPr>
+              <a:defRPr sz="4800"/>
+            </a:lvl1pPr>
+          </a:lstStyle>
+          <a:p>
+            <a:r>
+              <a:rPr lang="en-US"/>
+              <a:t>Click to edit Master title style</a:t>
+            </a:r>
+            <a:endParaRPr lang="en-US" dirty="0"/>
+          </a:p>
+        </p:txBody>
+      </p:sp>
+      <p:sp>
+        <p:nvSpPr>
+          <p:cNvPr id="8" name="Text Placeholder 3"/>
+          <p:cNvSpPr>
+            <a:spLocks noGrp="1"/>
+          </p:cNvSpPr>
+          <p:nvPr>
+            <p:ph type="body" sz="half" idx="2"/>
+          </p:nvPr>
+        </p:nvSpPr>
+        <p:spPr>
+          <a:xfrm>
+            <a:off x="1154954" y="3657600"/>
+            <a:ext cx="8825659" cy="2362200"/>
+          </a:xfrm>
+        </p:spPr>
+        <p:txBody>
+          <a:bodyPr anchor="ctr">
+            <a:normAutofit/>
+          </a:bodyPr>
+          <a:lstStyle>
+            <a:lvl1pPr marL="0" indent="0">
+              <a:buNone/>
+              <a:defRPr sz="1800"/>
+            </a:lvl1pPr>
+            <a:lvl2pPr marL="457200" indent="0">
+              <a:buNone/>
+              <a:defRPr sz="1200"/>
+            </a:lvl2pPr>
+            <a:lvl3pPr marL="914400" indent="0">
+              <a:buNone/>
+              <a:defRPr sz="1000"/>
+            </a:lvl3pPr>
+            <a:lvl4pPr marL="1371600" indent="0">
+              <a:buNone/>
+              <a:defRPr sz="900"/>
+            </a:lvl4pPr>
+            <a:lvl5pPr marL="1828800" indent="0">
+              <a:buNone/>
+              <a:defRPr sz="900"/>
+            </a:lvl5pPr>
+            <a:lvl6pPr marL="2286000" indent="0">
+              <a:buNone/>
+              <a:defRPr sz="900"/>
+            </a:lvl6pPr>
+            <a:lvl7pPr marL="2743200" indent="0">
+              <a:buNone/>
+              <a:defRPr sz="900"/>
+            </a:lvl7pPr>
+            <a:lvl8pPr marL="3200400" indent="0">
+              <a:buNone/>
+              <a:defRPr sz="900"/>
+            </a:lvl8pPr>
+            <a:lvl9pPr marL="3657600" indent="0">
+              <a:buNone/>
+              <a:defRPr sz="900"/>
+            </a:lvl9pPr>
+          </a:lstStyle>
+          <a:p>
+            <a:pPr lvl="0"/>
+            <a:r>
+              <a:rPr lang="en-US"/>
+              <a:t>Click to edit Master text styles</a:t>
+            </a:r>
+          </a:p>
+        </p:txBody>
+      </p:sp>
+      <p:sp>
+        <p:nvSpPr>
+          <p:cNvPr id="4" name="Date Placeholder 3"/>
+          <p:cNvSpPr>
+            <a:spLocks noGrp="1"/>
+          </p:cNvSpPr>
+          <p:nvPr>
+            <p:ph type="dt" sz="half" idx="10"/>
+          </p:nvPr>
+        </p:nvSpPr>
+        <p:spPr/>
+        <p:txBody>
+          <a:bodyPr/>
+          <a:lstStyle/>
+          <a:p>
+            <a:fld id="{051FC713-0BD0-4E67-99B4-F2FDDCE837D7}" type="datetimeFigureOut">
+              <a:rPr lang="en-IN" smtClean="0"/>
+              <a:t>23-07-2026</a:t>
+            </a:fld>
+            <a:endParaRPr lang="en-IN"/>
+          </a:p>
+        </p:txBody>
+      </p:sp>
+      <p:sp>
+        <p:nvSpPr>
+          <p:cNvPr id="5" name="Footer Placeholder 4"/>
+          <p:cNvSpPr>
+            <a:spLocks noGrp="1"/>
+          </p:cNvSpPr>
+          <p:nvPr>
+            <p:ph type="ftr" sz="quarter" idx="11"/>
+          </p:nvPr>
+        </p:nvSpPr>
+        <p:spPr/>
+        <p:txBody>
+          <a:bodyPr/>
+          <a:lstStyle/>
+          <a:p>
+            <a:endParaRPr lang="en-IN"/>
+          </a:p>
+        </p:txBody>
+      </p:sp>
+      <p:sp>
+        <p:nvSpPr>
+          <p:cNvPr id="6" name="Slide Number Placeholder 5"/>
+          <p:cNvSpPr>
+            <a:spLocks noGrp="1"/>
+          </p:cNvSpPr>
+          <p:nvPr>
+            <p:ph type="sldNum" sz="quarter" idx="12"/>
+          </p:nvPr>
+        </p:nvSpPr>
+        <p:spPr/>
+        <p:txBody>
+          <a:bodyPr/>
+          <a:lstStyle/>
+          <a:p>
+            <a:fld id="{4E2B1D73-CC5E-470E-B919-F6C029CFEF81}" type="slidenum">
+              <a:rPr lang="en-IN" smtClean="0"/>
+              <a:t>‹#›</a:t>
+            </a:fld>
+            <a:endParaRPr lang="en-IN"/>
+          </a:p>
+        </p:txBody>
+      </p:sp>
+    </p:spTree>
+    <p:extLst>
+      <p:ext uri="{BB962C8B-B14F-4D97-AF65-F5344CB8AC3E}">
+        <p14:creationId xmlns:p14="http://schemas.microsoft.com/office/powerpoint/2010/main" val="2453167214"/>
+      </p:ext>
+    </p:extLst>
+  </p:cSld>
+  <p:clrMapOvr>
+    <a:masterClrMapping/>
+  </p:clrMapOvr>
+</p:sldLayout>
+</file>
+
+<file path=ppt/slideLayouts/slideLayout12.xml><?xml version="1.0" encoding="utf-8"?>
+<p:sldLayout xmlns:a="http://schemas.openxmlformats.org/drawingml/2006/main" xmlns:r="http://schemas.openxmlformats.org/officeDocument/2006/relationships" xmlns:p="http://schemas.openxmlformats.org/presentationml/2006/main" preserve="1">
+  <p:cSld name="Quote with Caption">
+    <p:spTree>
+      <p:nvGrpSpPr>
+        <p:cNvPr id="1" name=""/>
+        <p:cNvGrpSpPr/>
+        <p:nvPr/>
+      </p:nvGrpSpPr>
+      <p:grpSpPr>
+        <a:xfrm>
+          <a:off x="0" y="0"/>
+          <a:ext cx="0" cy="0"/>
+          <a:chOff x="0" y="0"/>
+          <a:chExt cx="0" cy="0"/>
+        </a:xfrm>
+      </p:grpSpPr>
+      <p:sp>
+        <p:nvSpPr>
+          <p:cNvPr id="2" name="Title 1"/>
+          <p:cNvSpPr>
+            <a:spLocks noGrp="1"/>
+          </p:cNvSpPr>
+          <p:nvPr>
+            <p:ph type="title"/>
+          </p:nvPr>
+        </p:nvSpPr>
+        <p:spPr>
+          <a:xfrm>
+            <a:off x="1574801" y="1447800"/>
+            <a:ext cx="7999315" cy="2323374"/>
+          </a:xfrm>
+        </p:spPr>
+        <p:txBody>
+          <a:bodyPr/>
+          <a:lstStyle>
+            <a:lvl1pPr>
+              <a:defRPr sz="4800"/>
+            </a:lvl1pPr>
+          </a:lstStyle>
+          <a:p>
+            <a:r>
+              <a:rPr lang="en-US"/>
+              <a:t>Click to edit Master title style</a:t>
+            </a:r>
+            <a:endParaRPr lang="en-US" dirty="0"/>
+          </a:p>
+        </p:txBody>
+      </p:sp>
+      <p:sp>
+        <p:nvSpPr>
+          <p:cNvPr id="11" name="Text Placeholder 3"/>
+          <p:cNvSpPr>
+            <a:spLocks noGrp="1"/>
+          </p:cNvSpPr>
+          <p:nvPr>
+            <p:ph type="body" sz="half" idx="14"/>
+          </p:nvPr>
+        </p:nvSpPr>
+        <p:spPr>
+          <a:xfrm>
+            <a:off x="1930400" y="3771174"/>
+            <a:ext cx="7279649" cy="342174"/>
+          </a:xfrm>
+        </p:spPr>
+        <p:txBody>
+          <a:bodyPr vert="horz" lIns="91440" tIns="45720" rIns="91440" bIns="45720" rtlCol="0" anchor="t">
+            <a:normAutofit/>
+          </a:bodyPr>
+          <a:lstStyle>
+            <a:lvl1pPr marL="0" indent="0">
+              <a:buNone/>
+              <a:defRPr lang="en-US" sz="1400" b="0" i="0" kern="1200" cap="small" dirty="0">
+                <a:solidFill>
+                  <a:schemeClr val="bg2">
+                    <a:lumMod val="40000"/>
+                    <a:lumOff val="60000"/>
+                  </a:schemeClr>
+                </a:solidFill>
+                <a:latin typeface="+mj-lt"/>
+                <a:ea typeface="+mj-ea"/>
+                <a:cs typeface="+mj-cs"/>
+              </a:defRPr>
+            </a:lvl1pPr>
+            <a:lvl2pPr marL="457200" indent="0">
+              <a:buNone/>
+              <a:defRPr sz="1200"/>
+            </a:lvl2pPr>
+            <a:lvl3pPr marL="914400" indent="0">
+              <a:buNone/>
+              <a:defRPr sz="1000"/>
+            </a:lvl3pPr>
+            <a:lvl4pPr marL="1371600" indent="0">
+              <a:buNone/>
+              <a:defRPr sz="900"/>
+            </a:lvl4pPr>
+            <a:lvl5pPr marL="1828800" indent="0">
+              <a:buNone/>
+              <a:defRPr sz="900"/>
+            </a:lvl5pPr>
+            <a:lvl6pPr marL="2286000" indent="0">
+              <a:buNone/>
+              <a:defRPr sz="900"/>
+            </a:lvl6pPr>
+            <a:lvl7pPr marL="2743200" indent="0">
+              <a:buNone/>
+              <a:defRPr sz="900"/>
+            </a:lvl7pPr>
+            <a:lvl8pPr marL="3200400" indent="0">
+              <a:buNone/>
+              <a:defRPr sz="900"/>
+            </a:lvl8pPr>
+            <a:lvl9pPr marL="3657600" indent="0">
+              <a:buNone/>
+              <a:defRPr sz="900"/>
+            </a:lvl9pPr>
+          </a:lstStyle>
+          <a:p>
+            <a:pPr marL="0" lvl="0" indent="0">
+              <a:buNone/>
+            </a:pPr>
+            <a:r>
+              <a:rPr lang="en-US"/>
+              <a:t>Click to edit Master text styles</a:t>
+            </a:r>
+          </a:p>
+        </p:txBody>
+      </p:sp>
+      <p:sp>
+        <p:nvSpPr>
+          <p:cNvPr id="10" name="Text Placeholder 3"/>
+          <p:cNvSpPr>
+            <a:spLocks noGrp="1"/>
+          </p:cNvSpPr>
+          <p:nvPr>
+            <p:ph type="body" sz="half" idx="2"/>
+          </p:nvPr>
+        </p:nvSpPr>
+        <p:spPr>
+          <a:xfrm>
+            <a:off x="1154954" y="4350657"/>
+            <a:ext cx="8825659" cy="1676400"/>
+          </a:xfrm>
+        </p:spPr>
+        <p:txBody>
+          <a:bodyPr anchor="ctr">
+            <a:normAutofit/>
+          </a:bodyPr>
+          <a:lstStyle>
+            <a:lvl1pPr marL="0" indent="0">
+              <a:buNone/>
+              <a:defRPr sz="1800"/>
+            </a:lvl1pPr>
+            <a:lvl2pPr marL="457200" indent="0">
+              <a:buNone/>
+              <a:defRPr sz="1200"/>
+            </a:lvl2pPr>
+            <a:lvl3pPr marL="914400" indent="0">
+              <a:buNone/>
+              <a:defRPr sz="1000"/>
+            </a:lvl3pPr>
+            <a:lvl4pPr marL="1371600" indent="0">
+              <a:buNone/>
+              <a:defRPr sz="900"/>
+            </a:lvl4pPr>
+            <a:lvl5pPr marL="1828800" indent="0">
+              <a:buNone/>
+              <a:defRPr sz="900"/>
+            </a:lvl5pPr>
+            <a:lvl6pPr marL="2286000" indent="0">
+              <a:buNone/>
+              <a:defRPr sz="900"/>
+            </a:lvl6pPr>
+            <a:lvl7pPr marL="2743200" indent="0">
+              <a:buNone/>
+              <a:defRPr sz="900"/>
+            </a:lvl7pPr>
+            <a:lvl8pPr marL="3200400" indent="0">
+              <a:buNone/>
+              <a:defRPr sz="900"/>
+            </a:lvl8pPr>
+            <a:lvl9pPr marL="3657600" indent="0">
+              <a:buNone/>
+              <a:defRPr sz="900"/>
+            </a:lvl9pPr>
+          </a:lstStyle>
+          <a:p>
+            <a:pPr lvl="0"/>
+            <a:r>
+              <a:rPr lang="en-US"/>
+              <a:t>Click to edit Master text styles</a:t>
+            </a:r>
+          </a:p>
+        </p:txBody>
+      </p:sp>
+      <p:sp>
+        <p:nvSpPr>
+          <p:cNvPr id="4" name="Date Placeholder 3"/>
+          <p:cNvSpPr>
+            <a:spLocks noGrp="1"/>
+          </p:cNvSpPr>
+          <p:nvPr>
+            <p:ph type="dt" sz="half" idx="10"/>
+          </p:nvPr>
+        </p:nvSpPr>
+        <p:spPr/>
+        <p:txBody>
+          <a:bodyPr/>
+          <a:lstStyle/>
+          <a:p>
+            <a:fld id="{051FC713-0BD0-4E67-99B4-F2FDDCE837D7}" type="datetimeFigureOut">
+              <a:rPr lang="en-IN" smtClean="0"/>
+              <a:t>23-07-2026</a:t>
+            </a:fld>
+            <a:endParaRPr lang="en-IN"/>
+          </a:p>
+        </p:txBody>
+      </p:sp>
+      <p:sp>
+        <p:nvSpPr>
+          <p:cNvPr id="5" name="Footer Placeholder 4"/>
+          <p:cNvSpPr>
+            <a:spLocks noGrp="1"/>
+          </p:cNvSpPr>
+          <p:nvPr>
+            <p:ph type="ftr" sz="quarter" idx="11"/>
+          </p:nvPr>
+        </p:nvSpPr>
+        <p:spPr/>
+        <p:txBody>
+          <a:bodyPr/>
+          <a:lstStyle/>
+          <a:p>
+            <a:endParaRPr lang="en-IN"/>
+          </a:p>
+        </p:txBody>
+      </p:sp>
+      <p:sp>
+        <p:nvSpPr>
+          <p:cNvPr id="6" name="Slide Number Placeholder 5"/>
+          <p:cNvSpPr>
+            <a:spLocks noGrp="1"/>
+          </p:cNvSpPr>
+          <p:nvPr>
+            <p:ph type="sldNum" sz="quarter" idx="12"/>
+          </p:nvPr>
+        </p:nvSpPr>
+        <p:spPr/>
+        <p:txBody>
+          <a:bodyPr/>
+          <a:lstStyle/>
+          <a:p>
+            <a:fld id="{4E2B1D73-CC5E-470E-B919-F6C029CFEF81}" type="slidenum">
+              <a:rPr lang="en-IN" smtClean="0"/>
+              <a:t>‹#›</a:t>
+            </a:fld>
+            <a:endParaRPr lang="en-IN"/>
+          </a:p>
+        </p:txBody>
+      </p:sp>
+      <p:sp>
+        <p:nvSpPr>
+          <p:cNvPr id="12" name="TextBox 11"/>
+          <p:cNvSpPr txBox="1"/>
+          <p:nvPr/>
+        </p:nvSpPr>
+        <p:spPr>
+          <a:xfrm>
+            <a:off x="898295" y="971253"/>
+            <a:ext cx="801912" cy="1969770"/>
+          </a:xfrm>
+          <a:prstGeom prst="rect">
+            <a:avLst/>
+          </a:prstGeom>
+          <a:noFill/>
+        </p:spPr>
+        <p:txBody>
+          <a:bodyPr wrap="square" rtlCol="0">
+            <a:spAutoFit/>
+          </a:bodyPr>
+          <a:lstStyle>
+            <a:defPPr>
+              <a:defRPr lang="en-US"/>
+            </a:defPPr>
+            <a:lvl1pPr algn="r">
+              <a:defRPr sz="12200" b="0" i="0">
+                <a:solidFill>
+                  <a:schemeClr val="bg2">
+                    <a:lumMod val="40000"/>
+                    <a:lumOff val="60000"/>
+                  </a:schemeClr>
+                </a:solidFill>
+                <a:latin typeface="Arial"/>
+                <a:ea typeface="+mj-ea"/>
+                <a:cs typeface="+mj-cs"/>
+              </a:defRPr>
+            </a:lvl1pPr>
+          </a:lstStyle>
+          <a:p>
+            <a:pPr lvl="0"/>
+            <a:r>
+              <a:rPr lang="en-US" dirty="0"/>
+              <a:t>“</a:t>
+            </a:r>
+          </a:p>
+        </p:txBody>
+      </p:sp>
+      <p:sp>
+        <p:nvSpPr>
+          <p:cNvPr id="15" name="TextBox 14"/>
+          <p:cNvSpPr txBox="1"/>
+          <p:nvPr/>
+        </p:nvSpPr>
+        <p:spPr>
+          <a:xfrm>
+            <a:off x="9330490" y="2613787"/>
+            <a:ext cx="801912" cy="1969770"/>
+          </a:xfrm>
+          <a:prstGeom prst="rect">
+            <a:avLst/>
+          </a:prstGeom>
+          <a:noFill/>
+        </p:spPr>
+        <p:txBody>
+          <a:bodyPr wrap="square" rtlCol="0">
+            <a:spAutoFit/>
+          </a:bodyPr>
+          <a:lstStyle>
+            <a:defPPr>
+              <a:defRPr lang="en-US"/>
+            </a:defPPr>
+            <a:lvl1pPr algn="r">
+              <a:defRPr sz="12200" b="0" i="0">
+                <a:solidFill>
+                  <a:schemeClr val="bg2">
+                    <a:lumMod val="40000"/>
+                    <a:lumOff val="60000"/>
+                  </a:schemeClr>
+                </a:solidFill>
+                <a:latin typeface="Arial"/>
+                <a:ea typeface="+mj-ea"/>
+                <a:cs typeface="+mj-cs"/>
+              </a:defRPr>
+            </a:lvl1pPr>
+          </a:lstStyle>
+          <a:p>
+            <a:pPr lvl="0"/>
+            <a:r>
+              <a:rPr lang="en-US" dirty="0"/>
+              <a:t>”</a:t>
+            </a:r>
+          </a:p>
+        </p:txBody>
+      </p:sp>
+    </p:spTree>
+    <p:extLst>
+      <p:ext uri="{BB962C8B-B14F-4D97-AF65-F5344CB8AC3E}">
+        <p14:creationId xmlns:p14="http://schemas.microsoft.com/office/powerpoint/2010/main" val="2984679378"/>
+      </p:ext>
+    </p:extLst>
+  </p:cSld>
+  <p:clrMapOvr>
+    <a:masterClrMapping/>
+  </p:clrMapOvr>
+</p:sldLayout>
+</file>
+
+<file path=ppt/slideLayouts/slideLayout13.xml><?xml version="1.0" encoding="utf-8"?>
+<p:sldLayout xmlns:a="http://schemas.openxmlformats.org/drawingml/2006/main" xmlns:r="http://schemas.openxmlformats.org/officeDocument/2006/relationships" xmlns:p="http://schemas.openxmlformats.org/presentationml/2006/main" preserve="1">
+  <p:cSld name="Name Card">
+    <p:spTree>
+      <p:nvGrpSpPr>
+        <p:cNvPr id="1" name=""/>
+        <p:cNvGrpSpPr/>
+        <p:nvPr/>
+      </p:nvGrpSpPr>
+      <p:grpSpPr>
+        <a:xfrm>
+          <a:off x="0" y="0"/>
+          <a:ext cx="0" cy="0"/>
+          <a:chOff x="0" y="0"/>
+          <a:chExt cx="0" cy="0"/>
+        </a:xfrm>
+      </p:grpSpPr>
+      <p:sp>
+        <p:nvSpPr>
+          <p:cNvPr id="2" name="Title 1"/>
+          <p:cNvSpPr>
+            <a:spLocks noGrp="1"/>
+          </p:cNvSpPr>
+          <p:nvPr>
+            <p:ph type="title"/>
+          </p:nvPr>
+        </p:nvSpPr>
+        <p:spPr>
+          <a:xfrm>
+            <a:off x="1154954" y="3124201"/>
+            <a:ext cx="8825660" cy="1653180"/>
+          </a:xfrm>
+        </p:spPr>
+        <p:txBody>
+          <a:bodyPr anchor="b"/>
+          <a:lstStyle>
+            <a:lvl1pPr algn="l">
+              <a:defRPr sz="4000" b="0" cap="none"/>
+            </a:lvl1pPr>
+          </a:lstStyle>
+          <a:p>
+            <a:r>
+              <a:rPr lang="en-US"/>
+              <a:t>Click to edit Master title style</a:t>
+            </a:r>
+            <a:endParaRPr lang="en-US" dirty="0"/>
+          </a:p>
+        </p:txBody>
+      </p:sp>
+      <p:sp>
+        <p:nvSpPr>
+          <p:cNvPr id="3" name="Text Placeholder 2"/>
+          <p:cNvSpPr>
+            <a:spLocks noGrp="1"/>
+          </p:cNvSpPr>
+          <p:nvPr>
+            <p:ph type="body" idx="1"/>
+          </p:nvPr>
+        </p:nvSpPr>
+        <p:spPr>
+          <a:xfrm>
+            <a:off x="1154954" y="4777381"/>
+            <a:ext cx="8825659" cy="860400"/>
+          </a:xfrm>
+        </p:spPr>
+        <p:txBody>
+          <a:bodyPr anchor="t"/>
+          <a:lstStyle>
+            <a:lvl1pPr marL="0" indent="0" algn="l">
+              <a:buNone/>
+              <a:defRPr sz="2000" cap="none">
+                <a:solidFill>
+                  <a:schemeClr val="bg2">
+                    <a:lumMod val="40000"/>
+                    <a:lumOff val="60000"/>
+                  </a:schemeClr>
+                </a:solidFill>
+              </a:defRPr>
+            </a:lvl1pPr>
+            <a:lvl2pPr marL="457200" indent="0">
+              <a:buNone/>
+              <a:defRPr sz="1800">
+                <a:solidFill>
+                  <a:schemeClr val="tx1">
+                    <a:tint val="75000"/>
+                  </a:schemeClr>
+                </a:solidFill>
+              </a:defRPr>
+            </a:lvl2pPr>
+            <a:lvl3pPr marL="914400" indent="0">
+              <a:buNone/>
+              <a:defRPr sz="1600">
+                <a:solidFill>
+                  <a:schemeClr val="tx1">
+                    <a:tint val="75000"/>
+                  </a:schemeClr>
+                </a:solidFill>
+              </a:defRPr>
+            </a:lvl3pPr>
+            <a:lvl4pPr marL="1371600" indent="0">
+              <a:buNone/>
+              <a:defRPr sz="1400">
+                <a:solidFill>
+                  <a:schemeClr val="tx1">
+                    <a:tint val="75000"/>
+                  </a:schemeClr>
+                </a:solidFill>
+              </a:defRPr>
+            </a:lvl4pPr>
+            <a:lvl5pPr marL="1828800" indent="0">
+              <a:buNone/>
+              <a:defRPr sz="1400">
+                <a:solidFill>
+                  <a:schemeClr val="tx1">
+                    <a:tint val="75000"/>
+                  </a:schemeClr>
+                </a:solidFill>
+              </a:defRPr>
+            </a:lvl5pPr>
+            <a:lvl6pPr marL="2286000" indent="0">
+              <a:buNone/>
+              <a:defRPr sz="1400">
+                <a:solidFill>
+                  <a:schemeClr val="tx1">
+                    <a:tint val="75000"/>
+                  </a:schemeClr>
+                </a:solidFill>
+              </a:defRPr>
+            </a:lvl6pPr>
+            <a:lvl7pPr marL="2743200" indent="0">
+              <a:buNone/>
+              <a:defRPr sz="1400">
+                <a:solidFill>
+                  <a:schemeClr val="tx1">
+                    <a:tint val="75000"/>
+                  </a:schemeClr>
+                </a:solidFill>
+              </a:defRPr>
+            </a:lvl7pPr>
+            <a:lvl8pPr marL="3200400" indent="0">
+              <a:buNone/>
+              <a:defRPr sz="1400">
+                <a:solidFill>
+                  <a:schemeClr val="tx1">
+                    <a:tint val="75000"/>
+                  </a:schemeClr>
+                </a:solidFill>
+              </a:defRPr>
+            </a:lvl8pPr>
+            <a:lvl9pPr marL="3657600" indent="0">
+              <a:buNone/>
+              <a:defRPr sz="1400">
+                <a:solidFill>
+                  <a:schemeClr val="tx1">
+                    <a:tint val="75000"/>
+                  </a:schemeClr>
+                </a:solidFill>
+              </a:defRPr>
+            </a:lvl9pPr>
+          </a:lstStyle>
+          <a:p>
+            <a:pPr lvl="0"/>
+            <a:r>
+              <a:rPr lang="en-US"/>
+              <a:t>Click to edit Master text styles</a:t>
+            </a:r>
+          </a:p>
+        </p:txBody>
+      </p:sp>
+      <p:sp>
+        <p:nvSpPr>
+          <p:cNvPr id="4" name="Date Placeholder 3"/>
+          <p:cNvSpPr>
+            <a:spLocks noGrp="1"/>
+          </p:cNvSpPr>
+          <p:nvPr>
+            <p:ph type="dt" sz="half" idx="10"/>
+          </p:nvPr>
+        </p:nvSpPr>
+        <p:spPr/>
+        <p:txBody>
+          <a:bodyPr/>
+          <a:lstStyle/>
+          <a:p>
+            <a:fld id="{051FC713-0BD0-4E67-99B4-F2FDDCE837D7}" type="datetimeFigureOut">
+              <a:rPr lang="en-IN" smtClean="0"/>
+              <a:t>23-07-2026</a:t>
+            </a:fld>
+            <a:endParaRPr lang="en-IN"/>
+          </a:p>
+        </p:txBody>
+      </p:sp>
+      <p:sp>
+        <p:nvSpPr>
+          <p:cNvPr id="5" name="Footer Placeholder 4"/>
+          <p:cNvSpPr>
+            <a:spLocks noGrp="1"/>
+          </p:cNvSpPr>
+          <p:nvPr>
+            <p:ph type="ftr" sz="quarter" idx="11"/>
+          </p:nvPr>
+        </p:nvSpPr>
+        <p:spPr/>
+        <p:txBody>
+          <a:bodyPr/>
+          <a:lstStyle/>
+          <a:p>
+            <a:endParaRPr lang="en-IN"/>
+          </a:p>
+        </p:txBody>
+      </p:sp>
+      <p:sp>
+        <p:nvSpPr>
+          <p:cNvPr id="6" name="Slide Number Placeholder 5"/>
+          <p:cNvSpPr>
+            <a:spLocks noGrp="1"/>
+          </p:cNvSpPr>
+          <p:nvPr>
+            <p:ph type="sldNum" sz="quarter" idx="12"/>
+          </p:nvPr>
+        </p:nvSpPr>
+        <p:spPr/>
+        <p:txBody>
+          <a:bodyPr/>
+          <a:lstStyle/>
+          <a:p>
+            <a:fld id="{4E2B1D73-CC5E-470E-B919-F6C029CFEF81}" type="slidenum">
+              <a:rPr lang="en-IN" smtClean="0"/>
+              <a:t>‹#›</a:t>
+            </a:fld>
+            <a:endParaRPr lang="en-IN"/>
+          </a:p>
+        </p:txBody>
+      </p:sp>
+    </p:spTree>
+    <p:extLst>
+      <p:ext uri="{BB962C8B-B14F-4D97-AF65-F5344CB8AC3E}">
+        <p14:creationId xmlns:p14="http://schemas.microsoft.com/office/powerpoint/2010/main" val="341670862"/>
+      </p:ext>
+    </p:extLst>
+  </p:cSld>
+  <p:clrMapOvr>
+    <a:masterClrMapping/>
+  </p:clrMapOvr>
+</p:sldLayout>
+</file>
+
+<file path=ppt/slideLayouts/slideLayout14.xml><?xml version="1.0" encoding="utf-8"?>
+<p:sldLayout xmlns:a="http://schemas.openxmlformats.org/drawingml/2006/main" xmlns:r="http://schemas.openxmlformats.org/officeDocument/2006/relationships" xmlns:p="http://schemas.openxmlformats.org/presentationml/2006/main" preserve="1">
+  <p:cSld name="3 Column">
+    <p:spTree>
+      <p:nvGrpSpPr>
+        <p:cNvPr id="1" name=""/>
+        <p:cNvGrpSpPr/>
+        <p:nvPr/>
+      </p:nvGrpSpPr>
+      <p:grpSpPr>
+        <a:xfrm>
+          <a:off x="0" y="0"/>
+          <a:ext cx="0" cy="0"/>
+          <a:chOff x="0" y="0"/>
+          <a:chExt cx="0" cy="0"/>
+        </a:xfrm>
+      </p:grpSpPr>
+      <p:sp>
+        <p:nvSpPr>
+          <p:cNvPr id="2" name="Title 1"/>
+          <p:cNvSpPr>
+            <a:spLocks noGrp="1"/>
+          </p:cNvSpPr>
+          <p:nvPr>
+            <p:ph type="title"/>
+          </p:nvPr>
+        </p:nvSpPr>
+        <p:spPr/>
+        <p:txBody>
+          <a:bodyPr/>
+          <a:lstStyle>
+            <a:lvl1pPr>
+              <a:defRPr sz="4200"/>
+            </a:lvl1pPr>
+          </a:lstStyle>
+          <a:p>
+            <a:r>
+              <a:rPr lang="en-US"/>
+              <a:t>Click to edit Master title style</a:t>
+            </a:r>
+            <a:endParaRPr lang="en-US" dirty="0"/>
+          </a:p>
+        </p:txBody>
+      </p:sp>
+      <p:sp>
+        <p:nvSpPr>
+          <p:cNvPr id="3" name="Text Placeholder 2"/>
+          <p:cNvSpPr>
+            <a:spLocks noGrp="1"/>
+          </p:cNvSpPr>
+          <p:nvPr>
+            <p:ph type="body" idx="1"/>
+          </p:nvPr>
+        </p:nvSpPr>
+        <p:spPr>
+          <a:xfrm>
+            <a:off x="632947" y="1981200"/>
+            <a:ext cx="2946866" cy="576262"/>
+          </a:xfrm>
+        </p:spPr>
+        <p:txBody>
+          <a:bodyPr anchor="b">
+            <a:noAutofit/>
+          </a:bodyPr>
+          <a:lstStyle>
+            <a:lvl1pPr marL="0" indent="0">
+              <a:buNone/>
+              <a:defRPr sz="2400" b="0">
+                <a:solidFill>
+                  <a:schemeClr val="bg2">
+                    <a:lumMod val="40000"/>
+                    <a:lumOff val="60000"/>
+                  </a:schemeClr>
+                </a:solidFill>
+              </a:defRPr>
+            </a:lvl1pPr>
+            <a:lvl2pPr marL="457200" indent="0">
+              <a:buNone/>
+              <a:defRPr sz="2000" b="1"/>
+            </a:lvl2pPr>
+            <a:lvl3pPr marL="914400" indent="0">
+              <a:buNone/>
+              <a:defRPr sz="1800" b="1"/>
+            </a:lvl3pPr>
+            <a:lvl4pPr marL="1371600" indent="0">
+              <a:buNone/>
+              <a:defRPr sz="1600" b="1"/>
+            </a:lvl4pPr>
+            <a:lvl5pPr marL="1828800" indent="0">
+              <a:buNone/>
+              <a:defRPr sz="1600" b="1"/>
+            </a:lvl5pPr>
+            <a:lvl6pPr marL="2286000" indent="0">
+              <a:buNone/>
+              <a:defRPr sz="1600" b="1"/>
+            </a:lvl6pPr>
+            <a:lvl7pPr marL="2743200" indent="0">
+              <a:buNone/>
+              <a:defRPr sz="1600" b="1"/>
+            </a:lvl7pPr>
+            <a:lvl8pPr marL="3200400" indent="0">
+              <a:buNone/>
+              <a:defRPr sz="1600" b="1"/>
+            </a:lvl8pPr>
+            <a:lvl9pPr marL="3657600" indent="0">
+              <a:buNone/>
+              <a:defRPr sz="1600" b="1"/>
+            </a:lvl9pPr>
+          </a:lstStyle>
+          <a:p>
+            <a:pPr lvl="0"/>
+            <a:r>
+              <a:rPr lang="en-US"/>
+              <a:t>Click to edit Master text styles</a:t>
+            </a:r>
+          </a:p>
+        </p:txBody>
+      </p:sp>
+      <p:sp>
+        <p:nvSpPr>
+          <p:cNvPr id="16" name="Text Placeholder 3"/>
+          <p:cNvSpPr>
+            <a:spLocks noGrp="1"/>
+          </p:cNvSpPr>
+          <p:nvPr>
+            <p:ph type="body" sz="half" idx="15"/>
+          </p:nvPr>
+        </p:nvSpPr>
+        <p:spPr>
+          <a:xfrm>
+            <a:off x="652463" y="2667000"/>
+            <a:ext cx="2927350" cy="3589338"/>
+          </a:xfrm>
+        </p:spPr>
+        <p:txBody>
+          <a:bodyPr anchor="t">
+            <a:normAutofit/>
+          </a:bodyPr>
+          <a:lstStyle>
+            <a:lvl1pPr marL="0" indent="0">
+              <a:buNone/>
+              <a:defRPr sz="1400"/>
+            </a:lvl1pPr>
+            <a:lvl2pPr marL="457200" indent="0">
+              <a:buNone/>
+              <a:defRPr sz="1200"/>
+            </a:lvl2pPr>
+            <a:lvl3pPr marL="914400" indent="0">
+              <a:buNone/>
+              <a:defRPr sz="1000"/>
+            </a:lvl3pPr>
+            <a:lvl4pPr marL="1371600" indent="0">
+              <a:buNone/>
+              <a:defRPr sz="900"/>
+            </a:lvl4pPr>
+            <a:lvl5pPr marL="1828800" indent="0">
+              <a:buNone/>
+              <a:defRPr sz="900"/>
+            </a:lvl5pPr>
+            <a:lvl6pPr marL="2286000" indent="0">
+              <a:buNone/>
+              <a:defRPr sz="900"/>
+            </a:lvl6pPr>
+            <a:lvl7pPr marL="2743200" indent="0">
+              <a:buNone/>
+              <a:defRPr sz="900"/>
+            </a:lvl7pPr>
+            <a:lvl8pPr marL="3200400" indent="0">
+              <a:buNone/>
+              <a:defRPr sz="900"/>
+            </a:lvl8pPr>
+            <a:lvl9pPr marL="3657600" indent="0">
+              <a:buNone/>
+              <a:defRPr sz="900"/>
+            </a:lvl9pPr>
+          </a:lstStyle>
+          <a:p>
+            <a:pPr lvl="0"/>
+            <a:r>
+              <a:rPr lang="en-US"/>
+              <a:t>Click to edit Master text styles</a:t>
+            </a:r>
+          </a:p>
+        </p:txBody>
+      </p:sp>
+      <p:sp>
+        <p:nvSpPr>
+          <p:cNvPr id="5" name="Text Placeholder 4"/>
+          <p:cNvSpPr>
+            <a:spLocks noGrp="1"/>
+          </p:cNvSpPr>
+          <p:nvPr>
+            <p:ph type="body" sz="quarter" idx="3"/>
+          </p:nvPr>
+        </p:nvSpPr>
+        <p:spPr>
+          <a:xfrm>
+            <a:off x="3883659" y="1981200"/>
+            <a:ext cx="2936241" cy="576262"/>
+          </a:xfrm>
+        </p:spPr>
+        <p:txBody>
+          <a:bodyPr anchor="b">
+            <a:noAutofit/>
+          </a:bodyPr>
+          <a:lstStyle>
+            <a:lvl1pPr marL="0" indent="0">
+              <a:buNone/>
+              <a:defRPr sz="2400" b="0">
+                <a:solidFill>
+                  <a:schemeClr val="bg2">
+                    <a:lumMod val="40000"/>
+                    <a:lumOff val="60000"/>
+                  </a:schemeClr>
+                </a:solidFill>
+              </a:defRPr>
+            </a:lvl1pPr>
+            <a:lvl2pPr marL="457200" indent="0">
+              <a:buNone/>
+              <a:defRPr sz="2000" b="1"/>
+            </a:lvl2pPr>
+            <a:lvl3pPr marL="914400" indent="0">
+              <a:buNone/>
+              <a:defRPr sz="1800" b="1"/>
+            </a:lvl3pPr>
+            <a:lvl4pPr marL="1371600" indent="0">
+              <a:buNone/>
+              <a:defRPr sz="1600" b="1"/>
+            </a:lvl4pPr>
+            <a:lvl5pPr marL="1828800" indent="0">
+              <a:buNone/>
+              <a:defRPr sz="1600" b="1"/>
+            </a:lvl5pPr>
+            <a:lvl6pPr marL="2286000" indent="0">
+              <a:buNone/>
+              <a:defRPr sz="1600" b="1"/>
+            </a:lvl6pPr>
+            <a:lvl7pPr marL="2743200" indent="0">
+              <a:buNone/>
+              <a:defRPr sz="1600" b="1"/>
+            </a:lvl7pPr>
+            <a:lvl8pPr marL="3200400" indent="0">
+              <a:buNone/>
+              <a:defRPr sz="1600" b="1"/>
+            </a:lvl8pPr>
+            <a:lvl9pPr marL="3657600" indent="0">
+              <a:buNone/>
+              <a:defRPr sz="1600" b="1"/>
+            </a:lvl9pPr>
+          </a:lstStyle>
+          <a:p>
+            <a:pPr lvl="0"/>
+            <a:r>
+              <a:rPr lang="en-US"/>
+              <a:t>Click to edit Master text styles</a:t>
+            </a:r>
+          </a:p>
+        </p:txBody>
+      </p:sp>
+      <p:sp>
+        <p:nvSpPr>
+          <p:cNvPr id="19" name="Text Placeholder 3"/>
+          <p:cNvSpPr>
+            <a:spLocks noGrp="1"/>
+          </p:cNvSpPr>
+          <p:nvPr>
+            <p:ph type="body" sz="half" idx="16"/>
+          </p:nvPr>
+        </p:nvSpPr>
+        <p:spPr>
+          <a:xfrm>
+            <a:off x="3873106" y="2667000"/>
+            <a:ext cx="2946794" cy="3589338"/>
+          </a:xfrm>
+        </p:spPr>
+        <p:txBody>
+          <a:bodyPr anchor="t">
+            <a:normAutofit/>
+          </a:bodyPr>
+          <a:lstStyle>
+            <a:lvl1pPr marL="0" indent="0">
+              <a:buNone/>
+              <a:defRPr sz="1400"/>
+            </a:lvl1pPr>
+            <a:lvl2pPr marL="457200" indent="0">
+              <a:buNone/>
+              <a:defRPr sz="1200"/>
+            </a:lvl2pPr>
+            <a:lvl3pPr marL="914400" indent="0">
+              <a:buNone/>
+              <a:defRPr sz="1000"/>
+            </a:lvl3pPr>
+            <a:lvl4pPr marL="1371600" indent="0">
+              <a:buNone/>
+              <a:defRPr sz="900"/>
+            </a:lvl4pPr>
+            <a:lvl5pPr marL="1828800" indent="0">
+              <a:buNone/>
+              <a:defRPr sz="900"/>
+            </a:lvl5pPr>
+            <a:lvl6pPr marL="2286000" indent="0">
+              <a:buNone/>
+              <a:defRPr sz="900"/>
+            </a:lvl6pPr>
+            <a:lvl7pPr marL="2743200" indent="0">
+              <a:buNone/>
+              <a:defRPr sz="900"/>
+            </a:lvl7pPr>
+            <a:lvl8pPr marL="3200400" indent="0">
+              <a:buNone/>
+              <a:defRPr sz="900"/>
+            </a:lvl8pPr>
+            <a:lvl9pPr marL="3657600" indent="0">
+              <a:buNone/>
+              <a:defRPr sz="900"/>
+            </a:lvl9pPr>
+          </a:lstStyle>
+          <a:p>
+            <a:pPr lvl="0"/>
+            <a:r>
+              <a:rPr lang="en-US"/>
+              <a:t>Click to edit Master text styles</a:t>
+            </a:r>
+          </a:p>
+        </p:txBody>
+      </p:sp>
+      <p:sp>
+        <p:nvSpPr>
+          <p:cNvPr id="14" name="Text Placeholder 4"/>
+          <p:cNvSpPr>
+            <a:spLocks noGrp="1"/>
+          </p:cNvSpPr>
+          <p:nvPr>
+            <p:ph type="body" sz="quarter" idx="13"/>
+          </p:nvPr>
+        </p:nvSpPr>
+        <p:spPr>
+          <a:xfrm>
+            <a:off x="7124700" y="1981200"/>
+            <a:ext cx="2932113" cy="576262"/>
+          </a:xfrm>
+        </p:spPr>
+        <p:txBody>
+          <a:bodyPr anchor="b">
+            <a:noAutofit/>
+          </a:bodyPr>
+          <a:lstStyle>
+            <a:lvl1pPr marL="0" indent="0">
+              <a:buNone/>
+              <a:defRPr sz="2400" b="0">
+                <a:solidFill>
+                  <a:schemeClr val="bg2">
+                    <a:lumMod val="40000"/>
+                    <a:lumOff val="60000"/>
+                  </a:schemeClr>
+                </a:solidFill>
+              </a:defRPr>
+            </a:lvl1pPr>
+            <a:lvl2pPr marL="457200" indent="0">
+              <a:buNone/>
+              <a:defRPr sz="2000" b="1"/>
+            </a:lvl2pPr>
+            <a:lvl3pPr marL="914400" indent="0">
+              <a:buNone/>
+              <a:defRPr sz="1800" b="1"/>
+            </a:lvl3pPr>
+            <a:lvl4pPr marL="1371600" indent="0">
+              <a:buNone/>
+              <a:defRPr sz="1600" b="1"/>
+            </a:lvl4pPr>
+            <a:lvl5pPr marL="1828800" indent="0">
+              <a:buNone/>
+              <a:defRPr sz="1600" b="1"/>
+            </a:lvl5pPr>
+            <a:lvl6pPr marL="2286000" indent="0">
+              <a:buNone/>
+              <a:defRPr sz="1600" b="1"/>
+            </a:lvl6pPr>
+            <a:lvl7pPr marL="2743200" indent="0">
+              <a:buNone/>
+              <a:defRPr sz="1600" b="1"/>
+            </a:lvl7pPr>
+            <a:lvl8pPr marL="3200400" indent="0">
+              <a:buNone/>
+              <a:defRPr sz="1600" b="1"/>
+            </a:lvl8pPr>
+            <a:lvl9pPr marL="3657600" indent="0">
+              <a:buNone/>
+              <a:defRPr sz="1600" b="1"/>
+            </a:lvl9pPr>
+          </a:lstStyle>
+          <a:p>
+            <a:pPr lvl="0"/>
+            <a:r>
+              <a:rPr lang="en-US"/>
+              <a:t>Click to edit Master text styles</a:t>
+            </a:r>
+          </a:p>
+        </p:txBody>
+      </p:sp>
+      <p:sp>
+        <p:nvSpPr>
+          <p:cNvPr id="20" name="Text Placeholder 3"/>
+          <p:cNvSpPr>
+            <a:spLocks noGrp="1"/>
+          </p:cNvSpPr>
+          <p:nvPr>
+            <p:ph type="body" sz="half" idx="17"/>
+          </p:nvPr>
+        </p:nvSpPr>
+        <p:spPr>
+          <a:xfrm>
+            <a:off x="7124700" y="2667000"/>
+            <a:ext cx="2932113" cy="3589338"/>
+          </a:xfrm>
+        </p:spPr>
+        <p:txBody>
+          <a:bodyPr anchor="t">
+            <a:normAutofit/>
+          </a:bodyPr>
+          <a:lstStyle>
+            <a:lvl1pPr marL="0" indent="0">
+              <a:buNone/>
+              <a:defRPr sz="1400"/>
+            </a:lvl1pPr>
+            <a:lvl2pPr marL="457200" indent="0">
+              <a:buNone/>
+              <a:defRPr sz="1200"/>
+            </a:lvl2pPr>
+            <a:lvl3pPr marL="914400" indent="0">
+              <a:buNone/>
+              <a:defRPr sz="1000"/>
+            </a:lvl3pPr>
+            <a:lvl4pPr marL="1371600" indent="0">
+              <a:buNone/>
+              <a:defRPr sz="900"/>
+            </a:lvl4pPr>
+            <a:lvl5pPr marL="1828800" indent="0">
+              <a:buNone/>
+              <a:defRPr sz="900"/>
+            </a:lvl5pPr>
+            <a:lvl6pPr marL="2286000" indent="0">
+              <a:buNone/>
+              <a:defRPr sz="900"/>
+            </a:lvl6pPr>
+            <a:lvl7pPr marL="2743200" indent="0">
+              <a:buNone/>
+              <a:defRPr sz="900"/>
+            </a:lvl7pPr>
+            <a:lvl8pPr marL="3200400" indent="0">
+              <a:buNone/>
+              <a:defRPr sz="900"/>
+            </a:lvl8pPr>
+            <a:lvl9pPr marL="3657600" indent="0">
+              <a:buNone/>
+              <a:defRPr sz="900"/>
+            </a:lvl9pPr>
+          </a:lstStyle>
+          <a:p>
+            <a:pPr lvl="0"/>
+            <a:r>
+              <a:rPr lang="en-US"/>
+              <a:t>Click to edit Master text styles</a:t>
+            </a:r>
+          </a:p>
+        </p:txBody>
+      </p:sp>
+      <p:cxnSp>
+        <p:nvCxnSpPr>
+          <p:cNvPr id="17" name="Straight Connector 16"/>
+          <p:cNvCxnSpPr/>
+          <p:nvPr/>
+        </p:nvCxnSpPr>
+        <p:spPr>
+          <a:xfrm>
+            <a:off x="3726142" y="2133600"/>
+            <a:ext cx="0" cy="3962400"/>
+          </a:xfrm>
+          <a:prstGeom prst="line">
+            <a:avLst/>
+          </a:prstGeom>
+          <a:ln w="12700" cmpd="sng">
+            <a:solidFill>
+              <a:schemeClr val="bg2">
+                <a:lumMod val="40000"/>
+                <a:lumOff val="60000"/>
+                <a:alpha val="40000"/>
+              </a:schemeClr>
+            </a:solidFill>
+          </a:ln>
+        </p:spPr>
+        <p:style>
+          <a:lnRef idx="2">
+            <a:schemeClr val="accent1"/>
+          </a:lnRef>
+          <a:fillRef idx="0">
+            <a:schemeClr val="accent1"/>
+          </a:fillRef>
+          <a:effectRef idx="1">
+            <a:schemeClr val="accent1"/>
+          </a:effectRef>
+          <a:fontRef idx="minor">
+            <a:schemeClr val="tx1"/>
+          </a:fontRef>
+        </p:style>
+      </p:cxnSp>
+      <p:cxnSp>
+        <p:nvCxnSpPr>
+          <p:cNvPr id="18" name="Straight Connector 17"/>
+          <p:cNvCxnSpPr/>
+          <p:nvPr/>
+        </p:nvCxnSpPr>
+        <p:spPr>
+          <a:xfrm>
+            <a:off x="6962227" y="2133600"/>
+            <a:ext cx="0" cy="3966882"/>
+          </a:xfrm>
+          <a:prstGeom prst="line">
+            <a:avLst/>
+          </a:prstGeom>
+          <a:ln w="12700" cmpd="sng">
+            <a:solidFill>
+              <a:schemeClr val="bg2">
+                <a:lumMod val="40000"/>
+                <a:lumOff val="60000"/>
+                <a:alpha val="40000"/>
+              </a:schemeClr>
+            </a:solidFill>
+          </a:ln>
+        </p:spPr>
+        <p:style>
+          <a:lnRef idx="2">
+            <a:schemeClr val="accent1"/>
+          </a:lnRef>
+          <a:fillRef idx="0">
+            <a:schemeClr val="accent1"/>
+          </a:fillRef>
+          <a:effectRef idx="1">
+            <a:schemeClr val="accent1"/>
+          </a:effectRef>
+          <a:fontRef idx="minor">
+            <a:schemeClr val="tx1"/>
+          </a:fontRef>
+        </p:style>
+      </p:cxnSp>
+      <p:sp>
+        <p:nvSpPr>
+          <p:cNvPr id="7" name="Date Placeholder 3"/>
+          <p:cNvSpPr>
+            <a:spLocks noGrp="1"/>
+          </p:cNvSpPr>
+          <p:nvPr>
+            <p:ph type="dt" sz="half" idx="10"/>
+          </p:nvPr>
+        </p:nvSpPr>
+        <p:spPr/>
+        <p:txBody>
+          <a:bodyPr/>
+          <a:lstStyle/>
+          <a:p>
+            <a:fld id="{051FC713-0BD0-4E67-99B4-F2FDDCE837D7}" type="datetimeFigureOut">
+              <a:rPr lang="en-IN" smtClean="0"/>
+              <a:t>23-07-2026</a:t>
+            </a:fld>
+            <a:endParaRPr lang="en-IN"/>
+          </a:p>
+        </p:txBody>
+      </p:sp>
+      <p:sp>
+        <p:nvSpPr>
+          <p:cNvPr id="4" name="Footer Placeholder 4"/>
+          <p:cNvSpPr>
+            <a:spLocks noGrp="1"/>
+          </p:cNvSpPr>
+          <p:nvPr>
+            <p:ph type="ftr" sz="quarter" idx="11"/>
+          </p:nvPr>
+        </p:nvSpPr>
+        <p:spPr/>
+        <p:txBody>
+          <a:bodyPr/>
+          <a:lstStyle/>
+          <a:p>
+            <a:endParaRPr lang="en-IN"/>
+          </a:p>
+        </p:txBody>
+      </p:sp>
+      <p:sp>
+        <p:nvSpPr>
+          <p:cNvPr id="6" name="Slide Number Placeholder 5"/>
+          <p:cNvSpPr>
+            <a:spLocks noGrp="1"/>
+          </p:cNvSpPr>
+          <p:nvPr>
+            <p:ph type="sldNum" sz="quarter" idx="12"/>
+          </p:nvPr>
+        </p:nvSpPr>
+        <p:spPr/>
+        <p:txBody>
+          <a:bodyPr/>
+          <a:lstStyle/>
+          <a:p>
+            <a:fld id="{4E2B1D73-CC5E-470E-B919-F6C029CFEF81}" type="slidenum">
+              <a:rPr lang="en-IN" smtClean="0"/>
+              <a:t>‹#›</a:t>
+            </a:fld>
+            <a:endParaRPr lang="en-IN"/>
+          </a:p>
+        </p:txBody>
+      </p:sp>
+    </p:spTree>
+    <p:extLst>
+      <p:ext uri="{BB962C8B-B14F-4D97-AF65-F5344CB8AC3E}">
+        <p14:creationId xmlns:p14="http://schemas.microsoft.com/office/powerpoint/2010/main" val="3838483412"/>
+      </p:ext>
+    </p:extLst>
+  </p:cSld>
+  <p:clrMapOvr>
+    <a:masterClrMapping/>
+  </p:clrMapOvr>
+</p:sldLayout>
+</file>
+
+<file path=ppt/slideLayouts/slideLayout15.xml><?xml version="1.0" encoding="utf-8"?>
+<p:sldLayout xmlns:a="http://schemas.openxmlformats.org/drawingml/2006/main" xmlns:r="http://schemas.openxmlformats.org/officeDocument/2006/relationships" xmlns:p="http://schemas.openxmlformats.org/presentationml/2006/main" preserve="1">
+  <p:cSld name="3 Picture Column">
+    <p:spTree>
+      <p:nvGrpSpPr>
+        <p:cNvPr id="1" name=""/>
+        <p:cNvGrpSpPr/>
+        <p:nvPr/>
+      </p:nvGrpSpPr>
+      <p:grpSpPr>
+        <a:xfrm>
+          <a:off x="0" y="0"/>
+          <a:ext cx="0" cy="0"/>
+          <a:chOff x="0" y="0"/>
+          <a:chExt cx="0" cy="0"/>
+        </a:xfrm>
+      </p:grpSpPr>
+      <p:sp>
+        <p:nvSpPr>
+          <p:cNvPr id="2" name="Title 1"/>
+          <p:cNvSpPr>
+            <a:spLocks noGrp="1"/>
+          </p:cNvSpPr>
+          <p:nvPr>
+            <p:ph type="title"/>
+          </p:nvPr>
+        </p:nvSpPr>
+        <p:spPr/>
+        <p:txBody>
+          <a:bodyPr/>
+          <a:lstStyle>
+            <a:lvl1pPr>
+              <a:defRPr sz="4200"/>
+            </a:lvl1pPr>
+          </a:lstStyle>
+          <a:p>
+            <a:r>
+              <a:rPr lang="en-US"/>
+              <a:t>Click to edit Master title style</a:t>
+            </a:r>
+            <a:endParaRPr lang="en-US" dirty="0"/>
+          </a:p>
+        </p:txBody>
+      </p:sp>
+      <p:sp>
+        <p:nvSpPr>
+          <p:cNvPr id="3" name="Text Placeholder 2"/>
+          <p:cNvSpPr>
+            <a:spLocks noGrp="1"/>
+          </p:cNvSpPr>
+          <p:nvPr>
+            <p:ph type="body" idx="1"/>
+          </p:nvPr>
+        </p:nvSpPr>
+        <p:spPr>
+          <a:xfrm>
+            <a:off x="652463" y="4250949"/>
+            <a:ext cx="2940050" cy="576262"/>
+          </a:xfrm>
+        </p:spPr>
+        <p:txBody>
+          <a:bodyPr anchor="b">
+            <a:noAutofit/>
+          </a:bodyPr>
+          <a:lstStyle>
+            <a:lvl1pPr marL="0" indent="0">
+              <a:buNone/>
+              <a:defRPr sz="2400" b="0">
+                <a:solidFill>
+                  <a:schemeClr val="bg2">
+                    <a:lumMod val="40000"/>
+                    <a:lumOff val="60000"/>
+                  </a:schemeClr>
+                </a:solidFill>
+              </a:defRPr>
+            </a:lvl1pPr>
+            <a:lvl2pPr marL="457200" indent="0">
+              <a:buNone/>
+              <a:defRPr sz="2000" b="1"/>
+            </a:lvl2pPr>
+            <a:lvl3pPr marL="914400" indent="0">
+              <a:buNone/>
+              <a:defRPr sz="1800" b="1"/>
+            </a:lvl3pPr>
+            <a:lvl4pPr marL="1371600" indent="0">
+              <a:buNone/>
+              <a:defRPr sz="1600" b="1"/>
+            </a:lvl4pPr>
+            <a:lvl5pPr marL="1828800" indent="0">
+              <a:buNone/>
+              <a:defRPr sz="1600" b="1"/>
+            </a:lvl5pPr>
+            <a:lvl6pPr marL="2286000" indent="0">
+              <a:buNone/>
+              <a:defRPr sz="1600" b="1"/>
+            </a:lvl6pPr>
+            <a:lvl7pPr marL="2743200" indent="0">
+              <a:buNone/>
+              <a:defRPr sz="1600" b="1"/>
+            </a:lvl7pPr>
+            <a:lvl8pPr marL="3200400" indent="0">
+              <a:buNone/>
+              <a:defRPr sz="1600" b="1"/>
+            </a:lvl8pPr>
+            <a:lvl9pPr marL="3657600" indent="0">
+              <a:buNone/>
+              <a:defRPr sz="1600" b="1"/>
+            </a:lvl9pPr>
+          </a:lstStyle>
+          <a:p>
+            <a:pPr lvl="0"/>
+            <a:r>
+              <a:rPr lang="en-US"/>
+              <a:t>Click to edit Master text styles</a:t>
+            </a:r>
+          </a:p>
+        </p:txBody>
+      </p:sp>
+      <p:sp>
+        <p:nvSpPr>
+          <p:cNvPr id="29" name="Picture Placeholder 2"/>
+          <p:cNvSpPr>
+            <a:spLocks noGrp="1" noChangeAspect="1"/>
+          </p:cNvSpPr>
+          <p:nvPr>
+            <p:ph type="pic" idx="15"/>
+          </p:nvPr>
+        </p:nvSpPr>
+        <p:spPr>
+          <a:xfrm>
+            <a:off x="652463" y="2209800"/>
+            <a:ext cx="2940050" cy="1524000"/>
+          </a:xfrm>
+          <a:prstGeom prst="roundRect">
+            <a:avLst>
+              <a:gd name="adj" fmla="val 1858"/>
+            </a:avLst>
+          </a:prstGeom>
+          <a:effectLst>
+            <a:outerShdw blurRad="50800" dist="50800" dir="5400000" algn="tl" rotWithShape="0">
+              <a:srgbClr val="000000">
+                <a:alpha val="43000"/>
+              </a:srgbClr>
+            </a:outerShdw>
+          </a:effectLst>
+        </p:spPr>
+        <p:txBody>
+          <a:bodyPr anchor="t">
+            <a:normAutofit/>
+          </a:bodyPr>
+          <a:lstStyle>
+            <a:lvl1pPr marL="0" indent="0" algn="ctr">
+              <a:buNone/>
+              <a:defRPr sz="1600"/>
+            </a:lvl1pPr>
+            <a:lvl2pPr marL="457200" indent="0">
+              <a:buNone/>
+              <a:defRPr sz="1600"/>
+            </a:lvl2pPr>
+            <a:lvl3pPr marL="914400" indent="0">
+              <a:buNone/>
+              <a:defRPr sz="1600"/>
+            </a:lvl3pPr>
+            <a:lvl4pPr marL="1371600" indent="0">
+              <a:buNone/>
+              <a:defRPr sz="1600"/>
+            </a:lvl4pPr>
+            <a:lvl5pPr marL="1828800" indent="0">
+              <a:buNone/>
+              <a:defRPr sz="1600"/>
+            </a:lvl5pPr>
+            <a:lvl6pPr marL="2286000" indent="0">
+              <a:buNone/>
+              <a:defRPr sz="1600"/>
+            </a:lvl6pPr>
+            <a:lvl7pPr marL="2743200" indent="0">
+              <a:buNone/>
+              <a:defRPr sz="1600"/>
+            </a:lvl7pPr>
+            <a:lvl8pPr marL="3200400" indent="0">
+              <a:buNone/>
+              <a:defRPr sz="1600"/>
+            </a:lvl8pPr>
+            <a:lvl9pPr marL="3657600" indent="0">
+              <a:buNone/>
+              <a:defRPr sz="1600"/>
+            </a:lvl9pPr>
+          </a:lstStyle>
+          <a:p>
+            <a:r>
+              <a:rPr lang="en-US"/>
+              <a:t>Click icon to add picture</a:t>
+            </a:r>
+            <a:endParaRPr lang="en-US" dirty="0"/>
+          </a:p>
+        </p:txBody>
+      </p:sp>
+      <p:sp>
+        <p:nvSpPr>
+          <p:cNvPr id="22" name="Text Placeholder 3"/>
+          <p:cNvSpPr>
+            <a:spLocks noGrp="1"/>
+          </p:cNvSpPr>
+          <p:nvPr>
+            <p:ph type="body" sz="half" idx="18"/>
+          </p:nvPr>
+        </p:nvSpPr>
+        <p:spPr>
+          <a:xfrm>
+            <a:off x="652463" y="4827211"/>
+            <a:ext cx="2940050" cy="659189"/>
+          </a:xfrm>
+        </p:spPr>
+        <p:txBody>
+          <a:bodyPr anchor="t">
+            <a:normAutofit/>
+          </a:bodyPr>
+          <a:lstStyle>
+            <a:lvl1pPr marL="0" indent="0">
+              <a:buNone/>
+              <a:defRPr sz="1400"/>
+            </a:lvl1pPr>
+            <a:lvl2pPr marL="457200" indent="0">
+              <a:buNone/>
+              <a:defRPr sz="1200"/>
+            </a:lvl2pPr>
+            <a:lvl3pPr marL="914400" indent="0">
+              <a:buNone/>
+              <a:defRPr sz="1000"/>
+            </a:lvl3pPr>
+            <a:lvl4pPr marL="1371600" indent="0">
+              <a:buNone/>
+              <a:defRPr sz="900"/>
+            </a:lvl4pPr>
+            <a:lvl5pPr marL="1828800" indent="0">
+              <a:buNone/>
+              <a:defRPr sz="900"/>
+            </a:lvl5pPr>
+            <a:lvl6pPr marL="2286000" indent="0">
+              <a:buNone/>
+              <a:defRPr sz="900"/>
+            </a:lvl6pPr>
+            <a:lvl7pPr marL="2743200" indent="0">
+              <a:buNone/>
+              <a:defRPr sz="900"/>
+            </a:lvl7pPr>
+            <a:lvl8pPr marL="3200400" indent="0">
+              <a:buNone/>
+              <a:defRPr sz="900"/>
+            </a:lvl8pPr>
+            <a:lvl9pPr marL="3657600" indent="0">
+              <a:buNone/>
+              <a:defRPr sz="900"/>
+            </a:lvl9pPr>
+          </a:lstStyle>
+          <a:p>
+            <a:pPr lvl="0"/>
+            <a:r>
+              <a:rPr lang="en-US"/>
+              <a:t>Click to edit Master text styles</a:t>
+            </a:r>
+          </a:p>
+        </p:txBody>
+      </p:sp>
+      <p:sp>
+        <p:nvSpPr>
+          <p:cNvPr id="5" name="Text Placeholder 4"/>
+          <p:cNvSpPr>
+            <a:spLocks noGrp="1"/>
+          </p:cNvSpPr>
+          <p:nvPr>
+            <p:ph type="body" sz="quarter" idx="3"/>
+          </p:nvPr>
+        </p:nvSpPr>
+        <p:spPr>
+          <a:xfrm>
+            <a:off x="3889375" y="4250949"/>
+            <a:ext cx="2930525" cy="576262"/>
+          </a:xfrm>
+        </p:spPr>
+        <p:txBody>
+          <a:bodyPr anchor="b">
+            <a:noAutofit/>
+          </a:bodyPr>
+          <a:lstStyle>
+            <a:lvl1pPr marL="0" indent="0">
+              <a:buNone/>
+              <a:defRPr sz="2400" b="0">
+                <a:solidFill>
+                  <a:schemeClr val="bg2">
+                    <a:lumMod val="40000"/>
+                    <a:lumOff val="60000"/>
+                  </a:schemeClr>
+                </a:solidFill>
+              </a:defRPr>
+            </a:lvl1pPr>
+            <a:lvl2pPr marL="457200" indent="0">
+              <a:buNone/>
+              <a:defRPr sz="2000" b="1"/>
+            </a:lvl2pPr>
+            <a:lvl3pPr marL="914400" indent="0">
+              <a:buNone/>
+              <a:defRPr sz="1800" b="1"/>
+            </a:lvl3pPr>
+            <a:lvl4pPr marL="1371600" indent="0">
+              <a:buNone/>
+              <a:defRPr sz="1600" b="1"/>
+            </a:lvl4pPr>
+            <a:lvl5pPr marL="1828800" indent="0">
+              <a:buNone/>
+              <a:defRPr sz="1600" b="1"/>
+            </a:lvl5pPr>
+            <a:lvl6pPr marL="2286000" indent="0">
+              <a:buNone/>
+              <a:defRPr sz="1600" b="1"/>
+            </a:lvl6pPr>
+            <a:lvl7pPr marL="2743200" indent="0">
+              <a:buNone/>
+              <a:defRPr sz="1600" b="1"/>
+            </a:lvl7pPr>
+            <a:lvl8pPr marL="3200400" indent="0">
+              <a:buNone/>
+              <a:defRPr sz="1600" b="1"/>
+            </a:lvl8pPr>
+            <a:lvl9pPr marL="3657600" indent="0">
+              <a:buNone/>
+              <a:defRPr sz="1600" b="1"/>
+            </a:lvl9pPr>
+          </a:lstStyle>
+          <a:p>
+            <a:pPr lvl="0"/>
+            <a:r>
+              <a:rPr lang="en-US"/>
+              <a:t>Click to edit Master text styles</a:t>
+            </a:r>
+          </a:p>
+        </p:txBody>
+      </p:sp>
+      <p:sp>
+        <p:nvSpPr>
+          <p:cNvPr id="30" name="Picture Placeholder 2"/>
+          <p:cNvSpPr>
+            <a:spLocks noGrp="1" noChangeAspect="1"/>
+          </p:cNvSpPr>
+          <p:nvPr>
+            <p:ph type="pic" idx="21"/>
+          </p:nvPr>
+        </p:nvSpPr>
+        <p:spPr>
+          <a:xfrm>
+            <a:off x="3889374" y="2209800"/>
+            <a:ext cx="2930525" cy="1524000"/>
+          </a:xfrm>
+          <a:prstGeom prst="roundRect">
+            <a:avLst>
+              <a:gd name="adj" fmla="val 1858"/>
+            </a:avLst>
+          </a:prstGeom>
+          <a:effectLst>
+            <a:outerShdw blurRad="50800" dist="50800" dir="5400000" algn="tl" rotWithShape="0">
+              <a:srgbClr val="000000">
+                <a:alpha val="43000"/>
+              </a:srgbClr>
+            </a:outerShdw>
+          </a:effectLst>
+        </p:spPr>
+        <p:txBody>
+          <a:bodyPr anchor="t">
+            <a:normAutofit/>
+          </a:bodyPr>
+          <a:lstStyle>
+            <a:lvl1pPr marL="0" indent="0" algn="ctr">
+              <a:buNone/>
+              <a:defRPr sz="1600"/>
+            </a:lvl1pPr>
+            <a:lvl2pPr marL="457200" indent="0">
+              <a:buNone/>
+              <a:defRPr sz="1600"/>
+            </a:lvl2pPr>
+            <a:lvl3pPr marL="914400" indent="0">
+              <a:buNone/>
+              <a:defRPr sz="1600"/>
+            </a:lvl3pPr>
+            <a:lvl4pPr marL="1371600" indent="0">
+              <a:buNone/>
+              <a:defRPr sz="1600"/>
+            </a:lvl4pPr>
+            <a:lvl5pPr marL="1828800" indent="0">
+              <a:buNone/>
+              <a:defRPr sz="1600"/>
+            </a:lvl5pPr>
+            <a:lvl6pPr marL="2286000" indent="0">
+              <a:buNone/>
+              <a:defRPr sz="1600"/>
+            </a:lvl6pPr>
+            <a:lvl7pPr marL="2743200" indent="0">
+              <a:buNone/>
+              <a:defRPr sz="1600"/>
+            </a:lvl7pPr>
+            <a:lvl8pPr marL="3200400" indent="0">
+              <a:buNone/>
+              <a:defRPr sz="1600"/>
+            </a:lvl8pPr>
+            <a:lvl9pPr marL="3657600" indent="0">
+              <a:buNone/>
+              <a:defRPr sz="1600"/>
+            </a:lvl9pPr>
+          </a:lstStyle>
+          <a:p>
+            <a:r>
+              <a:rPr lang="en-US"/>
+              <a:t>Click icon to add picture</a:t>
+            </a:r>
+            <a:endParaRPr lang="en-US" dirty="0"/>
+          </a:p>
+        </p:txBody>
+      </p:sp>
+      <p:sp>
+        <p:nvSpPr>
+          <p:cNvPr id="23" name="Text Placeholder 3"/>
+          <p:cNvSpPr>
+            <a:spLocks noGrp="1"/>
+          </p:cNvSpPr>
+          <p:nvPr>
+            <p:ph type="body" sz="half" idx="19"/>
+          </p:nvPr>
+        </p:nvSpPr>
+        <p:spPr>
+          <a:xfrm>
+            <a:off x="3888022" y="4827210"/>
+            <a:ext cx="2934406" cy="659189"/>
+          </a:xfrm>
+        </p:spPr>
+        <p:txBody>
+          <a:bodyPr anchor="t">
+            <a:normAutofit/>
+          </a:bodyPr>
+          <a:lstStyle>
+            <a:lvl1pPr marL="0" indent="0">
+              <a:buNone/>
+              <a:defRPr sz="1400"/>
+            </a:lvl1pPr>
+            <a:lvl2pPr marL="457200" indent="0">
+              <a:buNone/>
+              <a:defRPr sz="1200"/>
+            </a:lvl2pPr>
+            <a:lvl3pPr marL="914400" indent="0">
+              <a:buNone/>
+              <a:defRPr sz="1000"/>
+            </a:lvl3pPr>
+            <a:lvl4pPr marL="1371600" indent="0">
+              <a:buNone/>
+              <a:defRPr sz="900"/>
+            </a:lvl4pPr>
+            <a:lvl5pPr marL="1828800" indent="0">
+              <a:buNone/>
+              <a:defRPr sz="900"/>
+            </a:lvl5pPr>
+            <a:lvl6pPr marL="2286000" indent="0">
+              <a:buNone/>
+              <a:defRPr sz="900"/>
+            </a:lvl6pPr>
+            <a:lvl7pPr marL="2743200" indent="0">
+              <a:buNone/>
+              <a:defRPr sz="900"/>
+            </a:lvl7pPr>
+            <a:lvl8pPr marL="3200400" indent="0">
+              <a:buNone/>
+              <a:defRPr sz="900"/>
+            </a:lvl8pPr>
+            <a:lvl9pPr marL="3657600" indent="0">
+              <a:buNone/>
+              <a:defRPr sz="900"/>
+            </a:lvl9pPr>
+          </a:lstStyle>
+          <a:p>
+            <a:pPr lvl="0"/>
+            <a:r>
+              <a:rPr lang="en-US"/>
+              <a:t>Click to edit Master text styles</a:t>
+            </a:r>
+          </a:p>
+        </p:txBody>
+      </p:sp>
+      <p:sp>
+        <p:nvSpPr>
+          <p:cNvPr id="14" name="Text Placeholder 4"/>
+          <p:cNvSpPr>
+            <a:spLocks noGrp="1"/>
+          </p:cNvSpPr>
+          <p:nvPr>
+            <p:ph type="body" sz="quarter" idx="13"/>
+          </p:nvPr>
+        </p:nvSpPr>
+        <p:spPr>
+          <a:xfrm>
+            <a:off x="7124700" y="4250949"/>
+            <a:ext cx="2932113" cy="576262"/>
+          </a:xfrm>
+        </p:spPr>
+        <p:txBody>
+          <a:bodyPr anchor="b">
+            <a:noAutofit/>
+          </a:bodyPr>
+          <a:lstStyle>
+            <a:lvl1pPr marL="0" indent="0">
+              <a:buNone/>
+              <a:defRPr sz="2400" b="0">
+                <a:solidFill>
+                  <a:schemeClr val="bg2">
+                    <a:lumMod val="40000"/>
+                    <a:lumOff val="60000"/>
+                  </a:schemeClr>
+                </a:solidFill>
+              </a:defRPr>
+            </a:lvl1pPr>
+            <a:lvl2pPr marL="457200" indent="0">
+              <a:buNone/>
+              <a:defRPr sz="2000" b="1"/>
+            </a:lvl2pPr>
+            <a:lvl3pPr marL="914400" indent="0">
+              <a:buNone/>
+              <a:defRPr sz="1800" b="1"/>
+            </a:lvl3pPr>
+            <a:lvl4pPr marL="1371600" indent="0">
+              <a:buNone/>
+              <a:defRPr sz="1600" b="1"/>
+            </a:lvl4pPr>
+            <a:lvl5pPr marL="1828800" indent="0">
+              <a:buNone/>
+              <a:defRPr sz="1600" b="1"/>
+            </a:lvl5pPr>
+            <a:lvl6pPr marL="2286000" indent="0">
+              <a:buNone/>
+              <a:defRPr sz="1600" b="1"/>
+            </a:lvl6pPr>
+            <a:lvl7pPr marL="2743200" indent="0">
+              <a:buNone/>
+              <a:defRPr sz="1600" b="1"/>
+            </a:lvl7pPr>
+            <a:lvl8pPr marL="3200400" indent="0">
+              <a:buNone/>
+              <a:defRPr sz="1600" b="1"/>
+            </a:lvl8pPr>
+            <a:lvl9pPr marL="3657600" indent="0">
+              <a:buNone/>
+              <a:defRPr sz="1600" b="1"/>
+            </a:lvl9pPr>
+          </a:lstStyle>
+          <a:p>
+            <a:pPr lvl="0"/>
+            <a:r>
+              <a:rPr lang="en-US"/>
+              <a:t>Click to edit Master text styles</a:t>
+            </a:r>
+          </a:p>
+        </p:txBody>
+      </p:sp>
+      <p:sp>
+        <p:nvSpPr>
+          <p:cNvPr id="31" name="Picture Placeholder 2"/>
+          <p:cNvSpPr>
+            <a:spLocks noGrp="1" noChangeAspect="1"/>
+          </p:cNvSpPr>
+          <p:nvPr>
+            <p:ph type="pic" idx="22"/>
+          </p:nvPr>
+        </p:nvSpPr>
+        <p:spPr>
+          <a:xfrm>
+            <a:off x="7124699" y="2209800"/>
+            <a:ext cx="2932113" cy="1524000"/>
+          </a:xfrm>
+          <a:prstGeom prst="roundRect">
+            <a:avLst>
+              <a:gd name="adj" fmla="val 1858"/>
+            </a:avLst>
+          </a:prstGeom>
+          <a:effectLst>
+            <a:outerShdw blurRad="50800" dist="50800" dir="5400000" algn="tl" rotWithShape="0">
+              <a:srgbClr val="000000">
+                <a:alpha val="43000"/>
+              </a:srgbClr>
+            </a:outerShdw>
+          </a:effectLst>
+        </p:spPr>
+        <p:txBody>
+          <a:bodyPr anchor="t">
+            <a:normAutofit/>
+          </a:bodyPr>
+          <a:lstStyle>
+            <a:lvl1pPr marL="0" indent="0" algn="ctr">
+              <a:buNone/>
+              <a:defRPr sz="1600"/>
+            </a:lvl1pPr>
+            <a:lvl2pPr marL="457200" indent="0">
+              <a:buNone/>
+              <a:defRPr sz="1600"/>
+            </a:lvl2pPr>
+            <a:lvl3pPr marL="914400" indent="0">
+              <a:buNone/>
+              <a:defRPr sz="1600"/>
+            </a:lvl3pPr>
+            <a:lvl4pPr marL="1371600" indent="0">
+              <a:buNone/>
+              <a:defRPr sz="1600"/>
+            </a:lvl4pPr>
+            <a:lvl5pPr marL="1828800" indent="0">
+              <a:buNone/>
+              <a:defRPr sz="1600"/>
+            </a:lvl5pPr>
+            <a:lvl6pPr marL="2286000" indent="0">
+              <a:buNone/>
+              <a:defRPr sz="1600"/>
+            </a:lvl6pPr>
+            <a:lvl7pPr marL="2743200" indent="0">
+              <a:buNone/>
+              <a:defRPr sz="1600"/>
+            </a:lvl7pPr>
+            <a:lvl8pPr marL="3200400" indent="0">
+              <a:buNone/>
+              <a:defRPr sz="1600"/>
+            </a:lvl8pPr>
+            <a:lvl9pPr marL="3657600" indent="0">
+              <a:buNone/>
+              <a:defRPr sz="1600"/>
+            </a:lvl9pPr>
+          </a:lstStyle>
+          <a:p>
+            <a:r>
+              <a:rPr lang="en-US"/>
+              <a:t>Click icon to add picture</a:t>
+            </a:r>
+            <a:endParaRPr lang="en-US" dirty="0"/>
+          </a:p>
+        </p:txBody>
+      </p:sp>
+      <p:sp>
+        <p:nvSpPr>
+          <p:cNvPr id="24" name="Text Placeholder 3"/>
+          <p:cNvSpPr>
+            <a:spLocks noGrp="1"/>
+          </p:cNvSpPr>
+          <p:nvPr>
+            <p:ph type="body" sz="half" idx="20"/>
+          </p:nvPr>
+        </p:nvSpPr>
+        <p:spPr>
+          <a:xfrm>
+            <a:off x="7124575" y="4827208"/>
+            <a:ext cx="2935997" cy="659189"/>
+          </a:xfrm>
+        </p:spPr>
+        <p:txBody>
+          <a:bodyPr anchor="t">
+            <a:normAutofit/>
+          </a:bodyPr>
+          <a:lstStyle>
+            <a:lvl1pPr marL="0" indent="0">
+              <a:buNone/>
+              <a:defRPr sz="1400"/>
+            </a:lvl1pPr>
+            <a:lvl2pPr marL="457200" indent="0">
+              <a:buNone/>
+              <a:defRPr sz="1200"/>
+            </a:lvl2pPr>
+            <a:lvl3pPr marL="914400" indent="0">
+              <a:buNone/>
+              <a:defRPr sz="1000"/>
+            </a:lvl3pPr>
+            <a:lvl4pPr marL="1371600" indent="0">
+              <a:buNone/>
+              <a:defRPr sz="900"/>
+            </a:lvl4pPr>
+            <a:lvl5pPr marL="1828800" indent="0">
+              <a:buNone/>
+              <a:defRPr sz="900"/>
+            </a:lvl5pPr>
+            <a:lvl6pPr marL="2286000" indent="0">
+              <a:buNone/>
+              <a:defRPr sz="900"/>
+            </a:lvl6pPr>
+            <a:lvl7pPr marL="2743200" indent="0">
+              <a:buNone/>
+              <a:defRPr sz="900"/>
+            </a:lvl7pPr>
+            <a:lvl8pPr marL="3200400" indent="0">
+              <a:buNone/>
+              <a:defRPr sz="900"/>
+            </a:lvl8pPr>
+            <a:lvl9pPr marL="3657600" indent="0">
+              <a:buNone/>
+              <a:defRPr sz="900"/>
+            </a:lvl9pPr>
+          </a:lstStyle>
+          <a:p>
+            <a:pPr lvl="0"/>
+            <a:r>
+              <a:rPr lang="en-US"/>
+              <a:t>Click to edit Master text styles</a:t>
+            </a:r>
+          </a:p>
+        </p:txBody>
+      </p:sp>
+      <p:cxnSp>
+        <p:nvCxnSpPr>
+          <p:cNvPr id="19" name="Straight Connector 18"/>
+          <p:cNvCxnSpPr/>
+          <p:nvPr/>
+        </p:nvCxnSpPr>
+        <p:spPr>
+          <a:xfrm>
+            <a:off x="3726142" y="2133600"/>
+            <a:ext cx="0" cy="3962400"/>
+          </a:xfrm>
+          <a:prstGeom prst="line">
+            <a:avLst/>
+          </a:prstGeom>
+          <a:ln w="12700" cmpd="sng">
+            <a:solidFill>
+              <a:schemeClr val="bg2">
+                <a:lumMod val="40000"/>
+                <a:lumOff val="60000"/>
+                <a:alpha val="40000"/>
+              </a:schemeClr>
+            </a:solidFill>
+          </a:ln>
+        </p:spPr>
+        <p:style>
+          <a:lnRef idx="2">
+            <a:schemeClr val="accent1"/>
+          </a:lnRef>
+          <a:fillRef idx="0">
+            <a:schemeClr val="accent1"/>
+          </a:fillRef>
+          <a:effectRef idx="1">
+            <a:schemeClr val="accent1"/>
+          </a:effectRef>
+          <a:fontRef idx="minor">
+            <a:schemeClr val="tx1"/>
+          </a:fontRef>
+        </p:style>
+      </p:cxnSp>
+      <p:cxnSp>
+        <p:nvCxnSpPr>
+          <p:cNvPr id="20" name="Straight Connector 19"/>
+          <p:cNvCxnSpPr/>
+          <p:nvPr/>
+        </p:nvCxnSpPr>
+        <p:spPr>
+          <a:xfrm>
+            <a:off x="6962227" y="2133600"/>
+            <a:ext cx="0" cy="3966882"/>
+          </a:xfrm>
+          <a:prstGeom prst="line">
+            <a:avLst/>
+          </a:prstGeom>
+          <a:ln w="12700" cmpd="sng">
+            <a:solidFill>
+              <a:schemeClr val="bg2">
+                <a:lumMod val="40000"/>
+                <a:lumOff val="60000"/>
+                <a:alpha val="40000"/>
+              </a:schemeClr>
+            </a:solidFill>
+          </a:ln>
+        </p:spPr>
+        <p:style>
+          <a:lnRef idx="2">
+            <a:schemeClr val="accent1"/>
+          </a:lnRef>
+          <a:fillRef idx="0">
+            <a:schemeClr val="accent1"/>
+          </a:fillRef>
+          <a:effectRef idx="1">
+            <a:schemeClr val="accent1"/>
+          </a:effectRef>
+          <a:fontRef idx="minor">
+            <a:schemeClr val="tx1"/>
+          </a:fontRef>
+        </p:style>
+      </p:cxnSp>
+      <p:sp>
+        <p:nvSpPr>
+          <p:cNvPr id="7" name="Date Placeholder 3"/>
+          <p:cNvSpPr>
+            <a:spLocks noGrp="1"/>
+          </p:cNvSpPr>
+          <p:nvPr>
+            <p:ph type="dt" sz="half" idx="10"/>
+          </p:nvPr>
+        </p:nvSpPr>
+        <p:spPr/>
+        <p:txBody>
+          <a:bodyPr/>
+          <a:lstStyle/>
+          <a:p>
+            <a:fld id="{051FC713-0BD0-4E67-99B4-F2FDDCE837D7}" type="datetimeFigureOut">
+              <a:rPr lang="en-IN" smtClean="0"/>
+              <a:t>23-07-2026</a:t>
+            </a:fld>
+            <a:endParaRPr lang="en-IN"/>
+          </a:p>
+        </p:txBody>
+      </p:sp>
+      <p:sp>
+        <p:nvSpPr>
+          <p:cNvPr id="4" name="Footer Placeholder 4"/>
+          <p:cNvSpPr>
+            <a:spLocks noGrp="1"/>
+          </p:cNvSpPr>
+          <p:nvPr>
+            <p:ph type="ftr" sz="quarter" idx="11"/>
+          </p:nvPr>
+        </p:nvSpPr>
+        <p:spPr/>
+        <p:txBody>
+          <a:bodyPr/>
+          <a:lstStyle/>
+          <a:p>
+            <a:endParaRPr lang="en-IN"/>
+          </a:p>
+        </p:txBody>
+      </p:sp>
+      <p:sp>
+        <p:nvSpPr>
+          <p:cNvPr id="6" name="Slide Number Placeholder 5"/>
+          <p:cNvSpPr>
+            <a:spLocks noGrp="1"/>
+          </p:cNvSpPr>
+          <p:nvPr>
+            <p:ph type="sldNum" sz="quarter" idx="12"/>
+          </p:nvPr>
+        </p:nvSpPr>
+        <p:spPr/>
+        <p:txBody>
+          <a:bodyPr/>
+          <a:lstStyle/>
+          <a:p>
+            <a:fld id="{4E2B1D73-CC5E-470E-B919-F6C029CFEF81}" type="slidenum">
+              <a:rPr lang="en-IN" smtClean="0"/>
+              <a:t>‹#›</a:t>
+            </a:fld>
+            <a:endParaRPr lang="en-IN"/>
+          </a:p>
+        </p:txBody>
+      </p:sp>
+    </p:spTree>
+    <p:extLst>
+      <p:ext uri="{BB962C8B-B14F-4D97-AF65-F5344CB8AC3E}">
+        <p14:creationId xmlns:p14="http://schemas.microsoft.com/office/powerpoint/2010/main" val="3911250889"/>
+      </p:ext>
+    </p:extLst>
+  </p:cSld>
+  <p:clrMapOvr>
+    <a:masterClrMapping/>
+  </p:clrMapOvr>
+</p:sldLayout>
+</file>
+
+<file path=ppt/slideLayouts/slideLayout16.xml><?xml version="1.0" encoding="utf-8"?>
 <p:sldLayout xmlns:a="http://schemas.openxmlformats.org/drawingml/2006/main" xmlns:r="http://schemas.openxmlformats.org/officeDocument/2006/relationships" xmlns:p="http://schemas.openxmlformats.org/presentationml/2006/main" type="vertTx" preserve="1">
   <p:cSld name="Title and Vertical Text">
     <p:spTree>
@@ -794,13 +3493,7 @@
       </p:grpSpPr>
       <p:sp>
         <p:nvSpPr>
-          <p:cNvPr id="2" name="Title 1">
-            <a:extLst>
-              <a:ext uri="{FF2B5EF4-FFF2-40B4-BE49-F238E27FC236}">
-                <a16:creationId xmlns:a16="http://schemas.microsoft.com/office/drawing/2014/main" id="{31DF9543-1CA9-1EC4-D690-FCC1A1741CC8}"/>
-              </a:ext>
-            </a:extLst>
-          </p:cNvPr>
+          <p:cNvPr id="2" name="Title 1"/>
           <p:cNvSpPr>
             <a:spLocks noGrp="1"/>
           </p:cNvSpPr>
@@ -817,19 +3510,13 @@
               <a:rPr lang="en-US"/>
               <a:t>Click to edit Master title style</a:t>
             </a:r>
-            <a:endParaRPr lang="en-IN"/>
-          </a:p>
-        </p:txBody>
-      </p:sp>
-      <p:sp>
-        <p:nvSpPr>
-          <p:cNvPr id="3" name="Vertical Text Placeholder 2">
-            <a:extLst>
-              <a:ext uri="{FF2B5EF4-FFF2-40B4-BE49-F238E27FC236}">
-                <a16:creationId xmlns:a16="http://schemas.microsoft.com/office/drawing/2014/main" id="{36981426-0184-CFB2-A55F-87EB3494E1C7}"/>
-              </a:ext>
-            </a:extLst>
-          </p:cNvPr>
+            <a:endParaRPr lang="en-US" dirty="0"/>
+          </a:p>
+        </p:txBody>
+      </p:sp>
+      <p:sp>
+        <p:nvSpPr>
+          <p:cNvPr id="3" name="Vertical Text Placeholder 2"/>
           <p:cNvSpPr>
             <a:spLocks noGrp="1"/>
           </p:cNvSpPr>
@@ -839,7 +3526,7 @@
         </p:nvSpPr>
         <p:spPr/>
         <p:txBody>
-          <a:bodyPr vert="eaVert"/>
+          <a:bodyPr vert="eaVert" anchor="t" anchorCtr="0"/>
           <a:lstStyle/>
           <a:p>
             <a:pPr lvl="0"/>
@@ -875,19 +3562,13 @@
               <a:rPr lang="en-US"/>
               <a:t>Fifth level</a:t>
             </a:r>
-            <a:endParaRPr lang="en-IN"/>
-          </a:p>
-        </p:txBody>
-      </p:sp>
-      <p:sp>
-        <p:nvSpPr>
-          <p:cNvPr id="4" name="Date Placeholder 3">
-            <a:extLst>
-              <a:ext uri="{FF2B5EF4-FFF2-40B4-BE49-F238E27FC236}">
-                <a16:creationId xmlns:a16="http://schemas.microsoft.com/office/drawing/2014/main" id="{32365AC6-4EF0-B111-FB00-9C640AB6AD90}"/>
-              </a:ext>
-            </a:extLst>
-          </p:cNvPr>
+            <a:endParaRPr lang="en-US" dirty="0"/>
+          </a:p>
+        </p:txBody>
+      </p:sp>
+      <p:sp>
+        <p:nvSpPr>
+          <p:cNvPr id="4" name="Date Placeholder 3"/>
           <p:cNvSpPr>
             <a:spLocks noGrp="1"/>
           </p:cNvSpPr>
@@ -902,7 +3583,7 @@
           <a:p>
             <a:fld id="{051FC713-0BD0-4E67-99B4-F2FDDCE837D7}" type="datetimeFigureOut">
               <a:rPr lang="en-IN" smtClean="0"/>
-              <a:t>18-07-2026</a:t>
+              <a:t>23-07-2026</a:t>
             </a:fld>
             <a:endParaRPr lang="en-IN"/>
           </a:p>
@@ -910,13 +3591,7 @@
       </p:sp>
       <p:sp>
         <p:nvSpPr>
-          <p:cNvPr id="5" name="Footer Placeholder 4">
-            <a:extLst>
-              <a:ext uri="{FF2B5EF4-FFF2-40B4-BE49-F238E27FC236}">
-                <a16:creationId xmlns:a16="http://schemas.microsoft.com/office/drawing/2014/main" id="{A89CB4C3-E2C1-73C9-FC68-33475F99AE78}"/>
-              </a:ext>
-            </a:extLst>
-          </p:cNvPr>
+          <p:cNvPr id="5" name="Footer Placeholder 4"/>
           <p:cNvSpPr>
             <a:spLocks noGrp="1"/>
           </p:cNvSpPr>
@@ -935,13 +3610,7 @@
       </p:sp>
       <p:sp>
         <p:nvSpPr>
-          <p:cNvPr id="6" name="Slide Number Placeholder 5">
-            <a:extLst>
-              <a:ext uri="{FF2B5EF4-FFF2-40B4-BE49-F238E27FC236}">
-                <a16:creationId xmlns:a16="http://schemas.microsoft.com/office/drawing/2014/main" id="{CAB01768-642E-A0DC-EF2F-DF90B777DE02}"/>
-              </a:ext>
-            </a:extLst>
-          </p:cNvPr>
+          <p:cNvPr id="6" name="Slide Number Placeholder 5"/>
           <p:cNvSpPr>
             <a:spLocks noGrp="1"/>
           </p:cNvSpPr>
@@ -965,7 +3634,7 @@
     </p:spTree>
     <p:extLst>
       <p:ext uri="{BB962C8B-B14F-4D97-AF65-F5344CB8AC3E}">
-        <p14:creationId xmlns:p14="http://schemas.microsoft.com/office/powerpoint/2010/main" val="1361647704"/>
+        <p14:creationId xmlns:p14="http://schemas.microsoft.com/office/powerpoint/2010/main" val="1795085973"/>
       </p:ext>
     </p:extLst>
   </p:cSld>
@@ -975,7 +3644,7 @@
 </p:sldLayout>
 </file>
 
-<file path=ppt/slideLayouts/slideLayout11.xml><?xml version="1.0" encoding="utf-8"?>
+<file path=ppt/slideLayouts/slideLayout17.xml><?xml version="1.0" encoding="utf-8"?>
 <p:sldLayout xmlns:a="http://schemas.openxmlformats.org/drawingml/2006/main" xmlns:r="http://schemas.openxmlformats.org/officeDocument/2006/relationships" xmlns:p="http://schemas.openxmlformats.org/presentationml/2006/main" type="vertTitleAndTx" preserve="1">
   <p:cSld name="Vertical Title and Text">
     <p:spTree>
@@ -994,13 +3663,7 @@
       </p:grpSpPr>
       <p:sp>
         <p:nvSpPr>
-          <p:cNvPr id="2" name="Vertical Title 1">
-            <a:extLst>
-              <a:ext uri="{FF2B5EF4-FFF2-40B4-BE49-F238E27FC236}">
-                <a16:creationId xmlns:a16="http://schemas.microsoft.com/office/drawing/2014/main" id="{174FD567-0105-0502-6168-CF25713FD3D9}"/>
-              </a:ext>
-            </a:extLst>
-          </p:cNvPr>
+          <p:cNvPr id="2" name="Vertical Title 1"/>
           <p:cNvSpPr>
             <a:spLocks noGrp="1"/>
           </p:cNvSpPr>
@@ -1010,48 +3673,42 @@
         </p:nvSpPr>
         <p:spPr>
           <a:xfrm>
-            <a:off x="8724900" y="365125"/>
-            <a:ext cx="2628900" cy="5811838"/>
+            <a:off x="8304212" y="430213"/>
+            <a:ext cx="1752601" cy="5826125"/>
           </a:xfrm>
         </p:spPr>
         <p:txBody>
+          <a:bodyPr vert="eaVert" anchor="b" anchorCtr="0"/>
+          <a:lstStyle/>
+          <a:p>
+            <a:r>
+              <a:rPr lang="en-US"/>
+              <a:t>Click to edit Master title style</a:t>
+            </a:r>
+            <a:endParaRPr lang="en-US" dirty="0"/>
+          </a:p>
+        </p:txBody>
+      </p:sp>
+      <p:sp>
+        <p:nvSpPr>
+          <p:cNvPr id="3" name="Vertical Text Placeholder 2"/>
+          <p:cNvSpPr>
+            <a:spLocks noGrp="1"/>
+          </p:cNvSpPr>
+          <p:nvPr>
+            <p:ph type="body" orient="vert" idx="1"/>
+          </p:nvPr>
+        </p:nvSpPr>
+        <p:spPr>
+          <a:xfrm>
+            <a:off x="652463" y="887414"/>
+            <a:ext cx="7423149" cy="5368924"/>
+          </a:xfrm>
+        </p:spPr>
+        <p:txBody>
           <a:bodyPr vert="eaVert"/>
           <a:lstStyle/>
           <a:p>
-            <a:r>
-              <a:rPr lang="en-US"/>
-              <a:t>Click to edit Master title style</a:t>
-            </a:r>
-            <a:endParaRPr lang="en-IN"/>
-          </a:p>
-        </p:txBody>
-      </p:sp>
-      <p:sp>
-        <p:nvSpPr>
-          <p:cNvPr id="3" name="Vertical Text Placeholder 2">
-            <a:extLst>
-              <a:ext uri="{FF2B5EF4-FFF2-40B4-BE49-F238E27FC236}">
-                <a16:creationId xmlns:a16="http://schemas.microsoft.com/office/drawing/2014/main" id="{3E7E5202-8ECC-1597-8E4C-7B26E343B9A1}"/>
-              </a:ext>
-            </a:extLst>
-          </p:cNvPr>
-          <p:cNvSpPr>
-            <a:spLocks noGrp="1"/>
-          </p:cNvSpPr>
-          <p:nvPr>
-            <p:ph type="body" orient="vert" idx="1"/>
-          </p:nvPr>
-        </p:nvSpPr>
-        <p:spPr>
-          <a:xfrm>
-            <a:off x="838200" y="365125"/>
-            <a:ext cx="7734300" cy="5811838"/>
-          </a:xfrm>
-        </p:spPr>
-        <p:txBody>
-          <a:bodyPr vert="eaVert"/>
-          <a:lstStyle/>
-          <a:p>
             <a:pPr lvl="0"/>
             <a:r>
               <a:rPr lang="en-US"/>
@@ -1085,19 +3742,13 @@
               <a:rPr lang="en-US"/>
               <a:t>Fifth level</a:t>
             </a:r>
-            <a:endParaRPr lang="en-IN"/>
-          </a:p>
-        </p:txBody>
-      </p:sp>
-      <p:sp>
-        <p:nvSpPr>
-          <p:cNvPr id="4" name="Date Placeholder 3">
-            <a:extLst>
-              <a:ext uri="{FF2B5EF4-FFF2-40B4-BE49-F238E27FC236}">
-                <a16:creationId xmlns:a16="http://schemas.microsoft.com/office/drawing/2014/main" id="{1BBE53EF-3610-8267-64DB-4DCD0250ED86}"/>
-              </a:ext>
-            </a:extLst>
-          </p:cNvPr>
+            <a:endParaRPr lang="en-US" dirty="0"/>
+          </a:p>
+        </p:txBody>
+      </p:sp>
+      <p:sp>
+        <p:nvSpPr>
+          <p:cNvPr id="4" name="Date Placeholder 3"/>
           <p:cNvSpPr>
             <a:spLocks noGrp="1"/>
           </p:cNvSpPr>
@@ -1112,7 +3763,7 @@
           <a:p>
             <a:fld id="{051FC713-0BD0-4E67-99B4-F2FDDCE837D7}" type="datetimeFigureOut">
               <a:rPr lang="en-IN" smtClean="0"/>
-              <a:t>18-07-2026</a:t>
+              <a:t>23-07-2026</a:t>
             </a:fld>
             <a:endParaRPr lang="en-IN"/>
           </a:p>
@@ -1120,13 +3771,7 @@
       </p:sp>
       <p:sp>
         <p:nvSpPr>
-          <p:cNvPr id="5" name="Footer Placeholder 4">
-            <a:extLst>
-              <a:ext uri="{FF2B5EF4-FFF2-40B4-BE49-F238E27FC236}">
-                <a16:creationId xmlns:a16="http://schemas.microsoft.com/office/drawing/2014/main" id="{5C04BDAA-AFDB-258B-2953-F534992AD8FE}"/>
-              </a:ext>
-            </a:extLst>
-          </p:cNvPr>
+          <p:cNvPr id="5" name="Footer Placeholder 4"/>
           <p:cNvSpPr>
             <a:spLocks noGrp="1"/>
           </p:cNvSpPr>
@@ -1145,13 +3790,7 @@
       </p:sp>
       <p:sp>
         <p:nvSpPr>
-          <p:cNvPr id="6" name="Slide Number Placeholder 5">
-            <a:extLst>
-              <a:ext uri="{FF2B5EF4-FFF2-40B4-BE49-F238E27FC236}">
-                <a16:creationId xmlns:a16="http://schemas.microsoft.com/office/drawing/2014/main" id="{1C3AB97D-F853-BF62-A627-7CFA12431EBA}"/>
-              </a:ext>
-            </a:extLst>
-          </p:cNvPr>
+          <p:cNvPr id="6" name="Slide Number Placeholder 5"/>
           <p:cNvSpPr>
             <a:spLocks noGrp="1"/>
           </p:cNvSpPr>
@@ -1175,7 +3814,7 @@
     </p:spTree>
     <p:extLst>
       <p:ext uri="{BB962C8B-B14F-4D97-AF65-F5344CB8AC3E}">
-        <p14:creationId xmlns:p14="http://schemas.microsoft.com/office/powerpoint/2010/main" val="3675949199"/>
+        <p14:creationId xmlns:p14="http://schemas.microsoft.com/office/powerpoint/2010/main" val="3450483870"/>
       </p:ext>
     </p:extLst>
   </p:cSld>
@@ -1204,13 +3843,7 @@
       </p:grpSpPr>
       <p:sp>
         <p:nvSpPr>
-          <p:cNvPr id="2" name="Title 1">
-            <a:extLst>
-              <a:ext uri="{FF2B5EF4-FFF2-40B4-BE49-F238E27FC236}">
-                <a16:creationId xmlns:a16="http://schemas.microsoft.com/office/drawing/2014/main" id="{383DB208-D08C-0138-12CE-9F6C3D0ED1F0}"/>
-              </a:ext>
-            </a:extLst>
-          </p:cNvPr>
+          <p:cNvPr id="2" name="Title 1"/>
           <p:cNvSpPr>
             <a:spLocks noGrp="1"/>
           </p:cNvSpPr>
@@ -1227,19 +3860,13 @@
               <a:rPr lang="en-US"/>
               <a:t>Click to edit Master title style</a:t>
             </a:r>
-            <a:endParaRPr lang="en-IN"/>
-          </a:p>
-        </p:txBody>
-      </p:sp>
-      <p:sp>
-        <p:nvSpPr>
-          <p:cNvPr id="3" name="Content Placeholder 2">
-            <a:extLst>
-              <a:ext uri="{FF2B5EF4-FFF2-40B4-BE49-F238E27FC236}">
-                <a16:creationId xmlns:a16="http://schemas.microsoft.com/office/drawing/2014/main" id="{C1681ED3-A75A-C896-1BC0-AA0800606778}"/>
-              </a:ext>
-            </a:extLst>
-          </p:cNvPr>
+            <a:endParaRPr lang="en-US" dirty="0"/>
+          </a:p>
+        </p:txBody>
+      </p:sp>
+      <p:sp>
+        <p:nvSpPr>
+          <p:cNvPr id="3" name="Content Placeholder 2"/>
           <p:cNvSpPr>
             <a:spLocks noGrp="1"/>
           </p:cNvSpPr>
@@ -1285,19 +3912,13 @@
               <a:rPr lang="en-US"/>
               <a:t>Fifth level</a:t>
             </a:r>
-            <a:endParaRPr lang="en-IN"/>
-          </a:p>
-        </p:txBody>
-      </p:sp>
-      <p:sp>
-        <p:nvSpPr>
-          <p:cNvPr id="4" name="Date Placeholder 3">
-            <a:extLst>
-              <a:ext uri="{FF2B5EF4-FFF2-40B4-BE49-F238E27FC236}">
-                <a16:creationId xmlns:a16="http://schemas.microsoft.com/office/drawing/2014/main" id="{1771B1AF-4F15-9D2D-3FF8-FF6C42D01055}"/>
-              </a:ext>
-            </a:extLst>
-          </p:cNvPr>
+            <a:endParaRPr lang="en-US" dirty="0"/>
+          </a:p>
+        </p:txBody>
+      </p:sp>
+      <p:sp>
+        <p:nvSpPr>
+          <p:cNvPr id="7" name="Date Placeholder 3"/>
           <p:cNvSpPr>
             <a:spLocks noGrp="1"/>
           </p:cNvSpPr>
@@ -1312,7 +3933,7 @@
           <a:p>
             <a:fld id="{051FC713-0BD0-4E67-99B4-F2FDDCE837D7}" type="datetimeFigureOut">
               <a:rPr lang="en-IN" smtClean="0"/>
-              <a:t>18-07-2026</a:t>
+              <a:t>23-07-2026</a:t>
             </a:fld>
             <a:endParaRPr lang="en-IN"/>
           </a:p>
@@ -1320,13 +3941,7 @@
       </p:sp>
       <p:sp>
         <p:nvSpPr>
-          <p:cNvPr id="5" name="Footer Placeholder 4">
-            <a:extLst>
-              <a:ext uri="{FF2B5EF4-FFF2-40B4-BE49-F238E27FC236}">
-                <a16:creationId xmlns:a16="http://schemas.microsoft.com/office/drawing/2014/main" id="{DF622521-D189-09CD-7E43-6CEC73B226F5}"/>
-              </a:ext>
-            </a:extLst>
-          </p:cNvPr>
+          <p:cNvPr id="5" name="Footer Placeholder 4"/>
           <p:cNvSpPr>
             <a:spLocks noGrp="1"/>
           </p:cNvSpPr>
@@ -1345,13 +3960,7 @@
       </p:sp>
       <p:sp>
         <p:nvSpPr>
-          <p:cNvPr id="6" name="Slide Number Placeholder 5">
-            <a:extLst>
-              <a:ext uri="{FF2B5EF4-FFF2-40B4-BE49-F238E27FC236}">
-                <a16:creationId xmlns:a16="http://schemas.microsoft.com/office/drawing/2014/main" id="{890FCADF-9310-533F-AFA6-AD36811C0DF6}"/>
-              </a:ext>
-            </a:extLst>
-          </p:cNvPr>
+          <p:cNvPr id="6" name="Slide Number Placeholder 5"/>
           <p:cNvSpPr>
             <a:spLocks noGrp="1"/>
           </p:cNvSpPr>
@@ -1375,7 +3984,7 @@
     </p:spTree>
     <p:extLst>
       <p:ext uri="{BB962C8B-B14F-4D97-AF65-F5344CB8AC3E}">
-        <p14:creationId xmlns:p14="http://schemas.microsoft.com/office/powerpoint/2010/main" val="3204053815"/>
+        <p14:creationId xmlns:p14="http://schemas.microsoft.com/office/powerpoint/2010/main" val="4233973918"/>
       </p:ext>
     </p:extLst>
   </p:cSld>
@@ -1404,13 +4013,7 @@
       </p:grpSpPr>
       <p:sp>
         <p:nvSpPr>
-          <p:cNvPr id="2" name="Title 1">
-            <a:extLst>
-              <a:ext uri="{FF2B5EF4-FFF2-40B4-BE49-F238E27FC236}">
-                <a16:creationId xmlns:a16="http://schemas.microsoft.com/office/drawing/2014/main" id="{577F933D-6BF5-A13F-0172-7EFBF963E841}"/>
-              </a:ext>
-            </a:extLst>
-          </p:cNvPr>
+          <p:cNvPr id="2" name="Title 1"/>
           <p:cNvSpPr>
             <a:spLocks noGrp="1"/>
           </p:cNvSpPr>
@@ -1420,15 +4023,15 @@
         </p:nvSpPr>
         <p:spPr>
           <a:xfrm>
-            <a:off x="831850" y="1709738"/>
-            <a:ext cx="10515600" cy="2852737"/>
+            <a:off x="1154956" y="2861733"/>
+            <a:ext cx="8825657" cy="1915647"/>
           </a:xfrm>
         </p:spPr>
         <p:txBody>
           <a:bodyPr anchor="b"/>
           <a:lstStyle>
-            <a:lvl1pPr>
-              <a:defRPr sz="6000"/>
+            <a:lvl1pPr algn="l">
+              <a:defRPr sz="4000" b="0" cap="none"/>
             </a:lvl1pPr>
           </a:lstStyle>
           <a:p>
@@ -1436,19 +4039,13 @@
               <a:rPr lang="en-US"/>
               <a:t>Click to edit Master title style</a:t>
             </a:r>
-            <a:endParaRPr lang="en-IN"/>
-          </a:p>
-        </p:txBody>
-      </p:sp>
-      <p:sp>
-        <p:nvSpPr>
-          <p:cNvPr id="3" name="Text Placeholder 2">
-            <a:extLst>
-              <a:ext uri="{FF2B5EF4-FFF2-40B4-BE49-F238E27FC236}">
-                <a16:creationId xmlns:a16="http://schemas.microsoft.com/office/drawing/2014/main" id="{C38FE044-48F2-4D9A-BDC6-42E1EFF6ED0B}"/>
-              </a:ext>
-            </a:extLst>
-          </p:cNvPr>
+            <a:endParaRPr lang="en-US" dirty="0"/>
+          </a:p>
+        </p:txBody>
+      </p:sp>
+      <p:sp>
+        <p:nvSpPr>
+          <p:cNvPr id="3" name="Text Placeholder 2"/>
           <p:cNvSpPr>
             <a:spLocks noGrp="1"/>
           </p:cNvSpPr>
@@ -1458,99 +4055,100 @@
         </p:nvSpPr>
         <p:spPr>
           <a:xfrm>
-            <a:off x="831850" y="4589463"/>
-            <a:ext cx="10515600" cy="1500187"/>
+            <a:off x="1154955" y="4777381"/>
+            <a:ext cx="8825658" cy="860400"/>
           </a:xfrm>
         </p:spPr>
         <p:txBody>
-          <a:bodyPr/>
+          <a:bodyPr anchor="t"/>
           <a:lstStyle>
-            <a:lvl1pPr marL="0" indent="0">
-              <a:buNone/>
-              <a:defRPr sz="2400">
+            <a:lvl1pPr marL="0" indent="0" algn="l">
+              <a:buNone/>
+              <a:defRPr sz="2000" cap="all">
                 <a:solidFill>
-                  <a:schemeClr val="tx1">
-                    <a:tint val="82000"/>
+                  <a:schemeClr val="bg2">
+                    <a:lumMod val="40000"/>
+                    <a:lumOff val="60000"/>
                   </a:schemeClr>
                 </a:solidFill>
               </a:defRPr>
             </a:lvl1pPr>
             <a:lvl2pPr marL="457200" indent="0">
               <a:buNone/>
-              <a:defRPr sz="2000">
+              <a:defRPr sz="1800">
                 <a:solidFill>
                   <a:schemeClr val="tx1">
-                    <a:tint val="82000"/>
+                    <a:tint val="75000"/>
                   </a:schemeClr>
                 </a:solidFill>
               </a:defRPr>
             </a:lvl2pPr>
             <a:lvl3pPr marL="914400" indent="0">
               <a:buNone/>
-              <a:defRPr sz="1800">
+              <a:defRPr sz="1600">
                 <a:solidFill>
                   <a:schemeClr val="tx1">
-                    <a:tint val="82000"/>
+                    <a:tint val="75000"/>
                   </a:schemeClr>
                 </a:solidFill>
               </a:defRPr>
             </a:lvl3pPr>
             <a:lvl4pPr marL="1371600" indent="0">
               <a:buNone/>
-              <a:defRPr sz="1600">
+              <a:defRPr sz="1400">
                 <a:solidFill>
                   <a:schemeClr val="tx1">
-                    <a:tint val="82000"/>
+                    <a:tint val="75000"/>
                   </a:schemeClr>
                 </a:solidFill>
               </a:defRPr>
             </a:lvl4pPr>
             <a:lvl5pPr marL="1828800" indent="0">
               <a:buNone/>
-              <a:defRPr sz="1600">
+              <a:defRPr sz="1400">
                 <a:solidFill>
                   <a:schemeClr val="tx1">
-                    <a:tint val="82000"/>
+                    <a:tint val="75000"/>
                   </a:schemeClr>
                 </a:solidFill>
               </a:defRPr>
             </a:lvl5pPr>
             <a:lvl6pPr marL="2286000" indent="0">
               <a:buNone/>
-              <a:defRPr sz="1600">
+              <a:defRPr sz="1400">
                 <a:solidFill>
                   <a:schemeClr val="tx1">
-                    <a:tint val="82000"/>
+                    <a:tint val="75000"/>
                   </a:schemeClr>
                 </a:solidFill>
               </a:defRPr>
             </a:lvl6pPr>
             <a:lvl7pPr marL="2743200" indent="0">
               <a:buNone/>
-              <a:defRPr sz="1600">
+              <a:defRPr sz="1400">
                 <a:solidFill>
                   <a:schemeClr val="tx1">
-                    <a:tint val="82000"/>
+                    <a:tint val="75000"/>
                   </a:schemeClr>
                 </a:solidFill>
               </a:defRPr>
             </a:lvl7pPr>
             <a:lvl8pPr marL="3200400" indent="0">
               <a:buNone/>
-              <a:defRPr sz="1600">
+              <a:defRPr sz="1400">
                 <a:solidFill>
                   <a:schemeClr val="tx1">
-                    <a:tint val="82000"/>
+                    <a:tint val="75000"/>
                   </a:schemeClr>
                 </a:solidFill>
               </a:defRPr>
             </a:lvl8pPr>
             <a:lvl9pPr marL="3657600" indent="0">
               <a:buNone/>
-              <a:defRPr sz="1600">
+              <a:defRPr sz="1400">
                 <a:solidFill>
                   <a:schemeClr val="tx1">
-                    <a:tint val="82000"/>
+                    <a:tint val="75000"/>
                   </a:schemeClr>
                 </a:solidFill>
               </a:defRPr>
@@ -1567,13 +4165,7 @@
       </p:sp>
       <p:sp>
         <p:nvSpPr>
-          <p:cNvPr id="4" name="Date Placeholder 3">
-            <a:extLst>
-              <a:ext uri="{FF2B5EF4-FFF2-40B4-BE49-F238E27FC236}">
-                <a16:creationId xmlns:a16="http://schemas.microsoft.com/office/drawing/2014/main" id="{4000E74E-44CA-9AAC-FD2C-861DBD767ACD}"/>
-              </a:ext>
-            </a:extLst>
-          </p:cNvPr>
+          <p:cNvPr id="4" name="Date Placeholder 3"/>
           <p:cNvSpPr>
             <a:spLocks noGrp="1"/>
           </p:cNvSpPr>
@@ -1588,7 +4180,7 @@
           <a:p>
             <a:fld id="{051FC713-0BD0-4E67-99B4-F2FDDCE837D7}" type="datetimeFigureOut">
               <a:rPr lang="en-IN" smtClean="0"/>
-              <a:t>18-07-2026</a:t>
+              <a:t>23-07-2026</a:t>
             </a:fld>
             <a:endParaRPr lang="en-IN"/>
           </a:p>
@@ -1596,13 +4188,7 @@
       </p:sp>
       <p:sp>
         <p:nvSpPr>
-          <p:cNvPr id="5" name="Footer Placeholder 4">
-            <a:extLst>
-              <a:ext uri="{FF2B5EF4-FFF2-40B4-BE49-F238E27FC236}">
-                <a16:creationId xmlns:a16="http://schemas.microsoft.com/office/drawing/2014/main" id="{DCAC1598-1D1C-510D-60A1-C58F6A7F112C}"/>
-              </a:ext>
-            </a:extLst>
-          </p:cNvPr>
+          <p:cNvPr id="5" name="Footer Placeholder 4"/>
           <p:cNvSpPr>
             <a:spLocks noGrp="1"/>
           </p:cNvSpPr>
@@ -1621,13 +4207,7 @@
       </p:sp>
       <p:sp>
         <p:nvSpPr>
-          <p:cNvPr id="6" name="Slide Number Placeholder 5">
-            <a:extLst>
-              <a:ext uri="{FF2B5EF4-FFF2-40B4-BE49-F238E27FC236}">
-                <a16:creationId xmlns:a16="http://schemas.microsoft.com/office/drawing/2014/main" id="{A004C703-C5D6-0C25-5A2E-61287FC39242}"/>
-              </a:ext>
-            </a:extLst>
-          </p:cNvPr>
+          <p:cNvPr id="6" name="Slide Number Placeholder 5"/>
           <p:cNvSpPr>
             <a:spLocks noGrp="1"/>
           </p:cNvSpPr>
@@ -1651,7 +4231,7 @@
     </p:spTree>
     <p:extLst>
       <p:ext uri="{BB962C8B-B14F-4D97-AF65-F5344CB8AC3E}">
-        <p14:creationId xmlns:p14="http://schemas.microsoft.com/office/powerpoint/2010/main" val="979832214"/>
+        <p14:creationId xmlns:p14="http://schemas.microsoft.com/office/powerpoint/2010/main" val="162850282"/>
       </p:ext>
     </p:extLst>
   </p:cSld>
@@ -1680,13 +4260,7 @@
       </p:grpSpPr>
       <p:sp>
         <p:nvSpPr>
-          <p:cNvPr id="2" name="Title 1">
-            <a:extLst>
-              <a:ext uri="{FF2B5EF4-FFF2-40B4-BE49-F238E27FC236}">
-                <a16:creationId xmlns:a16="http://schemas.microsoft.com/office/drawing/2014/main" id="{5B654C6E-D34A-7649-CCFF-05132E143D3A}"/>
-              </a:ext>
-            </a:extLst>
-          </p:cNvPr>
+          <p:cNvPr id="2" name="Title 1"/>
           <p:cNvSpPr>
             <a:spLocks noGrp="1"/>
           </p:cNvSpPr>
@@ -1703,19 +4277,13 @@
               <a:rPr lang="en-US"/>
               <a:t>Click to edit Master title style</a:t>
             </a:r>
-            <a:endParaRPr lang="en-IN"/>
-          </a:p>
-        </p:txBody>
-      </p:sp>
-      <p:sp>
-        <p:nvSpPr>
-          <p:cNvPr id="3" name="Content Placeholder 2">
-            <a:extLst>
-              <a:ext uri="{FF2B5EF4-FFF2-40B4-BE49-F238E27FC236}">
-                <a16:creationId xmlns:a16="http://schemas.microsoft.com/office/drawing/2014/main" id="{9AC82336-8700-DF13-3A9D-5FDDC93A141E}"/>
-              </a:ext>
-            </a:extLst>
-          </p:cNvPr>
+            <a:endParaRPr lang="en-US" dirty="0"/>
+          </a:p>
+        </p:txBody>
+      </p:sp>
+      <p:sp>
+        <p:nvSpPr>
+          <p:cNvPr id="3" name="Content Placeholder 2"/>
           <p:cNvSpPr>
             <a:spLocks noGrp="1"/>
           </p:cNvSpPr>
@@ -1725,177 +4293,213 @@
         </p:nvSpPr>
         <p:spPr>
           <a:xfrm>
-            <a:off x="838200" y="1825625"/>
-            <a:ext cx="5181600" cy="4351338"/>
+            <a:off x="1103312" y="2060575"/>
+            <a:ext cx="4396339" cy="4195763"/>
           </a:xfrm>
         </p:spPr>
         <p:txBody>
+          <a:bodyPr>
+            <a:normAutofit/>
+          </a:bodyPr>
+          <a:lstStyle>
+            <a:lvl1pPr>
+              <a:defRPr sz="1800"/>
+            </a:lvl1pPr>
+            <a:lvl2pPr>
+              <a:defRPr sz="1600"/>
+            </a:lvl2pPr>
+            <a:lvl3pPr>
+              <a:defRPr sz="1400"/>
+            </a:lvl3pPr>
+            <a:lvl4pPr>
+              <a:defRPr sz="1200"/>
+            </a:lvl4pPr>
+            <a:lvl5pPr>
+              <a:defRPr sz="1200"/>
+            </a:lvl5pPr>
+            <a:lvl6pPr>
+              <a:defRPr sz="1200"/>
+            </a:lvl6pPr>
+            <a:lvl7pPr>
+              <a:defRPr sz="1200"/>
+            </a:lvl7pPr>
+            <a:lvl8pPr>
+              <a:defRPr sz="1200"/>
+            </a:lvl8pPr>
+            <a:lvl9pPr>
+              <a:defRPr sz="1200"/>
+            </a:lvl9pPr>
+          </a:lstStyle>
+          <a:p>
+            <a:pPr lvl="0"/>
+            <a:r>
+              <a:rPr lang="en-US"/>
+              <a:t>Click to edit Master text styles</a:t>
+            </a:r>
+          </a:p>
+          <a:p>
+            <a:pPr lvl="1"/>
+            <a:r>
+              <a:rPr lang="en-US"/>
+              <a:t>Second level</a:t>
+            </a:r>
+          </a:p>
+          <a:p>
+            <a:pPr lvl="2"/>
+            <a:r>
+              <a:rPr lang="en-US"/>
+              <a:t>Third level</a:t>
+            </a:r>
+          </a:p>
+          <a:p>
+            <a:pPr lvl="3"/>
+            <a:r>
+              <a:rPr lang="en-US"/>
+              <a:t>Fourth level</a:t>
+            </a:r>
+          </a:p>
+          <a:p>
+            <a:pPr lvl="4"/>
+            <a:r>
+              <a:rPr lang="en-US"/>
+              <a:t>Fifth level</a:t>
+            </a:r>
+            <a:endParaRPr lang="en-US" dirty="0"/>
+          </a:p>
+        </p:txBody>
+      </p:sp>
+      <p:sp>
+        <p:nvSpPr>
+          <p:cNvPr id="4" name="Content Placeholder 3"/>
+          <p:cNvSpPr>
+            <a:spLocks noGrp="1"/>
+          </p:cNvSpPr>
+          <p:nvPr>
+            <p:ph sz="half" idx="2"/>
+          </p:nvPr>
+        </p:nvSpPr>
+        <p:spPr>
+          <a:xfrm>
+            <a:off x="5654493" y="2056092"/>
+            <a:ext cx="4396341" cy="4200245"/>
+          </a:xfrm>
+        </p:spPr>
+        <p:txBody>
+          <a:bodyPr>
+            <a:normAutofit/>
+          </a:bodyPr>
+          <a:lstStyle>
+            <a:lvl1pPr>
+              <a:defRPr sz="1800"/>
+            </a:lvl1pPr>
+            <a:lvl2pPr>
+              <a:defRPr sz="1600"/>
+            </a:lvl2pPr>
+            <a:lvl3pPr>
+              <a:defRPr sz="1400"/>
+            </a:lvl3pPr>
+            <a:lvl4pPr>
+              <a:defRPr sz="1200"/>
+            </a:lvl4pPr>
+            <a:lvl5pPr>
+              <a:defRPr sz="1200"/>
+            </a:lvl5pPr>
+            <a:lvl6pPr>
+              <a:defRPr sz="1200"/>
+            </a:lvl6pPr>
+            <a:lvl7pPr>
+              <a:defRPr sz="1200"/>
+            </a:lvl7pPr>
+            <a:lvl8pPr>
+              <a:defRPr sz="1200"/>
+            </a:lvl8pPr>
+            <a:lvl9pPr>
+              <a:defRPr sz="1200"/>
+            </a:lvl9pPr>
+          </a:lstStyle>
+          <a:p>
+            <a:pPr lvl="0"/>
+            <a:r>
+              <a:rPr lang="en-US"/>
+              <a:t>Click to edit Master text styles</a:t>
+            </a:r>
+          </a:p>
+          <a:p>
+            <a:pPr lvl="1"/>
+            <a:r>
+              <a:rPr lang="en-US"/>
+              <a:t>Second level</a:t>
+            </a:r>
+          </a:p>
+          <a:p>
+            <a:pPr lvl="2"/>
+            <a:r>
+              <a:rPr lang="en-US"/>
+              <a:t>Third level</a:t>
+            </a:r>
+          </a:p>
+          <a:p>
+            <a:pPr lvl="3"/>
+            <a:r>
+              <a:rPr lang="en-US"/>
+              <a:t>Fourth level</a:t>
+            </a:r>
+          </a:p>
+          <a:p>
+            <a:pPr lvl="4"/>
+            <a:r>
+              <a:rPr lang="en-US"/>
+              <a:t>Fifth level</a:t>
+            </a:r>
+            <a:endParaRPr lang="en-US" dirty="0"/>
+          </a:p>
+        </p:txBody>
+      </p:sp>
+      <p:sp>
+        <p:nvSpPr>
+          <p:cNvPr id="5" name="Date Placeholder 4"/>
+          <p:cNvSpPr>
+            <a:spLocks noGrp="1"/>
+          </p:cNvSpPr>
+          <p:nvPr>
+            <p:ph type="dt" sz="half" idx="10"/>
+          </p:nvPr>
+        </p:nvSpPr>
+        <p:spPr/>
+        <p:txBody>
           <a:bodyPr/>
           <a:lstStyle/>
           <a:p>
-            <a:pPr lvl="0"/>
-            <a:r>
-              <a:rPr lang="en-US"/>
-              <a:t>Click to edit Master text styles</a:t>
-            </a:r>
-          </a:p>
-          <a:p>
-            <a:pPr lvl="1"/>
-            <a:r>
-              <a:rPr lang="en-US"/>
-              <a:t>Second level</a:t>
-            </a:r>
-          </a:p>
-          <a:p>
-            <a:pPr lvl="2"/>
-            <a:r>
-              <a:rPr lang="en-US"/>
-              <a:t>Third level</a:t>
-            </a:r>
-          </a:p>
-          <a:p>
-            <a:pPr lvl="3"/>
-            <a:r>
-              <a:rPr lang="en-US"/>
-              <a:t>Fourth level</a:t>
-            </a:r>
-          </a:p>
-          <a:p>
-            <a:pPr lvl="4"/>
-            <a:r>
-              <a:rPr lang="en-US"/>
-              <a:t>Fifth level</a:t>
-            </a:r>
+            <a:fld id="{051FC713-0BD0-4E67-99B4-F2FDDCE837D7}" type="datetimeFigureOut">
+              <a:rPr lang="en-IN" smtClean="0"/>
+              <a:t>23-07-2026</a:t>
+            </a:fld>
             <a:endParaRPr lang="en-IN"/>
           </a:p>
         </p:txBody>
       </p:sp>
       <p:sp>
         <p:nvSpPr>
-          <p:cNvPr id="4" name="Content Placeholder 3">
-            <a:extLst>
-              <a:ext uri="{FF2B5EF4-FFF2-40B4-BE49-F238E27FC236}">
-                <a16:creationId xmlns:a16="http://schemas.microsoft.com/office/drawing/2014/main" id="{70D71DBE-005B-9D1D-327F-1CDAE7321F8E}"/>
-              </a:ext>
-            </a:extLst>
-          </p:cNvPr>
-          <p:cNvSpPr>
-            <a:spLocks noGrp="1"/>
-          </p:cNvSpPr>
-          <p:nvPr>
-            <p:ph sz="half" idx="2"/>
-          </p:nvPr>
-        </p:nvSpPr>
-        <p:spPr>
-          <a:xfrm>
-            <a:off x="6172200" y="1825625"/>
-            <a:ext cx="5181600" cy="4351338"/>
-          </a:xfrm>
-        </p:spPr>
+          <p:cNvPr id="6" name="Footer Placeholder 5"/>
+          <p:cNvSpPr>
+            <a:spLocks noGrp="1"/>
+          </p:cNvSpPr>
+          <p:nvPr>
+            <p:ph type="ftr" sz="quarter" idx="11"/>
+          </p:nvPr>
+        </p:nvSpPr>
+        <p:spPr/>
         <p:txBody>
           <a:bodyPr/>
           <a:lstStyle/>
           <a:p>
-            <a:pPr lvl="0"/>
-            <a:r>
-              <a:rPr lang="en-US"/>
-              <a:t>Click to edit Master text styles</a:t>
-            </a:r>
-          </a:p>
-          <a:p>
-            <a:pPr lvl="1"/>
-            <a:r>
-              <a:rPr lang="en-US"/>
-              <a:t>Second level</a:t>
-            </a:r>
-          </a:p>
-          <a:p>
-            <a:pPr lvl="2"/>
-            <a:r>
-              <a:rPr lang="en-US"/>
-              <a:t>Third level</a:t>
-            </a:r>
-          </a:p>
-          <a:p>
-            <a:pPr lvl="3"/>
-            <a:r>
-              <a:rPr lang="en-US"/>
-              <a:t>Fourth level</a:t>
-            </a:r>
-          </a:p>
-          <a:p>
-            <a:pPr lvl="4"/>
-            <a:r>
-              <a:rPr lang="en-US"/>
-              <a:t>Fifth level</a:t>
-            </a:r>
             <a:endParaRPr lang="en-IN"/>
           </a:p>
         </p:txBody>
       </p:sp>
       <p:sp>
         <p:nvSpPr>
-          <p:cNvPr id="5" name="Date Placeholder 4">
-            <a:extLst>
-              <a:ext uri="{FF2B5EF4-FFF2-40B4-BE49-F238E27FC236}">
-                <a16:creationId xmlns:a16="http://schemas.microsoft.com/office/drawing/2014/main" id="{06C0DD1F-BA20-61D0-68D1-26971AF07D55}"/>
-              </a:ext>
-            </a:extLst>
-          </p:cNvPr>
-          <p:cNvSpPr>
-            <a:spLocks noGrp="1"/>
-          </p:cNvSpPr>
-          <p:nvPr>
-            <p:ph type="dt" sz="half" idx="10"/>
-          </p:nvPr>
-        </p:nvSpPr>
-        <p:spPr/>
-        <p:txBody>
-          <a:bodyPr/>
-          <a:lstStyle/>
-          <a:p>
-            <a:fld id="{051FC713-0BD0-4E67-99B4-F2FDDCE837D7}" type="datetimeFigureOut">
-              <a:rPr lang="en-IN" smtClean="0"/>
-              <a:t>18-07-2026</a:t>
-            </a:fld>
-            <a:endParaRPr lang="en-IN"/>
-          </a:p>
-        </p:txBody>
-      </p:sp>
-      <p:sp>
-        <p:nvSpPr>
-          <p:cNvPr id="6" name="Footer Placeholder 5">
-            <a:extLst>
-              <a:ext uri="{FF2B5EF4-FFF2-40B4-BE49-F238E27FC236}">
-                <a16:creationId xmlns:a16="http://schemas.microsoft.com/office/drawing/2014/main" id="{9119C035-6E08-AFF4-193A-2BDFBC88E82F}"/>
-              </a:ext>
-            </a:extLst>
-          </p:cNvPr>
-          <p:cNvSpPr>
-            <a:spLocks noGrp="1"/>
-          </p:cNvSpPr>
-          <p:nvPr>
-            <p:ph type="ftr" sz="quarter" idx="11"/>
-          </p:nvPr>
-        </p:nvSpPr>
-        <p:spPr/>
-        <p:txBody>
-          <a:bodyPr/>
-          <a:lstStyle/>
-          <a:p>
-            <a:endParaRPr lang="en-IN"/>
-          </a:p>
-        </p:txBody>
-      </p:sp>
-      <p:sp>
-        <p:nvSpPr>
-          <p:cNvPr id="7" name="Slide Number Placeholder 6">
-            <a:extLst>
-              <a:ext uri="{FF2B5EF4-FFF2-40B4-BE49-F238E27FC236}">
-                <a16:creationId xmlns:a16="http://schemas.microsoft.com/office/drawing/2014/main" id="{448ED1ED-E166-F103-3BC3-BD0D1642D9F1}"/>
-              </a:ext>
-            </a:extLst>
-          </p:cNvPr>
+          <p:cNvPr id="7" name="Slide Number Placeholder 6"/>
           <p:cNvSpPr>
             <a:spLocks noGrp="1"/>
           </p:cNvSpPr>
@@ -1919,7 +4523,7 @@
     </p:spTree>
     <p:extLst>
       <p:ext uri="{BB962C8B-B14F-4D97-AF65-F5344CB8AC3E}">
-        <p14:creationId xmlns:p14="http://schemas.microsoft.com/office/powerpoint/2010/main" val="2015683574"/>
+        <p14:creationId xmlns:p14="http://schemas.microsoft.com/office/powerpoint/2010/main" val="1649500133"/>
       </p:ext>
     </p:extLst>
   </p:cSld>
@@ -1948,66 +4552,62 @@
       </p:grpSpPr>
       <p:sp>
         <p:nvSpPr>
-          <p:cNvPr id="2" name="Title 1">
-            <a:extLst>
-              <a:ext uri="{FF2B5EF4-FFF2-40B4-BE49-F238E27FC236}">
-                <a16:creationId xmlns:a16="http://schemas.microsoft.com/office/drawing/2014/main" id="{72563AC2-4F5B-AE17-DDE3-1B0A3C239471}"/>
-              </a:ext>
-            </a:extLst>
-          </p:cNvPr>
+          <p:cNvPr id="2" name="Title 1"/>
           <p:cNvSpPr>
             <a:spLocks noGrp="1"/>
           </p:cNvSpPr>
           <p:nvPr>
             <p:ph type="title"/>
+          </p:nvPr>
+        </p:nvSpPr>
+        <p:spPr/>
+        <p:txBody>
+          <a:bodyPr/>
+          <a:lstStyle>
+            <a:lvl1pPr>
+              <a:defRPr/>
+            </a:lvl1pPr>
+          </a:lstStyle>
+          <a:p>
+            <a:r>
+              <a:rPr lang="en-US"/>
+              <a:t>Click to edit Master title style</a:t>
+            </a:r>
+            <a:endParaRPr lang="en-US" dirty="0"/>
+          </a:p>
+        </p:txBody>
+      </p:sp>
+      <p:sp>
+        <p:nvSpPr>
+          <p:cNvPr id="3" name="Text Placeholder 2"/>
+          <p:cNvSpPr>
+            <a:spLocks noGrp="1"/>
+          </p:cNvSpPr>
+          <p:nvPr>
+            <p:ph type="body" idx="1"/>
           </p:nvPr>
         </p:nvSpPr>
         <p:spPr>
           <a:xfrm>
-            <a:off x="839788" y="365125"/>
-            <a:ext cx="10515600" cy="1325563"/>
+            <a:off x="1103313" y="1905000"/>
+            <a:ext cx="4396338" cy="576262"/>
           </a:xfrm>
         </p:spPr>
         <p:txBody>
-          <a:bodyPr/>
-          <a:lstStyle/>
-          <a:p>
-            <a:r>
-              <a:rPr lang="en-US"/>
-              <a:t>Click to edit Master title style</a:t>
-            </a:r>
-            <a:endParaRPr lang="en-IN"/>
-          </a:p>
-        </p:txBody>
-      </p:sp>
-      <p:sp>
-        <p:nvSpPr>
-          <p:cNvPr id="3" name="Text Placeholder 2">
-            <a:extLst>
-              <a:ext uri="{FF2B5EF4-FFF2-40B4-BE49-F238E27FC236}">
-                <a16:creationId xmlns:a16="http://schemas.microsoft.com/office/drawing/2014/main" id="{955E153C-EE41-8E8F-9AFD-101BF98B1489}"/>
-              </a:ext>
-            </a:extLst>
-          </p:cNvPr>
-          <p:cNvSpPr>
-            <a:spLocks noGrp="1"/>
-          </p:cNvSpPr>
-          <p:nvPr>
-            <p:ph type="body" idx="1"/>
-          </p:nvPr>
-        </p:nvSpPr>
-        <p:spPr>
-          <a:xfrm>
-            <a:off x="839788" y="1681163"/>
-            <a:ext cx="5157787" cy="823912"/>
-          </a:xfrm>
-        </p:spPr>
-        <p:txBody>
-          <a:bodyPr anchor="b"/>
+          <a:bodyPr anchor="b">
+            <a:noAutofit/>
+          </a:bodyPr>
           <a:lstStyle>
             <a:lvl1pPr marL="0" indent="0">
               <a:buNone/>
-              <a:defRPr sz="2400" b="1"/>
+              <a:defRPr sz="2400" b="0">
+                <a:solidFill>
+                  <a:schemeClr val="bg2">
+                    <a:lumMod val="40000"/>
+                    <a:lumOff val="60000"/>
+                  </a:schemeClr>
+                </a:solidFill>
+              </a:defRPr>
             </a:lvl1pPr>
             <a:lvl2pPr marL="457200" indent="0">
               <a:buNone/>
@@ -2053,13 +4653,7 @@
       </p:sp>
       <p:sp>
         <p:nvSpPr>
-          <p:cNvPr id="4" name="Content Placeholder 3">
-            <a:extLst>
-              <a:ext uri="{FF2B5EF4-FFF2-40B4-BE49-F238E27FC236}">
-                <a16:creationId xmlns:a16="http://schemas.microsoft.com/office/drawing/2014/main" id="{D368EB0B-D7D5-C962-4900-9EBAE8CDDDB2}"/>
-              </a:ext>
-            </a:extLst>
-          </p:cNvPr>
+          <p:cNvPr id="4" name="Content Placeholder 3"/>
           <p:cNvSpPr>
             <a:spLocks noGrp="1"/>
           </p:cNvSpPr>
@@ -2069,13 +4663,43 @@
         </p:nvSpPr>
         <p:spPr>
           <a:xfrm>
-            <a:off x="839788" y="2505075"/>
-            <a:ext cx="5157787" cy="3684588"/>
+            <a:off x="1103312" y="2514600"/>
+            <a:ext cx="4396339" cy="3741738"/>
           </a:xfrm>
         </p:spPr>
         <p:txBody>
-          <a:bodyPr/>
-          <a:lstStyle/>
+          <a:bodyPr>
+            <a:normAutofit/>
+          </a:bodyPr>
+          <a:lstStyle>
+            <a:lvl1pPr>
+              <a:defRPr sz="1800"/>
+            </a:lvl1pPr>
+            <a:lvl2pPr>
+              <a:defRPr sz="1600"/>
+            </a:lvl2pPr>
+            <a:lvl3pPr>
+              <a:defRPr sz="1400"/>
+            </a:lvl3pPr>
+            <a:lvl4pPr>
+              <a:defRPr sz="1200"/>
+            </a:lvl4pPr>
+            <a:lvl5pPr>
+              <a:defRPr sz="1200"/>
+            </a:lvl5pPr>
+            <a:lvl6pPr>
+              <a:defRPr sz="1200"/>
+            </a:lvl6pPr>
+            <a:lvl7pPr>
+              <a:defRPr sz="1200"/>
+            </a:lvl7pPr>
+            <a:lvl8pPr>
+              <a:defRPr sz="1200"/>
+            </a:lvl8pPr>
+            <a:lvl9pPr>
+              <a:defRPr sz="1200"/>
+            </a:lvl9pPr>
+          </a:lstStyle>
           <a:p>
             <a:pPr lvl="0"/>
             <a:r>
@@ -2110,19 +4734,13 @@
               <a:rPr lang="en-US"/>
               <a:t>Fifth level</a:t>
             </a:r>
-            <a:endParaRPr lang="en-IN"/>
-          </a:p>
-        </p:txBody>
-      </p:sp>
-      <p:sp>
-        <p:nvSpPr>
-          <p:cNvPr id="5" name="Text Placeholder 4">
-            <a:extLst>
-              <a:ext uri="{FF2B5EF4-FFF2-40B4-BE49-F238E27FC236}">
-                <a16:creationId xmlns:a16="http://schemas.microsoft.com/office/drawing/2014/main" id="{3DE974C5-7809-C653-B5A7-F22C4DB003AA}"/>
-              </a:ext>
-            </a:extLst>
-          </p:cNvPr>
+            <a:endParaRPr lang="en-US" dirty="0"/>
+          </a:p>
+        </p:txBody>
+      </p:sp>
+      <p:sp>
+        <p:nvSpPr>
+          <p:cNvPr id="5" name="Text Placeholder 4"/>
           <p:cNvSpPr>
             <a:spLocks noGrp="1"/>
           </p:cNvSpPr>
@@ -2132,16 +4750,25 @@
         </p:nvSpPr>
         <p:spPr>
           <a:xfrm>
-            <a:off x="6172200" y="1681163"/>
-            <a:ext cx="5183188" cy="823912"/>
+            <a:off x="5654495" y="1905000"/>
+            <a:ext cx="4396339" cy="576262"/>
           </a:xfrm>
         </p:spPr>
         <p:txBody>
-          <a:bodyPr anchor="b"/>
+          <a:bodyPr anchor="b">
+            <a:noAutofit/>
+          </a:bodyPr>
           <a:lstStyle>
             <a:lvl1pPr marL="0" indent="0">
               <a:buNone/>
-              <a:defRPr sz="2400" b="1"/>
+              <a:defRPr sz="2400" b="0">
+                <a:solidFill>
+                  <a:schemeClr val="bg2">
+                    <a:lumMod val="40000"/>
+                    <a:lumOff val="60000"/>
+                  </a:schemeClr>
+                </a:solidFill>
+              </a:defRPr>
             </a:lvl1pPr>
             <a:lvl2pPr marL="457200" indent="0">
               <a:buNone/>
@@ -2187,13 +4814,7 @@
       </p:sp>
       <p:sp>
         <p:nvSpPr>
-          <p:cNvPr id="6" name="Content Placeholder 5">
-            <a:extLst>
-              <a:ext uri="{FF2B5EF4-FFF2-40B4-BE49-F238E27FC236}">
-                <a16:creationId xmlns:a16="http://schemas.microsoft.com/office/drawing/2014/main" id="{A466B687-B5EB-7A77-8A95-95C9D0440350}"/>
-              </a:ext>
-            </a:extLst>
-          </p:cNvPr>
+          <p:cNvPr id="6" name="Content Placeholder 5"/>
           <p:cNvSpPr>
             <a:spLocks noGrp="1"/>
           </p:cNvSpPr>
@@ -2203,65 +4824,112 @@
         </p:nvSpPr>
         <p:spPr>
           <a:xfrm>
-            <a:off x="6172200" y="2505075"/>
-            <a:ext cx="5183188" cy="3684588"/>
+            <a:off x="5654495" y="2514600"/>
+            <a:ext cx="4396339" cy="3741738"/>
           </a:xfrm>
         </p:spPr>
         <p:txBody>
+          <a:bodyPr>
+            <a:normAutofit/>
+          </a:bodyPr>
+          <a:lstStyle>
+            <a:lvl1pPr>
+              <a:defRPr sz="1800"/>
+            </a:lvl1pPr>
+            <a:lvl2pPr>
+              <a:defRPr sz="1600"/>
+            </a:lvl2pPr>
+            <a:lvl3pPr>
+              <a:defRPr sz="1400"/>
+            </a:lvl3pPr>
+            <a:lvl4pPr>
+              <a:defRPr sz="1200"/>
+            </a:lvl4pPr>
+            <a:lvl5pPr>
+              <a:defRPr sz="1200"/>
+            </a:lvl5pPr>
+            <a:lvl6pPr>
+              <a:defRPr sz="1200"/>
+            </a:lvl6pPr>
+            <a:lvl7pPr>
+              <a:defRPr sz="1200"/>
+            </a:lvl7pPr>
+            <a:lvl8pPr>
+              <a:defRPr sz="1200"/>
+            </a:lvl8pPr>
+            <a:lvl9pPr>
+              <a:defRPr sz="1200"/>
+            </a:lvl9pPr>
+          </a:lstStyle>
+          <a:p>
+            <a:pPr lvl="0"/>
+            <a:r>
+              <a:rPr lang="en-US"/>
+              <a:t>Click to edit Master text styles</a:t>
+            </a:r>
+          </a:p>
+          <a:p>
+            <a:pPr lvl="1"/>
+            <a:r>
+              <a:rPr lang="en-US"/>
+              <a:t>Second level</a:t>
+            </a:r>
+          </a:p>
+          <a:p>
+            <a:pPr lvl="2"/>
+            <a:r>
+              <a:rPr lang="en-US"/>
+              <a:t>Third level</a:t>
+            </a:r>
+          </a:p>
+          <a:p>
+            <a:pPr lvl="3"/>
+            <a:r>
+              <a:rPr lang="en-US"/>
+              <a:t>Fourth level</a:t>
+            </a:r>
+          </a:p>
+          <a:p>
+            <a:pPr lvl="4"/>
+            <a:r>
+              <a:rPr lang="en-US"/>
+              <a:t>Fifth level</a:t>
+            </a:r>
+            <a:endParaRPr lang="en-US" dirty="0"/>
+          </a:p>
+        </p:txBody>
+      </p:sp>
+      <p:sp>
+        <p:nvSpPr>
+          <p:cNvPr id="7" name="Date Placeholder 6"/>
+          <p:cNvSpPr>
+            <a:spLocks noGrp="1"/>
+          </p:cNvSpPr>
+          <p:nvPr>
+            <p:ph type="dt" sz="half" idx="10"/>
+          </p:nvPr>
+        </p:nvSpPr>
+        <p:spPr/>
+        <p:txBody>
           <a:bodyPr/>
           <a:lstStyle/>
           <a:p>
-            <a:pPr lvl="0"/>
-            <a:r>
-              <a:rPr lang="en-US"/>
-              <a:t>Click to edit Master text styles</a:t>
-            </a:r>
-          </a:p>
-          <a:p>
-            <a:pPr lvl="1"/>
-            <a:r>
-              <a:rPr lang="en-US"/>
-              <a:t>Second level</a:t>
-            </a:r>
-          </a:p>
-          <a:p>
-            <a:pPr lvl="2"/>
-            <a:r>
-              <a:rPr lang="en-US"/>
-              <a:t>Third level</a:t>
-            </a:r>
-          </a:p>
-          <a:p>
-            <a:pPr lvl="3"/>
-            <a:r>
-              <a:rPr lang="en-US"/>
-              <a:t>Fourth level</a:t>
-            </a:r>
-          </a:p>
-          <a:p>
-            <a:pPr lvl="4"/>
-            <a:r>
-              <a:rPr lang="en-US"/>
-              <a:t>Fifth level</a:t>
-            </a:r>
+            <a:fld id="{051FC713-0BD0-4E67-99B4-F2FDDCE837D7}" type="datetimeFigureOut">
+              <a:rPr lang="en-IN" smtClean="0"/>
+              <a:t>23-07-2026</a:t>
+            </a:fld>
             <a:endParaRPr lang="en-IN"/>
           </a:p>
         </p:txBody>
       </p:sp>
       <p:sp>
         <p:nvSpPr>
-          <p:cNvPr id="7" name="Date Placeholder 6">
-            <a:extLst>
-              <a:ext uri="{FF2B5EF4-FFF2-40B4-BE49-F238E27FC236}">
-                <a16:creationId xmlns:a16="http://schemas.microsoft.com/office/drawing/2014/main" id="{07227302-2EFE-85F9-A139-53047800BF65}"/>
-              </a:ext>
-            </a:extLst>
-          </p:cNvPr>
-          <p:cNvSpPr>
-            <a:spLocks noGrp="1"/>
-          </p:cNvSpPr>
-          <p:nvPr>
-            <p:ph type="dt" sz="half" idx="10"/>
+          <p:cNvPr id="8" name="Footer Placeholder 7"/>
+          <p:cNvSpPr>
+            <a:spLocks noGrp="1"/>
+          </p:cNvSpPr>
+          <p:nvPr>
+            <p:ph type="ftr" sz="quarter" idx="11"/>
           </p:nvPr>
         </p:nvSpPr>
         <p:spPr/>
@@ -2269,48 +4937,13 @@
           <a:bodyPr/>
           <a:lstStyle/>
           <a:p>
-            <a:fld id="{051FC713-0BD0-4E67-99B4-F2FDDCE837D7}" type="datetimeFigureOut">
-              <a:rPr lang="en-IN" smtClean="0"/>
-              <a:t>18-07-2026</a:t>
-            </a:fld>
             <a:endParaRPr lang="en-IN"/>
           </a:p>
         </p:txBody>
       </p:sp>
       <p:sp>
         <p:nvSpPr>
-          <p:cNvPr id="8" name="Footer Placeholder 7">
-            <a:extLst>
-              <a:ext uri="{FF2B5EF4-FFF2-40B4-BE49-F238E27FC236}">
-                <a16:creationId xmlns:a16="http://schemas.microsoft.com/office/drawing/2014/main" id="{0DA52205-1555-0FB2-9A4C-E7C06DBAC7BA}"/>
-              </a:ext>
-            </a:extLst>
-          </p:cNvPr>
-          <p:cNvSpPr>
-            <a:spLocks noGrp="1"/>
-          </p:cNvSpPr>
-          <p:nvPr>
-            <p:ph type="ftr" sz="quarter" idx="11"/>
-          </p:nvPr>
-        </p:nvSpPr>
-        <p:spPr/>
-        <p:txBody>
-          <a:bodyPr/>
-          <a:lstStyle/>
-          <a:p>
-            <a:endParaRPr lang="en-IN"/>
-          </a:p>
-        </p:txBody>
-      </p:sp>
-      <p:sp>
-        <p:nvSpPr>
-          <p:cNvPr id="9" name="Slide Number Placeholder 8">
-            <a:extLst>
-              <a:ext uri="{FF2B5EF4-FFF2-40B4-BE49-F238E27FC236}">
-                <a16:creationId xmlns:a16="http://schemas.microsoft.com/office/drawing/2014/main" id="{83A7B3A4-E51A-4BEA-BB2B-48DB8C08E35C}"/>
-              </a:ext>
-            </a:extLst>
-          </p:cNvPr>
+          <p:cNvPr id="9" name="Slide Number Placeholder 8"/>
           <p:cNvSpPr>
             <a:spLocks noGrp="1"/>
           </p:cNvSpPr>
@@ -2334,7 +4967,7 @@
     </p:spTree>
     <p:extLst>
       <p:ext uri="{BB962C8B-B14F-4D97-AF65-F5344CB8AC3E}">
-        <p14:creationId xmlns:p14="http://schemas.microsoft.com/office/powerpoint/2010/main" val="218361350"/>
+        <p14:creationId xmlns:p14="http://schemas.microsoft.com/office/powerpoint/2010/main" val="3434416387"/>
       </p:ext>
     </p:extLst>
   </p:cSld>
@@ -2363,13 +4996,7 @@
       </p:grpSpPr>
       <p:sp>
         <p:nvSpPr>
-          <p:cNvPr id="2" name="Title 1">
-            <a:extLst>
-              <a:ext uri="{FF2B5EF4-FFF2-40B4-BE49-F238E27FC236}">
-                <a16:creationId xmlns:a16="http://schemas.microsoft.com/office/drawing/2014/main" id="{AA6F2FD0-3E8D-B3BE-91B4-73B2DFB88C33}"/>
-              </a:ext>
-            </a:extLst>
-          </p:cNvPr>
+          <p:cNvPr id="2" name="Title 1"/>
           <p:cNvSpPr>
             <a:spLocks noGrp="1"/>
           </p:cNvSpPr>
@@ -2386,19 +5013,13 @@
               <a:rPr lang="en-US"/>
               <a:t>Click to edit Master title style</a:t>
             </a:r>
-            <a:endParaRPr lang="en-IN"/>
-          </a:p>
-        </p:txBody>
-      </p:sp>
-      <p:sp>
-        <p:nvSpPr>
-          <p:cNvPr id="3" name="Date Placeholder 2">
-            <a:extLst>
-              <a:ext uri="{FF2B5EF4-FFF2-40B4-BE49-F238E27FC236}">
-                <a16:creationId xmlns:a16="http://schemas.microsoft.com/office/drawing/2014/main" id="{C4EDC7C3-EE14-7253-D16A-F40AB50FD773}"/>
-              </a:ext>
-            </a:extLst>
-          </p:cNvPr>
+            <a:endParaRPr lang="en-US" dirty="0"/>
+          </a:p>
+        </p:txBody>
+      </p:sp>
+      <p:sp>
+        <p:nvSpPr>
+          <p:cNvPr id="7" name="Date Placeholder 2"/>
           <p:cNvSpPr>
             <a:spLocks noGrp="1"/>
           </p:cNvSpPr>
@@ -2413,7 +5034,7 @@
           <a:p>
             <a:fld id="{051FC713-0BD0-4E67-99B4-F2FDDCE837D7}" type="datetimeFigureOut">
               <a:rPr lang="en-IN" smtClean="0"/>
-              <a:t>18-07-2026</a:t>
+              <a:t>23-07-2026</a:t>
             </a:fld>
             <a:endParaRPr lang="en-IN"/>
           </a:p>
@@ -2421,13 +5042,7 @@
       </p:sp>
       <p:sp>
         <p:nvSpPr>
-          <p:cNvPr id="4" name="Footer Placeholder 3">
-            <a:extLst>
-              <a:ext uri="{FF2B5EF4-FFF2-40B4-BE49-F238E27FC236}">
-                <a16:creationId xmlns:a16="http://schemas.microsoft.com/office/drawing/2014/main" id="{51357FDD-D6ED-C5BC-4637-233299BA929C}"/>
-              </a:ext>
-            </a:extLst>
-          </p:cNvPr>
+          <p:cNvPr id="5" name="Footer Placeholder 3"/>
           <p:cNvSpPr>
             <a:spLocks noGrp="1"/>
           </p:cNvSpPr>
@@ -2446,13 +5061,7 @@
       </p:sp>
       <p:sp>
         <p:nvSpPr>
-          <p:cNvPr id="5" name="Slide Number Placeholder 4">
-            <a:extLst>
-              <a:ext uri="{FF2B5EF4-FFF2-40B4-BE49-F238E27FC236}">
-                <a16:creationId xmlns:a16="http://schemas.microsoft.com/office/drawing/2014/main" id="{40265443-FD9B-5056-4B3B-E94909C60AF8}"/>
-              </a:ext>
-            </a:extLst>
-          </p:cNvPr>
+          <p:cNvPr id="6" name="Slide Number Placeholder 4"/>
           <p:cNvSpPr>
             <a:spLocks noGrp="1"/>
           </p:cNvSpPr>
@@ -2476,7 +5085,7 @@
     </p:spTree>
     <p:extLst>
       <p:ext uri="{BB962C8B-B14F-4D97-AF65-F5344CB8AC3E}">
-        <p14:creationId xmlns:p14="http://schemas.microsoft.com/office/powerpoint/2010/main" val="200942237"/>
+        <p14:creationId xmlns:p14="http://schemas.microsoft.com/office/powerpoint/2010/main" val="4285388202"/>
       </p:ext>
     </p:extLst>
   </p:cSld>
@@ -2505,13 +5114,7 @@
       </p:grpSpPr>
       <p:sp>
         <p:nvSpPr>
-          <p:cNvPr id="2" name="Date Placeholder 1">
-            <a:extLst>
-              <a:ext uri="{FF2B5EF4-FFF2-40B4-BE49-F238E27FC236}">
-                <a16:creationId xmlns:a16="http://schemas.microsoft.com/office/drawing/2014/main" id="{3E6BC0B8-A438-F149-D789-5A98372155DF}"/>
-              </a:ext>
-            </a:extLst>
-          </p:cNvPr>
+          <p:cNvPr id="7" name="Date Placeholder 1"/>
           <p:cNvSpPr>
             <a:spLocks noGrp="1"/>
           </p:cNvSpPr>
@@ -2526,7 +5129,7 @@
           <a:p>
             <a:fld id="{051FC713-0BD0-4E67-99B4-F2FDDCE837D7}" type="datetimeFigureOut">
               <a:rPr lang="en-IN" smtClean="0"/>
-              <a:t>18-07-2026</a:t>
+              <a:t>23-07-2026</a:t>
             </a:fld>
             <a:endParaRPr lang="en-IN"/>
           </a:p>
@@ -2534,13 +5137,7 @@
       </p:sp>
       <p:sp>
         <p:nvSpPr>
-          <p:cNvPr id="3" name="Footer Placeholder 2">
-            <a:extLst>
-              <a:ext uri="{FF2B5EF4-FFF2-40B4-BE49-F238E27FC236}">
-                <a16:creationId xmlns:a16="http://schemas.microsoft.com/office/drawing/2014/main" id="{1DAFF54D-8EB0-0179-A02B-A392A0294FE1}"/>
-              </a:ext>
-            </a:extLst>
-          </p:cNvPr>
+          <p:cNvPr id="5" name="Footer Placeholder 2"/>
           <p:cNvSpPr>
             <a:spLocks noGrp="1"/>
           </p:cNvSpPr>
@@ -2559,13 +5156,7 @@
       </p:sp>
       <p:sp>
         <p:nvSpPr>
-          <p:cNvPr id="4" name="Slide Number Placeholder 3">
-            <a:extLst>
-              <a:ext uri="{FF2B5EF4-FFF2-40B4-BE49-F238E27FC236}">
-                <a16:creationId xmlns:a16="http://schemas.microsoft.com/office/drawing/2014/main" id="{ECAB766D-2405-73AA-6208-07F8FB7E657F}"/>
-              </a:ext>
-            </a:extLst>
-          </p:cNvPr>
+          <p:cNvPr id="6" name="Slide Number Placeholder 3"/>
           <p:cNvSpPr>
             <a:spLocks noGrp="1"/>
           </p:cNvSpPr>
@@ -2589,7 +5180,7 @@
     </p:spTree>
     <p:extLst>
       <p:ext uri="{BB962C8B-B14F-4D97-AF65-F5344CB8AC3E}">
-        <p14:creationId xmlns:p14="http://schemas.microsoft.com/office/powerpoint/2010/main" val="4041540952"/>
+        <p14:creationId xmlns:p14="http://schemas.microsoft.com/office/powerpoint/2010/main" val="2186271411"/>
       </p:ext>
     </p:extLst>
   </p:cSld>
@@ -2618,13 +5209,7 @@
       </p:grpSpPr>
       <p:sp>
         <p:nvSpPr>
-          <p:cNvPr id="2" name="Title 1">
-            <a:extLst>
-              <a:ext uri="{FF2B5EF4-FFF2-40B4-BE49-F238E27FC236}">
-                <a16:creationId xmlns:a16="http://schemas.microsoft.com/office/drawing/2014/main" id="{72E6601A-EC1D-D4E0-5708-5AC662AF5065}"/>
-              </a:ext>
-            </a:extLst>
-          </p:cNvPr>
+          <p:cNvPr id="2" name="Title 1"/>
           <p:cNvSpPr>
             <a:spLocks noGrp="1"/>
           </p:cNvSpPr>
@@ -2634,15 +5219,15 @@
         </p:nvSpPr>
         <p:spPr>
           <a:xfrm>
-            <a:off x="839788" y="457200"/>
-            <a:ext cx="3932237" cy="1600200"/>
+            <a:off x="1154953" y="1447800"/>
+            <a:ext cx="3401064" cy="1447800"/>
           </a:xfrm>
         </p:spPr>
         <p:txBody>
           <a:bodyPr anchor="b"/>
           <a:lstStyle>
-            <a:lvl1pPr>
-              <a:defRPr sz="3200"/>
+            <a:lvl1pPr algn="l">
+              <a:defRPr sz="2400" b="0"/>
             </a:lvl1pPr>
           </a:lstStyle>
           <a:p>
@@ -2650,19 +5235,13 @@
               <a:rPr lang="en-US"/>
               <a:t>Click to edit Master title style</a:t>
             </a:r>
-            <a:endParaRPr lang="en-IN"/>
-          </a:p>
-        </p:txBody>
-      </p:sp>
-      <p:sp>
-        <p:nvSpPr>
-          <p:cNvPr id="3" name="Content Placeholder 2">
-            <a:extLst>
-              <a:ext uri="{FF2B5EF4-FFF2-40B4-BE49-F238E27FC236}">
-                <a16:creationId xmlns:a16="http://schemas.microsoft.com/office/drawing/2014/main" id="{3D019741-3F6A-7BD1-9B10-B4F5C0D5F43F}"/>
-              </a:ext>
-            </a:extLst>
-          </p:cNvPr>
+            <a:endParaRPr lang="en-US" dirty="0"/>
+          </a:p>
+        </p:txBody>
+      </p:sp>
+      <p:sp>
+        <p:nvSpPr>
+          <p:cNvPr id="3" name="Content Placeholder 2"/>
           <p:cNvSpPr>
             <a:spLocks noGrp="1"/>
           </p:cNvSpPr>
@@ -2672,39 +5251,41 @@
         </p:nvSpPr>
         <p:spPr>
           <a:xfrm>
-            <a:off x="5183188" y="987425"/>
-            <a:ext cx="6172200" cy="4873625"/>
+            <a:off x="4784616" y="1447800"/>
+            <a:ext cx="5195997" cy="4572000"/>
           </a:xfrm>
         </p:spPr>
         <p:txBody>
-          <a:bodyPr/>
+          <a:bodyPr anchor="ctr">
+            <a:normAutofit/>
+          </a:bodyPr>
           <a:lstStyle>
             <a:lvl1pPr>
-              <a:defRPr sz="3200"/>
+              <a:defRPr sz="2000"/>
             </a:lvl1pPr>
             <a:lvl2pPr>
-              <a:defRPr sz="2800"/>
+              <a:defRPr sz="1800"/>
             </a:lvl2pPr>
             <a:lvl3pPr>
-              <a:defRPr sz="2400"/>
+              <a:defRPr sz="1600"/>
             </a:lvl3pPr>
             <a:lvl4pPr>
-              <a:defRPr sz="2000"/>
+              <a:defRPr sz="1400"/>
             </a:lvl4pPr>
             <a:lvl5pPr>
-              <a:defRPr sz="2000"/>
+              <a:defRPr sz="1400"/>
             </a:lvl5pPr>
             <a:lvl6pPr>
-              <a:defRPr sz="2000"/>
+              <a:defRPr sz="1400"/>
             </a:lvl6pPr>
             <a:lvl7pPr>
-              <a:defRPr sz="2000"/>
+              <a:defRPr sz="1400"/>
             </a:lvl7pPr>
             <a:lvl8pPr>
-              <a:defRPr sz="2000"/>
+              <a:defRPr sz="1400"/>
             </a:lvl8pPr>
             <a:lvl9pPr>
-              <a:defRPr sz="2000"/>
+              <a:defRPr sz="1400"/>
             </a:lvl9pPr>
           </a:lstStyle>
           <a:p>
@@ -2741,19 +5322,13 @@
               <a:rPr lang="en-US"/>
               <a:t>Fifth level</a:t>
             </a:r>
-            <a:endParaRPr lang="en-IN"/>
-          </a:p>
-        </p:txBody>
-      </p:sp>
-      <p:sp>
-        <p:nvSpPr>
-          <p:cNvPr id="4" name="Text Placeholder 3">
-            <a:extLst>
-              <a:ext uri="{FF2B5EF4-FFF2-40B4-BE49-F238E27FC236}">
-                <a16:creationId xmlns:a16="http://schemas.microsoft.com/office/drawing/2014/main" id="{C926A179-A12D-DA8C-2E8A-3AFEF4D88590}"/>
-              </a:ext>
-            </a:extLst>
-          </p:cNvPr>
+            <a:endParaRPr lang="en-US" dirty="0"/>
+          </a:p>
+        </p:txBody>
+      </p:sp>
+      <p:sp>
+        <p:nvSpPr>
+          <p:cNvPr id="4" name="Text Placeholder 3"/>
           <p:cNvSpPr>
             <a:spLocks noGrp="1"/>
           </p:cNvSpPr>
@@ -2763,8 +5338,8 @@
         </p:nvSpPr>
         <p:spPr>
           <a:xfrm>
-            <a:off x="839788" y="2057400"/>
-            <a:ext cx="3932237" cy="3811588"/>
+            <a:off x="1154953" y="3129280"/>
+            <a:ext cx="3401063" cy="2895599"/>
           </a:xfrm>
         </p:spPr>
         <p:txBody>
@@ -2772,39 +5347,39 @@
           <a:lstStyle>
             <a:lvl1pPr marL="0" indent="0">
               <a:buNone/>
-              <a:defRPr sz="1600"/>
+              <a:defRPr sz="1400"/>
             </a:lvl1pPr>
             <a:lvl2pPr marL="457200" indent="0">
               <a:buNone/>
-              <a:defRPr sz="1400"/>
+              <a:defRPr sz="1200"/>
             </a:lvl2pPr>
             <a:lvl3pPr marL="914400" indent="0">
               <a:buNone/>
-              <a:defRPr sz="1200"/>
+              <a:defRPr sz="1000"/>
             </a:lvl3pPr>
             <a:lvl4pPr marL="1371600" indent="0">
               <a:buNone/>
-              <a:defRPr sz="1000"/>
+              <a:defRPr sz="900"/>
             </a:lvl4pPr>
             <a:lvl5pPr marL="1828800" indent="0">
               <a:buNone/>
-              <a:defRPr sz="1000"/>
+              <a:defRPr sz="900"/>
             </a:lvl5pPr>
             <a:lvl6pPr marL="2286000" indent="0">
               <a:buNone/>
-              <a:defRPr sz="1000"/>
+              <a:defRPr sz="900"/>
             </a:lvl6pPr>
             <a:lvl7pPr marL="2743200" indent="0">
               <a:buNone/>
-              <a:defRPr sz="1000"/>
+              <a:defRPr sz="900"/>
             </a:lvl7pPr>
             <a:lvl8pPr marL="3200400" indent="0">
               <a:buNone/>
-              <a:defRPr sz="1000"/>
+              <a:defRPr sz="900"/>
             </a:lvl8pPr>
             <a:lvl9pPr marL="3657600" indent="0">
               <a:buNone/>
-              <a:defRPr sz="1000"/>
+              <a:defRPr sz="900"/>
             </a:lvl9pPr>
           </a:lstStyle>
           <a:p>
@@ -2818,13 +5393,7 @@
       </p:sp>
       <p:sp>
         <p:nvSpPr>
-          <p:cNvPr id="5" name="Date Placeholder 4">
-            <a:extLst>
-              <a:ext uri="{FF2B5EF4-FFF2-40B4-BE49-F238E27FC236}">
-                <a16:creationId xmlns:a16="http://schemas.microsoft.com/office/drawing/2014/main" id="{C8E22329-B933-BF74-53FB-9CE3A23BB70E}"/>
-              </a:ext>
-            </a:extLst>
-          </p:cNvPr>
+          <p:cNvPr id="7" name="Date Placeholder 4"/>
           <p:cNvSpPr>
             <a:spLocks noGrp="1"/>
           </p:cNvSpPr>
@@ -2839,7 +5408,7 @@
           <a:p>
             <a:fld id="{051FC713-0BD0-4E67-99B4-F2FDDCE837D7}" type="datetimeFigureOut">
               <a:rPr lang="en-IN" smtClean="0"/>
-              <a:t>18-07-2026</a:t>
+              <a:t>23-07-2026</a:t>
             </a:fld>
             <a:endParaRPr lang="en-IN"/>
           </a:p>
@@ -2847,13 +5416,7 @@
       </p:sp>
       <p:sp>
         <p:nvSpPr>
-          <p:cNvPr id="6" name="Footer Placeholder 5">
-            <a:extLst>
-              <a:ext uri="{FF2B5EF4-FFF2-40B4-BE49-F238E27FC236}">
-                <a16:creationId xmlns:a16="http://schemas.microsoft.com/office/drawing/2014/main" id="{2B6CD828-AB9D-6CA6-2402-9E90495A34C7}"/>
-              </a:ext>
-            </a:extLst>
-          </p:cNvPr>
+          <p:cNvPr id="5" name="Footer Placeholder 5"/>
           <p:cNvSpPr>
             <a:spLocks noGrp="1"/>
           </p:cNvSpPr>
@@ -2872,13 +5435,7 @@
       </p:sp>
       <p:sp>
         <p:nvSpPr>
-          <p:cNvPr id="7" name="Slide Number Placeholder 6">
-            <a:extLst>
-              <a:ext uri="{FF2B5EF4-FFF2-40B4-BE49-F238E27FC236}">
-                <a16:creationId xmlns:a16="http://schemas.microsoft.com/office/drawing/2014/main" id="{6F1C72D7-7670-CB6C-40F2-E0E85B2479F1}"/>
-              </a:ext>
-            </a:extLst>
-          </p:cNvPr>
+          <p:cNvPr id="6" name="Slide Number Placeholder 6"/>
           <p:cNvSpPr>
             <a:spLocks noGrp="1"/>
           </p:cNvSpPr>
@@ -2902,7 +5459,7 @@
     </p:spTree>
     <p:extLst>
       <p:ext uri="{BB962C8B-B14F-4D97-AF65-F5344CB8AC3E}">
-        <p14:creationId xmlns:p14="http://schemas.microsoft.com/office/powerpoint/2010/main" val="1934845017"/>
+        <p14:creationId xmlns:p14="http://schemas.microsoft.com/office/powerpoint/2010/main" val="3279001035"/>
       </p:ext>
     </p:extLst>
   </p:cSld>
@@ -2931,13 +5488,7 @@
       </p:grpSpPr>
       <p:sp>
         <p:nvSpPr>
-          <p:cNvPr id="2" name="Title 1">
-            <a:extLst>
-              <a:ext uri="{FF2B5EF4-FFF2-40B4-BE49-F238E27FC236}">
-                <a16:creationId xmlns:a16="http://schemas.microsoft.com/office/drawing/2014/main" id="{ABC0DDC8-E48D-8C1F-05BD-E8B2ED72D34A}"/>
-              </a:ext>
-            </a:extLst>
-          </p:cNvPr>
+          <p:cNvPr id="2" name="Title 1"/>
           <p:cNvSpPr>
             <a:spLocks noGrp="1"/>
           </p:cNvSpPr>
@@ -2947,15 +5498,17 @@
         </p:nvSpPr>
         <p:spPr>
           <a:xfrm>
-            <a:off x="839788" y="457200"/>
-            <a:ext cx="3932237" cy="1600200"/>
+            <a:off x="1153907" y="1854192"/>
+            <a:ext cx="5092906" cy="1574808"/>
           </a:xfrm>
         </p:spPr>
         <p:txBody>
-          <a:bodyPr anchor="b"/>
+          <a:bodyPr anchor="b">
+            <a:normAutofit/>
+          </a:bodyPr>
           <a:lstStyle>
-            <a:lvl1pPr>
-              <a:defRPr sz="3200"/>
+            <a:lvl1pPr algn="l">
+              <a:defRPr sz="3600" b="0"/>
             </a:lvl1pPr>
           </a:lstStyle>
           <a:p>
@@ -2963,21 +5516,15 @@
               <a:rPr lang="en-US"/>
               <a:t>Click to edit Master title style</a:t>
             </a:r>
-            <a:endParaRPr lang="en-IN"/>
-          </a:p>
-        </p:txBody>
-      </p:sp>
-      <p:sp>
-        <p:nvSpPr>
-          <p:cNvPr id="3" name="Picture Placeholder 2">
-            <a:extLst>
-              <a:ext uri="{FF2B5EF4-FFF2-40B4-BE49-F238E27FC236}">
-                <a16:creationId xmlns:a16="http://schemas.microsoft.com/office/drawing/2014/main" id="{5CD6F25D-CF73-B385-D1C1-8034F62D2432}"/>
-              </a:ext>
-            </a:extLst>
-          </p:cNvPr>
-          <p:cNvSpPr>
-            <a:spLocks noGrp="1"/>
+            <a:endParaRPr lang="en-US" dirty="0"/>
+          </a:p>
+        </p:txBody>
+      </p:sp>
+      <p:sp>
+        <p:nvSpPr>
+          <p:cNvPr id="3" name="Picture Placeholder 2"/>
+          <p:cNvSpPr>
+            <a:spLocks noGrp="1" noChangeAspect="1"/>
           </p:cNvSpPr>
           <p:nvPr>
             <p:ph type="pic" idx="1"/>
@@ -2985,118 +5532,132 @@
         </p:nvSpPr>
         <p:spPr>
           <a:xfrm>
-            <a:off x="5183188" y="987425"/>
-            <a:ext cx="6172200" cy="4873625"/>
+            <a:off x="6949546" y="1143000"/>
+            <a:ext cx="3200400" cy="4572000"/>
           </a:xfrm>
+          <a:prstGeom prst="roundRect">
+            <a:avLst>
+              <a:gd name="adj" fmla="val 1858"/>
+            </a:avLst>
+          </a:prstGeom>
+          <a:effectLst>
+            <a:outerShdw blurRad="50800" dist="50800" dir="5400000" algn="tl" rotWithShape="0">
+              <a:srgbClr val="000000">
+                <a:alpha val="43000"/>
+              </a:srgbClr>
+            </a:outerShdw>
+          </a:effectLst>
         </p:spPr>
         <p:txBody>
-          <a:bodyPr/>
+          <a:bodyPr anchor="t">
+            <a:normAutofit/>
+          </a:bodyPr>
           <a:lstStyle>
-            <a:lvl1pPr marL="0" indent="0">
-              <a:buNone/>
-              <a:defRPr sz="3200"/>
-            </a:lvl1pPr>
-            <a:lvl2pPr marL="457200" indent="0">
-              <a:buNone/>
-              <a:defRPr sz="2800"/>
-            </a:lvl2pPr>
-            <a:lvl3pPr marL="914400" indent="0">
-              <a:buNone/>
-              <a:defRPr sz="2400"/>
-            </a:lvl3pPr>
-            <a:lvl4pPr marL="1371600" indent="0">
-              <a:buNone/>
-              <a:defRPr sz="2000"/>
-            </a:lvl4pPr>
-            <a:lvl5pPr marL="1828800" indent="0">
-              <a:buNone/>
-              <a:defRPr sz="2000"/>
-            </a:lvl5pPr>
-            <a:lvl6pPr marL="2286000" indent="0">
-              <a:buNone/>
-              <a:defRPr sz="2000"/>
-            </a:lvl6pPr>
-            <a:lvl7pPr marL="2743200" indent="0">
-              <a:buNone/>
-              <a:defRPr sz="2000"/>
-            </a:lvl7pPr>
-            <a:lvl8pPr marL="3200400" indent="0">
-              <a:buNone/>
-              <a:defRPr sz="2000"/>
-            </a:lvl8pPr>
-            <a:lvl9pPr marL="3657600" indent="0">
-              <a:buNone/>
-              <a:defRPr sz="2000"/>
-            </a:lvl9pPr>
-          </a:lstStyle>
-          <a:p>
-            <a:endParaRPr lang="en-IN"/>
-          </a:p>
-        </p:txBody>
-      </p:sp>
-      <p:sp>
-        <p:nvSpPr>
-          <p:cNvPr id="4" name="Text Placeholder 3">
-            <a:extLst>
-              <a:ext uri="{FF2B5EF4-FFF2-40B4-BE49-F238E27FC236}">
-                <a16:creationId xmlns:a16="http://schemas.microsoft.com/office/drawing/2014/main" id="{7C985A43-B15C-D7D7-C87A-BBE16871D6CA}"/>
-              </a:ext>
-            </a:extLst>
-          </p:cNvPr>
-          <p:cNvSpPr>
-            <a:spLocks noGrp="1"/>
-          </p:cNvSpPr>
-          <p:nvPr>
-            <p:ph type="body" sz="half" idx="2"/>
-          </p:nvPr>
-        </p:nvSpPr>
-        <p:spPr>
-          <a:xfrm>
-            <a:off x="839788" y="2057400"/>
-            <a:ext cx="3932237" cy="3811588"/>
-          </a:xfrm>
-        </p:spPr>
-        <p:txBody>
-          <a:bodyPr/>
-          <a:lstStyle>
-            <a:lvl1pPr marL="0" indent="0">
+            <a:lvl1pPr marL="0" indent="0" algn="ctr">
               <a:buNone/>
               <a:defRPr sz="1600"/>
             </a:lvl1pPr>
             <a:lvl2pPr marL="457200" indent="0">
               <a:buNone/>
-              <a:defRPr sz="1400"/>
+              <a:defRPr sz="1600"/>
             </a:lvl2pPr>
             <a:lvl3pPr marL="914400" indent="0">
               <a:buNone/>
-              <a:defRPr sz="1200"/>
+              <a:defRPr sz="1600"/>
             </a:lvl3pPr>
             <a:lvl4pPr marL="1371600" indent="0">
               <a:buNone/>
-              <a:defRPr sz="1000"/>
+              <a:defRPr sz="1600"/>
             </a:lvl4pPr>
             <a:lvl5pPr marL="1828800" indent="0">
               <a:buNone/>
-              <a:defRPr sz="1000"/>
+              <a:defRPr sz="1600"/>
             </a:lvl5pPr>
             <a:lvl6pPr marL="2286000" indent="0">
               <a:buNone/>
-              <a:defRPr sz="1000"/>
+              <a:defRPr sz="1600"/>
             </a:lvl6pPr>
             <a:lvl7pPr marL="2743200" indent="0">
               <a:buNone/>
-              <a:defRPr sz="1000"/>
+              <a:defRPr sz="1600"/>
             </a:lvl7pPr>
             <a:lvl8pPr marL="3200400" indent="0">
               <a:buNone/>
-              <a:defRPr sz="1000"/>
+              <a:defRPr sz="1600"/>
             </a:lvl8pPr>
             <a:lvl9pPr marL="3657600" indent="0">
               <a:buNone/>
-              <a:defRPr sz="1000"/>
+              <a:defRPr sz="1600"/>
             </a:lvl9pPr>
           </a:lstStyle>
           <a:p>
+            <a:r>
+              <a:rPr lang="en-US"/>
+              <a:t>Click icon to add picture</a:t>
+            </a:r>
+            <a:endParaRPr lang="en-US" dirty="0"/>
+          </a:p>
+        </p:txBody>
+      </p:sp>
+      <p:sp>
+        <p:nvSpPr>
+          <p:cNvPr id="4" name="Text Placeholder 3"/>
+          <p:cNvSpPr>
+            <a:spLocks noGrp="1"/>
+          </p:cNvSpPr>
+          <p:nvPr>
+            <p:ph type="body" sz="half" idx="2"/>
+          </p:nvPr>
+        </p:nvSpPr>
+        <p:spPr>
+          <a:xfrm>
+            <a:off x="1154954" y="3657600"/>
+            <a:ext cx="5084979" cy="1371600"/>
+          </a:xfrm>
+        </p:spPr>
+        <p:txBody>
+          <a:bodyPr>
+            <a:normAutofit/>
+          </a:bodyPr>
+          <a:lstStyle>
+            <a:lvl1pPr marL="0" indent="0">
+              <a:buNone/>
+              <a:defRPr sz="1400"/>
+            </a:lvl1pPr>
+            <a:lvl2pPr marL="457200" indent="0">
+              <a:buNone/>
+              <a:defRPr sz="1200"/>
+            </a:lvl2pPr>
+            <a:lvl3pPr marL="914400" indent="0">
+              <a:buNone/>
+              <a:defRPr sz="1000"/>
+            </a:lvl3pPr>
+            <a:lvl4pPr marL="1371600" indent="0">
+              <a:buNone/>
+              <a:defRPr sz="900"/>
+            </a:lvl4pPr>
+            <a:lvl5pPr marL="1828800" indent="0">
+              <a:buNone/>
+              <a:defRPr sz="900"/>
+            </a:lvl5pPr>
+            <a:lvl6pPr marL="2286000" indent="0">
+              <a:buNone/>
+              <a:defRPr sz="900"/>
+            </a:lvl6pPr>
+            <a:lvl7pPr marL="2743200" indent="0">
+              <a:buNone/>
+              <a:defRPr sz="900"/>
+            </a:lvl7pPr>
+            <a:lvl8pPr marL="3200400" indent="0">
+              <a:buNone/>
+              <a:defRPr sz="900"/>
+            </a:lvl8pPr>
+            <a:lvl9pPr marL="3657600" indent="0">
+              <a:buNone/>
+              <a:defRPr sz="900"/>
+            </a:lvl9pPr>
+          </a:lstStyle>
+          <a:p>
             <a:pPr lvl="0"/>
             <a:r>
               <a:rPr lang="en-US"/>
@@ -3107,13 +5668,7 @@
       </p:sp>
       <p:sp>
         <p:nvSpPr>
-          <p:cNvPr id="5" name="Date Placeholder 4">
-            <a:extLst>
-              <a:ext uri="{FF2B5EF4-FFF2-40B4-BE49-F238E27FC236}">
-                <a16:creationId xmlns:a16="http://schemas.microsoft.com/office/drawing/2014/main" id="{7F046C97-1492-EBF2-0B06-2CB006AC68B5}"/>
-              </a:ext>
-            </a:extLst>
-          </p:cNvPr>
+          <p:cNvPr id="5" name="Date Placeholder 4"/>
           <p:cNvSpPr>
             <a:spLocks noGrp="1"/>
           </p:cNvSpPr>
@@ -3128,7 +5683,7 @@
           <a:p>
             <a:fld id="{051FC713-0BD0-4E67-99B4-F2FDDCE837D7}" type="datetimeFigureOut">
               <a:rPr lang="en-IN" smtClean="0"/>
-              <a:t>18-07-2026</a:t>
+              <a:t>23-07-2026</a:t>
             </a:fld>
             <a:endParaRPr lang="en-IN"/>
           </a:p>
@@ -3136,13 +5691,7 @@
       </p:sp>
       <p:sp>
         <p:nvSpPr>
-          <p:cNvPr id="6" name="Footer Placeholder 5">
-            <a:extLst>
-              <a:ext uri="{FF2B5EF4-FFF2-40B4-BE49-F238E27FC236}">
-                <a16:creationId xmlns:a16="http://schemas.microsoft.com/office/drawing/2014/main" id="{F0A226BC-2640-BCFD-D301-111EB748B2CC}"/>
-              </a:ext>
-            </a:extLst>
-          </p:cNvPr>
+          <p:cNvPr id="6" name="Footer Placeholder 5"/>
           <p:cNvSpPr>
             <a:spLocks noGrp="1"/>
           </p:cNvSpPr>
@@ -3161,13 +5710,7 @@
       </p:sp>
       <p:sp>
         <p:nvSpPr>
-          <p:cNvPr id="7" name="Slide Number Placeholder 6">
-            <a:extLst>
-              <a:ext uri="{FF2B5EF4-FFF2-40B4-BE49-F238E27FC236}">
-                <a16:creationId xmlns:a16="http://schemas.microsoft.com/office/drawing/2014/main" id="{25967B59-CE39-6D93-47AC-C3D1054575AC}"/>
-              </a:ext>
-            </a:extLst>
-          </p:cNvPr>
+          <p:cNvPr id="7" name="Slide Number Placeholder 6"/>
           <p:cNvSpPr>
             <a:spLocks noGrp="1"/>
           </p:cNvSpPr>
@@ -3191,7 +5734,7 @@
     </p:spTree>
     <p:extLst>
       <p:ext uri="{BB962C8B-B14F-4D97-AF65-F5344CB8AC3E}">
-        <p14:creationId xmlns:p14="http://schemas.microsoft.com/office/powerpoint/2010/main" val="587961903"/>
+        <p14:creationId xmlns:p14="http://schemas.microsoft.com/office/powerpoint/2010/main" val="2563136282"/>
       </p:ext>
     </p:extLst>
   </p:cSld>
@@ -3205,8 +5748,8 @@
 <p:sldMaster xmlns:a="http://schemas.openxmlformats.org/drawingml/2006/main" xmlns:r="http://schemas.openxmlformats.org/officeDocument/2006/relationships" xmlns:p="http://schemas.openxmlformats.org/presentationml/2006/main">
   <p:cSld>
     <p:bg>
-      <p:bgRef idx="1001">
-        <a:schemeClr val="bg1"/>
+      <p:bgRef idx="1003">
+        <a:schemeClr val="bg2"/>
       </p:bgRef>
     </p:bg>
     <p:spTree>
@@ -3223,146 +5766,344 @@
           <a:chExt cx="0" cy="0"/>
         </a:xfrm>
       </p:grpSpPr>
-      <p:sp>
-        <p:nvSpPr>
-          <p:cNvPr id="2" name="Title Placeholder 1">
+      <p:pic>
+        <p:nvPicPr>
+          <p:cNvPr id="8" name="Picture 7"/>
+          <p:cNvPicPr>
+            <a:picLocks noChangeAspect="1"/>
+          </p:cNvPicPr>
+          <p:nvPr/>
+        </p:nvPicPr>
+        <p:blipFill rotWithShape="1">
+          <a:blip r:embed="rId19">
             <a:extLst>
-              <a:ext uri="{FF2B5EF4-FFF2-40B4-BE49-F238E27FC236}">
-                <a16:creationId xmlns:a16="http://schemas.microsoft.com/office/drawing/2014/main" id="{7869C990-2BB6-474A-0165-6157B0978CA0}"/>
+              <a:ext uri="{28A0092B-C50C-407E-A947-70E740481C1C}">
+                <a14:useLocalDpi xmlns:a14="http://schemas.microsoft.com/office/drawing/2010/main" val="0"/>
               </a:ext>
             </a:extLst>
-          </p:cNvPr>
-          <p:cNvSpPr>
-            <a:spLocks noGrp="1"/>
-          </p:cNvSpPr>
-          <p:nvPr>
-            <p:ph type="title"/>
-          </p:nvPr>
-        </p:nvSpPr>
+          </a:blip>
+          <a:srcRect l="3613"/>
+          <a:stretch/>
+        </p:blipFill>
         <p:spPr>
           <a:xfrm>
-            <a:off x="838200" y="365125"/>
-            <a:ext cx="10515600" cy="1325563"/>
+            <a:off x="0" y="2669685"/>
+            <a:ext cx="4037012" cy="4188315"/>
           </a:xfrm>
           <a:prstGeom prst="rect">
             <a:avLst/>
           </a:prstGeom>
         </p:spPr>
-        <p:txBody>
-          <a:bodyPr vert="horz" lIns="91440" tIns="45720" rIns="91440" bIns="45720" rtlCol="0" anchor="ctr">
-            <a:normAutofit/>
-          </a:bodyPr>
-          <a:lstStyle/>
-          <a:p>
-            <a:r>
-              <a:rPr lang="en-US"/>
-              <a:t>Click to edit Master title style</a:t>
-            </a:r>
-            <a:endParaRPr lang="en-IN"/>
-          </a:p>
-        </p:txBody>
-      </p:sp>
-      <p:sp>
-        <p:nvSpPr>
-          <p:cNvPr id="3" name="Text Placeholder 2">
+      </p:pic>
+      <p:pic>
+        <p:nvPicPr>
+          <p:cNvPr id="7" name="Picture 6"/>
+          <p:cNvPicPr>
+            <a:picLocks noChangeAspect="1"/>
+          </p:cNvPicPr>
+          <p:nvPr/>
+        </p:nvPicPr>
+        <p:blipFill rotWithShape="1">
+          <a:blip r:embed="rId20">
             <a:extLst>
-              <a:ext uri="{FF2B5EF4-FFF2-40B4-BE49-F238E27FC236}">
-                <a16:creationId xmlns:a16="http://schemas.microsoft.com/office/drawing/2014/main" id="{7C88866F-C270-1F3B-ABD7-EADF5C5797EB}"/>
+              <a:ext uri="{28A0092B-C50C-407E-A947-70E740481C1C}">
+                <a14:useLocalDpi xmlns:a14="http://schemas.microsoft.com/office/drawing/2010/main" val="0"/>
               </a:ext>
             </a:extLst>
-          </p:cNvPr>
-          <p:cNvSpPr>
-            <a:spLocks noGrp="1"/>
-          </p:cNvSpPr>
-          <p:nvPr>
-            <p:ph type="body" idx="1"/>
-          </p:nvPr>
-        </p:nvSpPr>
+          </a:blip>
+          <a:srcRect l="35640"/>
+          <a:stretch/>
+        </p:blipFill>
         <p:spPr>
           <a:xfrm>
-            <a:off x="838200" y="1825625"/>
-            <a:ext cx="10515600" cy="4351338"/>
+            <a:off x="0" y="2892347"/>
+            <a:ext cx="1522412" cy="2365453"/>
           </a:xfrm>
           <a:prstGeom prst="rect">
             <a:avLst/>
           </a:prstGeom>
         </p:spPr>
-        <p:txBody>
-          <a:bodyPr vert="horz" lIns="91440" tIns="45720" rIns="91440" bIns="45720" rtlCol="0">
-            <a:normAutofit/>
-          </a:bodyPr>
-          <a:lstStyle/>
-          <a:p>
-            <a:pPr lvl="0"/>
-            <a:r>
-              <a:rPr lang="en-US"/>
-              <a:t>Click to edit Master text styles</a:t>
-            </a:r>
-          </a:p>
-          <a:p>
-            <a:pPr lvl="1"/>
-            <a:r>
-              <a:rPr lang="en-US"/>
-              <a:t>Second level</a:t>
-            </a:r>
-          </a:p>
-          <a:p>
-            <a:pPr lvl="2"/>
-            <a:r>
-              <a:rPr lang="en-US"/>
-              <a:t>Third level</a:t>
-            </a:r>
-          </a:p>
-          <a:p>
-            <a:pPr lvl="3"/>
-            <a:r>
-              <a:rPr lang="en-US"/>
-              <a:t>Fourth level</a:t>
-            </a:r>
-          </a:p>
-          <a:p>
-            <a:pPr lvl="4"/>
-            <a:r>
-              <a:rPr lang="en-US"/>
-              <a:t>Fifth level</a:t>
-            </a:r>
-            <a:endParaRPr lang="en-IN"/>
-          </a:p>
-        </p:txBody>
-      </p:sp>
-      <p:sp>
-        <p:nvSpPr>
-          <p:cNvPr id="4" name="Date Placeholder 3">
+      </p:pic>
+      <p:sp>
+        <p:nvSpPr>
+          <p:cNvPr id="16" name="Oval 15"/>
+          <p:cNvSpPr/>
+          <p:nvPr/>
+        </p:nvSpPr>
+        <p:spPr>
+          <a:xfrm>
+            <a:off x="8609012" y="1676400"/>
+            <a:ext cx="2819400" cy="2819400"/>
+          </a:xfrm>
+          <a:prstGeom prst="ellipse">
+            <a:avLst/>
+          </a:prstGeom>
+          <a:gradFill flip="none" rotWithShape="1">
+            <a:gsLst>
+              <a:gs pos="0">
+                <a:schemeClr val="bg2">
+                  <a:lumMod val="60000"/>
+                  <a:lumOff val="40000"/>
+                  <a:alpha val="7000"/>
+                </a:schemeClr>
+              </a:gs>
+              <a:gs pos="69000">
+                <a:schemeClr val="bg2">
+                  <a:lumMod val="60000"/>
+                  <a:lumOff val="40000"/>
+                  <a:alpha val="0"/>
+                </a:schemeClr>
+              </a:gs>
+              <a:gs pos="36000">
+                <a:schemeClr val="bg2">
+                  <a:lumMod val="60000"/>
+                  <a:lumOff val="40000"/>
+                  <a:alpha val="6000"/>
+                </a:schemeClr>
+              </a:gs>
+            </a:gsLst>
+            <a:path path="circle">
+              <a:fillToRect l="50000" t="50000" r="50000" b="50000"/>
+            </a:path>
+            <a:tileRect/>
+          </a:gradFill>
+          <a:ln>
+            <a:noFill/>
+          </a:ln>
+          <a:effectLst/>
+        </p:spPr>
+        <p:style>
+          <a:lnRef idx="1">
+            <a:schemeClr val="accent1"/>
+          </a:lnRef>
+          <a:fillRef idx="3">
+            <a:schemeClr val="accent1"/>
+          </a:fillRef>
+          <a:effectRef idx="2">
+            <a:schemeClr val="accent1"/>
+          </a:effectRef>
+          <a:fontRef idx="minor">
+            <a:schemeClr val="lt1"/>
+          </a:fontRef>
+        </p:style>
+      </p:sp>
+      <p:pic>
+        <p:nvPicPr>
+          <p:cNvPr id="9" name="Picture 8"/>
+          <p:cNvPicPr>
+            <a:picLocks noChangeAspect="1"/>
+          </p:cNvPicPr>
+          <p:nvPr/>
+        </p:nvPicPr>
+        <p:blipFill rotWithShape="1">
+          <a:blip r:embed="rId21">
             <a:extLst>
-              <a:ext uri="{FF2B5EF4-FFF2-40B4-BE49-F238E27FC236}">
-                <a16:creationId xmlns:a16="http://schemas.microsoft.com/office/drawing/2014/main" id="{AD6215F4-4CE1-1C99-449B-DE5FB2178FF6}"/>
+              <a:ext uri="{28A0092B-C50C-407E-A947-70E740481C1C}">
+                <a14:useLocalDpi xmlns:a14="http://schemas.microsoft.com/office/drawing/2010/main" val="0"/>
               </a:ext>
             </a:extLst>
-          </p:cNvPr>
-          <p:cNvSpPr>
-            <a:spLocks noGrp="1"/>
-          </p:cNvSpPr>
-          <p:nvPr>
-            <p:ph type="dt" sz="half" idx="2"/>
-          </p:nvPr>
-        </p:nvSpPr>
+          </a:blip>
+          <a:srcRect t="28813"/>
+          <a:stretch/>
+        </p:blipFill>
         <p:spPr>
           <a:xfrm>
-            <a:off x="838200" y="6356350"/>
-            <a:ext cx="2743200" cy="365125"/>
+            <a:off x="7999412" y="0"/>
+            <a:ext cx="1603387" cy="1141407"/>
           </a:xfrm>
           <a:prstGeom prst="rect">
             <a:avLst/>
           </a:prstGeom>
         </p:spPr>
-        <p:txBody>
-          <a:bodyPr vert="horz" lIns="91440" tIns="45720" rIns="91440" bIns="45720" rtlCol="0" anchor="ctr"/>
+      </p:pic>
+      <p:pic>
+        <p:nvPicPr>
+          <p:cNvPr id="10" name="Picture 9"/>
+          <p:cNvPicPr>
+            <a:picLocks noChangeAspect="1"/>
+          </p:cNvPicPr>
+          <p:nvPr/>
+        </p:nvPicPr>
+        <p:blipFill rotWithShape="1">
+          <a:blip r:embed="rId22">
+            <a:extLst>
+              <a:ext uri="{28A0092B-C50C-407E-A947-70E740481C1C}">
+                <a14:useLocalDpi xmlns:a14="http://schemas.microsoft.com/office/drawing/2010/main" val="0"/>
+              </a:ext>
+            </a:extLst>
+          </a:blip>
+          <a:srcRect b="23320"/>
+          <a:stretch/>
+        </p:blipFill>
+        <p:spPr>
+          <a:xfrm>
+            <a:off x="8605878" y="6096000"/>
+            <a:ext cx="993734" cy="762000"/>
+          </a:xfrm>
+          <a:prstGeom prst="rect">
+            <a:avLst/>
+          </a:prstGeom>
+        </p:spPr>
+      </p:pic>
+      <p:sp>
+        <p:nvSpPr>
+          <p:cNvPr id="14" name="Rectangle 13"/>
+          <p:cNvSpPr/>
+          <p:nvPr/>
+        </p:nvSpPr>
+        <p:spPr>
+          <a:xfrm>
+            <a:off x="10437812" y="0"/>
+            <a:ext cx="685800" cy="1143000"/>
+          </a:xfrm>
+          <a:prstGeom prst="rect">
+            <a:avLst/>
+          </a:prstGeom>
+          <a:solidFill>
+            <a:schemeClr val="accent1"/>
+          </a:solidFill>
+          <a:ln>
+            <a:noFill/>
+          </a:ln>
+        </p:spPr>
+        <p:style>
+          <a:lnRef idx="1">
+            <a:schemeClr val="accent1"/>
+          </a:lnRef>
+          <a:fillRef idx="3">
+            <a:schemeClr val="accent1"/>
+          </a:fillRef>
+          <a:effectRef idx="2">
+            <a:schemeClr val="accent1"/>
+          </a:effectRef>
+          <a:fontRef idx="minor">
+            <a:schemeClr val="lt1"/>
+          </a:fontRef>
+        </p:style>
+      </p:sp>
+      <p:sp>
+        <p:nvSpPr>
+          <p:cNvPr id="2" name="Title Placeholder 1"/>
+          <p:cNvSpPr>
+            <a:spLocks noGrp="1"/>
+          </p:cNvSpPr>
+          <p:nvPr>
+            <p:ph type="title"/>
+          </p:nvPr>
+        </p:nvSpPr>
+        <p:spPr>
+          <a:xfrm>
+            <a:off x="646111" y="452718"/>
+            <a:ext cx="9404723" cy="1400530"/>
+          </a:xfrm>
+          <a:prstGeom prst="rect">
+            <a:avLst/>
+          </a:prstGeom>
+        </p:spPr>
+        <p:txBody>
+          <a:bodyPr vert="horz" lIns="91440" tIns="45720" rIns="91440" bIns="45720" rtlCol="0" anchor="t">
+            <a:noAutofit/>
+          </a:bodyPr>
+          <a:lstStyle/>
+          <a:p>
+            <a:r>
+              <a:rPr lang="en-US"/>
+              <a:t>Click to edit Master title style</a:t>
+            </a:r>
+            <a:endParaRPr lang="en-US" dirty="0"/>
+          </a:p>
+        </p:txBody>
+      </p:sp>
+      <p:sp>
+        <p:nvSpPr>
+          <p:cNvPr id="3" name="Text Placeholder 2"/>
+          <p:cNvSpPr>
+            <a:spLocks noGrp="1"/>
+          </p:cNvSpPr>
+          <p:nvPr>
+            <p:ph type="body" idx="1"/>
+          </p:nvPr>
+        </p:nvSpPr>
+        <p:spPr>
+          <a:xfrm>
+            <a:off x="1103312" y="2052918"/>
+            <a:ext cx="8946541" cy="4195481"/>
+          </a:xfrm>
+          <a:prstGeom prst="rect">
+            <a:avLst/>
+          </a:prstGeom>
+        </p:spPr>
+        <p:txBody>
+          <a:bodyPr vert="horz" lIns="91440" tIns="45720" rIns="91440" bIns="45720" rtlCol="0">
+            <a:normAutofit/>
+          </a:bodyPr>
+          <a:lstStyle/>
+          <a:p>
+            <a:pPr lvl="0"/>
+            <a:r>
+              <a:rPr lang="en-US"/>
+              <a:t>Click to edit Master text styles</a:t>
+            </a:r>
+          </a:p>
+          <a:p>
+            <a:pPr lvl="1"/>
+            <a:r>
+              <a:rPr lang="en-US"/>
+              <a:t>Second level</a:t>
+            </a:r>
+          </a:p>
+          <a:p>
+            <a:pPr lvl="2"/>
+            <a:r>
+              <a:rPr lang="en-US"/>
+              <a:t>Third level</a:t>
+            </a:r>
+          </a:p>
+          <a:p>
+            <a:pPr lvl="3"/>
+            <a:r>
+              <a:rPr lang="en-US"/>
+              <a:t>Fourth level</a:t>
+            </a:r>
+          </a:p>
+          <a:p>
+            <a:pPr lvl="4"/>
+            <a:r>
+              <a:rPr lang="en-US"/>
+              <a:t>Fifth level</a:t>
+            </a:r>
+            <a:endParaRPr lang="en-US" dirty="0"/>
+          </a:p>
+        </p:txBody>
+      </p:sp>
+      <p:sp>
+        <p:nvSpPr>
+          <p:cNvPr id="4" name="Date Placeholder 3"/>
+          <p:cNvSpPr>
+            <a:spLocks noGrp="1"/>
+          </p:cNvSpPr>
+          <p:nvPr>
+            <p:ph type="dt" sz="half" idx="2"/>
+          </p:nvPr>
+        </p:nvSpPr>
+        <p:spPr>
+          <a:xfrm rot="5400000">
+            <a:off x="10155639" y="1790701"/>
+            <a:ext cx="990599" cy="304799"/>
+          </a:xfrm>
+          <a:prstGeom prst="rect">
+            <a:avLst/>
+          </a:prstGeom>
+        </p:spPr>
+        <p:txBody>
+          <a:bodyPr vert="horz" lIns="91440" tIns="45720" rIns="91440" bIns="45720" rtlCol="0" anchor="t"/>
           <a:lstStyle>
             <a:lvl1pPr algn="l">
-              <a:defRPr sz="1200">
+              <a:defRPr sz="1100" b="0" i="0">
                 <a:solidFill>
                   <a:schemeClr val="tx1">
-                    <a:tint val="82000"/>
+                    <a:tint val="75000"/>
+                    <a:alpha val="60000"/>
                   </a:schemeClr>
                 </a:solidFill>
               </a:defRPr>
@@ -3371,7 +6112,7 @@
           <a:p>
             <a:fld id="{051FC713-0BD0-4E67-99B4-F2FDDCE837D7}" type="datetimeFigureOut">
               <a:rPr lang="en-IN" smtClean="0"/>
-              <a:t>18-07-2026</a:t>
+              <a:t>23-07-2026</a:t>
             </a:fld>
             <a:endParaRPr lang="en-IN"/>
           </a:p>
@@ -3379,13 +6120,7 @@
       </p:sp>
       <p:sp>
         <p:nvSpPr>
-          <p:cNvPr id="5" name="Footer Placeholder 4">
-            <a:extLst>
-              <a:ext uri="{FF2B5EF4-FFF2-40B4-BE49-F238E27FC236}">
-                <a16:creationId xmlns:a16="http://schemas.microsoft.com/office/drawing/2014/main" id="{4145C342-457F-D771-14DB-12CEF92457AA}"/>
-              </a:ext>
-            </a:extLst>
-          </p:cNvPr>
+          <p:cNvPr id="5" name="Footer Placeholder 4"/>
           <p:cNvSpPr>
             <a:spLocks noGrp="1"/>
           </p:cNvSpPr>
@@ -3394,22 +6129,23 @@
           </p:nvPr>
         </p:nvSpPr>
         <p:spPr>
-          <a:xfrm>
-            <a:off x="4038600" y="6356350"/>
-            <a:ext cx="4114800" cy="365125"/>
+          <a:xfrm rot="5400000">
+            <a:off x="8951573" y="3225297"/>
+            <a:ext cx="3859795" cy="304801"/>
           </a:xfrm>
           <a:prstGeom prst="rect">
             <a:avLst/>
           </a:prstGeom>
         </p:spPr>
         <p:txBody>
-          <a:bodyPr vert="horz" lIns="91440" tIns="45720" rIns="91440" bIns="45720" rtlCol="0" anchor="ctr"/>
+          <a:bodyPr vert="horz" lIns="91440" tIns="45720" rIns="91440" bIns="45720" rtlCol="0" anchor="b"/>
           <a:lstStyle>
-            <a:lvl1pPr algn="ctr">
-              <a:defRPr sz="1200">
+            <a:lvl1pPr algn="l">
+              <a:defRPr sz="1100" b="0" i="0">
                 <a:solidFill>
                   <a:schemeClr val="tx1">
-                    <a:tint val="82000"/>
+                    <a:tint val="75000"/>
+                    <a:alpha val="60000"/>
                   </a:schemeClr>
                 </a:solidFill>
               </a:defRPr>
@@ -3422,13 +6158,7 @@
       </p:sp>
       <p:sp>
         <p:nvSpPr>
-          <p:cNvPr id="6" name="Slide Number Placeholder 5">
-            <a:extLst>
-              <a:ext uri="{FF2B5EF4-FFF2-40B4-BE49-F238E27FC236}">
-                <a16:creationId xmlns:a16="http://schemas.microsoft.com/office/drawing/2014/main" id="{26549961-2BCB-3FCB-2318-CE5D3D324FE3}"/>
-              </a:ext>
-            </a:extLst>
-          </p:cNvPr>
+          <p:cNvPr id="6" name="Slide Number Placeholder 5"/>
           <p:cNvSpPr>
             <a:spLocks noGrp="1"/>
           </p:cNvSpPr>
@@ -3436,23 +6166,23 @@
             <p:ph type="sldNum" sz="quarter" idx="4"/>
           </p:nvPr>
         </p:nvSpPr>
-        <p:spPr>
+        <p:spPr bwMode="gray">
           <a:xfrm>
-            <a:off x="8610600" y="6356350"/>
-            <a:ext cx="2743200" cy="365125"/>
+            <a:off x="10352540" y="295729"/>
+            <a:ext cx="838199" cy="767687"/>
           </a:xfrm>
           <a:prstGeom prst="rect">
             <a:avLst/>
           </a:prstGeom>
         </p:spPr>
         <p:txBody>
-          <a:bodyPr vert="horz" lIns="91440" tIns="45720" rIns="91440" bIns="45720" rtlCol="0" anchor="ctr"/>
+          <a:bodyPr vert="horz" lIns="91440" tIns="45720" rIns="91440" bIns="45720" rtlCol="0" anchor="b"/>
           <a:lstStyle>
-            <a:lvl1pPr algn="r">
-              <a:defRPr sz="1200">
+            <a:lvl1pPr algn="ctr">
+              <a:defRPr sz="2800" b="0" i="0">
                 <a:solidFill>
                   <a:schemeClr val="tx1">
-                    <a:tint val="82000"/>
+                    <a:tint val="75000"/>
                   </a:schemeClr>
                 </a:solidFill>
               </a:defRPr>
@@ -3470,35 +6200,121 @@
     </p:spTree>
     <p:extLst>
       <p:ext uri="{BB962C8B-B14F-4D97-AF65-F5344CB8AC3E}">
-        <p14:creationId xmlns:p14="http://schemas.microsoft.com/office/powerpoint/2010/main" val="457623599"/>
+        <p14:creationId xmlns:p14="http://schemas.microsoft.com/office/powerpoint/2010/main" val="3183764161"/>
       </p:ext>
     </p:extLst>
   </p:cSld>
-  <p:clrMap bg1="lt1" tx1="dk1" bg2="lt2" tx2="dk2" accent1="accent1" accent2="accent2" accent3="accent3" accent4="accent4" accent5="accent5" accent6="accent6" hlink="hlink" folHlink="folHlink"/>
+  <p:clrMap bg1="dk1" tx1="lt1" bg2="dk2" tx2="lt2" accent1="accent1" accent2="accent2" accent3="accent3" accent4="accent4" accent5="accent5" accent6="accent6" hlink="hlink" folHlink="folHlink"/>
   <p:sldLayoutIdLst>
-    <p:sldLayoutId id="2147483649" r:id="rId1"/>
-    <p:sldLayoutId id="2147483650" r:id="rId2"/>
-    <p:sldLayoutId id="2147483651" r:id="rId3"/>
-    <p:sldLayoutId id="2147483652" r:id="rId4"/>
-    <p:sldLayoutId id="2147483653" r:id="rId5"/>
-    <p:sldLayoutId id="2147483654" r:id="rId6"/>
-    <p:sldLayoutId id="2147483655" r:id="rId7"/>
-    <p:sldLayoutId id="2147483656" r:id="rId8"/>
-    <p:sldLayoutId id="2147483657" r:id="rId9"/>
-    <p:sldLayoutId id="2147483658" r:id="rId10"/>
-    <p:sldLayoutId id="2147483659" r:id="rId11"/>
+    <p:sldLayoutId id="2147483673" r:id="rId1"/>
+    <p:sldLayoutId id="2147483674" r:id="rId2"/>
+    <p:sldLayoutId id="2147483675" r:id="rId3"/>
+    <p:sldLayoutId id="2147483676" r:id="rId4"/>
+    <p:sldLayoutId id="2147483677" r:id="rId5"/>
+    <p:sldLayoutId id="2147483678" r:id="rId6"/>
+    <p:sldLayoutId id="2147483679" r:id="rId7"/>
+    <p:sldLayoutId id="2147483680" r:id="rId8"/>
+    <p:sldLayoutId id="2147483681" r:id="rId9"/>
+    <p:sldLayoutId id="2147483682" r:id="rId10"/>
+    <p:sldLayoutId id="2147483683" r:id="rId11"/>
+    <p:sldLayoutId id="2147483684" r:id="rId12"/>
+    <p:sldLayoutId id="2147483685" r:id="rId13"/>
+    <p:sldLayoutId id="2147483686" r:id="rId14"/>
+    <p:sldLayoutId id="2147483687" r:id="rId15"/>
+    <p:sldLayoutId id="2147483688" r:id="rId16"/>
+    <p:sldLayoutId id="2147483689" r:id="rId17"/>
   </p:sldLayoutIdLst>
   <p:txStyles>
     <p:titleStyle>
-      <a:lvl1pPr algn="l" defTabSz="914400" rtl="0" eaLnBrk="1" latinLnBrk="0" hangingPunct="1">
-        <a:lnSpc>
-          <a:spcPct val="90000"/>
-        </a:lnSpc>
+      <a:lvl1pPr algn="l" defTabSz="457200" rtl="0" eaLnBrk="1" latinLnBrk="0" hangingPunct="1">
         <a:spcBef>
           <a:spcPct val="0"/>
         </a:spcBef>
         <a:buNone/>
-        <a:defRPr sz="4400" kern="1200">
+        <a:defRPr sz="4200" b="0" i="0" kern="1200">
+          <a:solidFill>
+            <a:schemeClr val="tx2"/>
+          </a:solidFill>
+          <a:latin typeface="+mj-lt"/>
+          <a:ea typeface="+mj-ea"/>
+          <a:cs typeface="+mj-cs"/>
+        </a:defRPr>
+      </a:lvl1pPr>
+      <a:lvl2pPr eaLnBrk="1" hangingPunct="1">
+        <a:defRPr>
+          <a:solidFill>
+            <a:schemeClr val="tx2"/>
+          </a:solidFill>
+        </a:defRPr>
+      </a:lvl2pPr>
+      <a:lvl3pPr eaLnBrk="1" hangingPunct="1">
+        <a:defRPr>
+          <a:solidFill>
+            <a:schemeClr val="tx2"/>
+          </a:solidFill>
+        </a:defRPr>
+      </a:lvl3pPr>
+      <a:lvl4pPr eaLnBrk="1" hangingPunct="1">
+        <a:defRPr>
+          <a:solidFill>
+            <a:schemeClr val="tx2"/>
+          </a:solidFill>
+        </a:defRPr>
+      </a:lvl4pPr>
+      <a:lvl5pPr eaLnBrk="1" hangingPunct="1">
+        <a:defRPr>
+          <a:solidFill>
+            <a:schemeClr val="tx2"/>
+          </a:solidFill>
+        </a:defRPr>
+      </a:lvl5pPr>
+      <a:lvl6pPr eaLnBrk="1" hangingPunct="1">
+        <a:defRPr>
+          <a:solidFill>
+            <a:schemeClr val="tx2"/>
+          </a:solidFill>
+        </a:defRPr>
+      </a:lvl6pPr>
+      <a:lvl7pPr eaLnBrk="1" hangingPunct="1">
+        <a:defRPr>
+          <a:solidFill>
+            <a:schemeClr val="tx2"/>
+          </a:solidFill>
+        </a:defRPr>
+      </a:lvl7pPr>
+      <a:lvl8pPr eaLnBrk="1" hangingPunct="1">
+        <a:defRPr>
+          <a:solidFill>
+            <a:schemeClr val="tx2"/>
+          </a:solidFill>
+        </a:defRPr>
+      </a:lvl8pPr>
+      <a:lvl9pPr eaLnBrk="1" hangingPunct="1">
+        <a:defRPr>
+          <a:solidFill>
+            <a:schemeClr val="tx2"/>
+          </a:solidFill>
+        </a:defRPr>
+      </a:lvl9pPr>
+    </p:titleStyle>
+    <p:bodyStyle>
+      <a:lvl1pPr marL="342900" indent="-342900" algn="l" defTabSz="457200" rtl="0" eaLnBrk="1" latinLnBrk="0" hangingPunct="1">
+        <a:spcBef>
+          <a:spcPts val="1000"/>
+        </a:spcBef>
+        <a:spcAft>
+          <a:spcPts val="0"/>
+        </a:spcAft>
+        <a:buClr>
+          <a:schemeClr val="bg2">
+            <a:lumMod val="40000"/>
+            <a:lumOff val="60000"/>
+          </a:schemeClr>
+        </a:buClr>
+        <a:buSzPct val="80000"/>
+        <a:buFont typeface="Wingdings 3" charset="2"/>
+        <a:buChar char=""/>
+        <a:defRPr sz="2000" b="0" i="0" kern="1200">
           <a:solidFill>
             <a:schemeClr val="tx1"/>
           </a:solidFill>
@@ -3507,18 +6323,213 @@
           <a:cs typeface="+mj-cs"/>
         </a:defRPr>
       </a:lvl1pPr>
-    </p:titleStyle>
-    <p:bodyStyle>
-      <a:lvl1pPr marL="228600" indent="-228600" algn="l" defTabSz="914400" rtl="0" eaLnBrk="1" latinLnBrk="0" hangingPunct="1">
-        <a:lnSpc>
-          <a:spcPct val="90000"/>
-        </a:lnSpc>
+      <a:lvl2pPr marL="742950" indent="-285750" algn="l" defTabSz="457200" rtl="0" eaLnBrk="1" latinLnBrk="0" hangingPunct="1">
         <a:spcBef>
           <a:spcPts val="1000"/>
         </a:spcBef>
-        <a:buFont typeface="Arial" panose="020B0604020202020204" pitchFamily="34" charset="0"/>
-        <a:buChar char="•"/>
-        <a:defRPr sz="2800" kern="1200">
+        <a:spcAft>
+          <a:spcPts val="0"/>
+        </a:spcAft>
+        <a:buClr>
+          <a:schemeClr val="bg2">
+            <a:lumMod val="40000"/>
+            <a:lumOff val="60000"/>
+          </a:schemeClr>
+        </a:buClr>
+        <a:buSzPct val="80000"/>
+        <a:buFont typeface="Wingdings 3" charset="2"/>
+        <a:buChar char=""/>
+        <a:defRPr sz="1800" b="0" i="0" kern="1200">
+          <a:solidFill>
+            <a:schemeClr val="tx1"/>
+          </a:solidFill>
+          <a:latin typeface="+mj-lt"/>
+          <a:ea typeface="+mj-ea"/>
+          <a:cs typeface="+mj-cs"/>
+        </a:defRPr>
+      </a:lvl2pPr>
+      <a:lvl3pPr marL="1143000" indent="-228600" algn="l" defTabSz="457200" rtl="0" eaLnBrk="1" latinLnBrk="0" hangingPunct="1">
+        <a:spcBef>
+          <a:spcPts val="1000"/>
+        </a:spcBef>
+        <a:spcAft>
+          <a:spcPts val="0"/>
+        </a:spcAft>
+        <a:buClr>
+          <a:schemeClr val="bg2">
+            <a:lumMod val="40000"/>
+            <a:lumOff val="60000"/>
+          </a:schemeClr>
+        </a:buClr>
+        <a:buSzPct val="80000"/>
+        <a:buFont typeface="Wingdings 3" charset="2"/>
+        <a:buChar char=""/>
+        <a:defRPr sz="1600" b="0" i="0" kern="1200">
+          <a:solidFill>
+            <a:schemeClr val="tx1"/>
+          </a:solidFill>
+          <a:latin typeface="+mj-lt"/>
+          <a:ea typeface="+mj-ea"/>
+          <a:cs typeface="+mj-cs"/>
+        </a:defRPr>
+      </a:lvl3pPr>
+      <a:lvl4pPr marL="1600200" indent="-228600" algn="l" defTabSz="457200" rtl="0" eaLnBrk="1" latinLnBrk="0" hangingPunct="1">
+        <a:spcBef>
+          <a:spcPts val="1000"/>
+        </a:spcBef>
+        <a:spcAft>
+          <a:spcPts val="0"/>
+        </a:spcAft>
+        <a:buClr>
+          <a:schemeClr val="bg2">
+            <a:lumMod val="40000"/>
+            <a:lumOff val="60000"/>
+          </a:schemeClr>
+        </a:buClr>
+        <a:buSzPct val="80000"/>
+        <a:buFont typeface="Wingdings 3" charset="2"/>
+        <a:buChar char=""/>
+        <a:defRPr sz="1400" b="0" i="0" kern="1200">
+          <a:solidFill>
+            <a:schemeClr val="tx1"/>
+          </a:solidFill>
+          <a:latin typeface="+mj-lt"/>
+          <a:ea typeface="+mj-ea"/>
+          <a:cs typeface="+mj-cs"/>
+        </a:defRPr>
+      </a:lvl4pPr>
+      <a:lvl5pPr marL="2057400" indent="-228600" algn="l" defTabSz="457200" rtl="0" eaLnBrk="1" latinLnBrk="0" hangingPunct="1">
+        <a:spcBef>
+          <a:spcPts val="1000"/>
+        </a:spcBef>
+        <a:spcAft>
+          <a:spcPts val="0"/>
+        </a:spcAft>
+        <a:buClr>
+          <a:schemeClr val="bg2">
+            <a:lumMod val="40000"/>
+            <a:lumOff val="60000"/>
+          </a:schemeClr>
+        </a:buClr>
+        <a:buSzPct val="80000"/>
+        <a:buFont typeface="Wingdings 3" charset="2"/>
+        <a:buChar char=""/>
+        <a:defRPr sz="1400" b="0" i="0" kern="1200">
+          <a:solidFill>
+            <a:schemeClr val="tx1"/>
+          </a:solidFill>
+          <a:latin typeface="+mj-lt"/>
+          <a:ea typeface="+mj-ea"/>
+          <a:cs typeface="+mj-cs"/>
+        </a:defRPr>
+      </a:lvl5pPr>
+      <a:lvl6pPr marL="2506000" indent="-228600" algn="l" defTabSz="457200" rtl="0" eaLnBrk="1" latinLnBrk="0" hangingPunct="1">
+        <a:spcBef>
+          <a:spcPts val="1000"/>
+        </a:spcBef>
+        <a:spcAft>
+          <a:spcPts val="0"/>
+        </a:spcAft>
+        <a:buClr>
+          <a:schemeClr val="bg2">
+            <a:lumMod val="40000"/>
+            <a:lumOff val="60000"/>
+          </a:schemeClr>
+        </a:buClr>
+        <a:buSzPct val="80000"/>
+        <a:buFont typeface="Wingdings 3" charset="2"/>
+        <a:buChar char=""/>
+        <a:defRPr sz="1400" b="0" i="0" kern="1200">
+          <a:solidFill>
+            <a:schemeClr val="tx1"/>
+          </a:solidFill>
+          <a:latin typeface="+mj-lt"/>
+          <a:ea typeface="+mj-ea"/>
+          <a:cs typeface="+mj-cs"/>
+        </a:defRPr>
+      </a:lvl6pPr>
+      <a:lvl7pPr marL="2971800" indent="-228600" algn="l" defTabSz="457200" rtl="0" eaLnBrk="1" latinLnBrk="0" hangingPunct="1">
+        <a:spcBef>
+          <a:spcPts val="1000"/>
+        </a:spcBef>
+        <a:spcAft>
+          <a:spcPts val="0"/>
+        </a:spcAft>
+        <a:buClr>
+          <a:schemeClr val="bg2">
+            <a:lumMod val="40000"/>
+            <a:lumOff val="60000"/>
+          </a:schemeClr>
+        </a:buClr>
+        <a:buSzPct val="80000"/>
+        <a:buFont typeface="Wingdings 3" charset="2"/>
+        <a:buChar char=""/>
+        <a:defRPr sz="1400" b="0" i="0" kern="1200">
+          <a:solidFill>
+            <a:schemeClr val="tx1"/>
+          </a:solidFill>
+          <a:latin typeface="+mj-lt"/>
+          <a:ea typeface="+mj-ea"/>
+          <a:cs typeface="+mj-cs"/>
+        </a:defRPr>
+      </a:lvl7pPr>
+      <a:lvl8pPr marL="3429000" indent="-228600" algn="l" defTabSz="457200" rtl="0" eaLnBrk="1" latinLnBrk="0" hangingPunct="1">
+        <a:spcBef>
+          <a:spcPts val="1000"/>
+        </a:spcBef>
+        <a:spcAft>
+          <a:spcPts val="0"/>
+        </a:spcAft>
+        <a:buClr>
+          <a:schemeClr val="bg2">
+            <a:lumMod val="40000"/>
+            <a:lumOff val="60000"/>
+          </a:schemeClr>
+        </a:buClr>
+        <a:buSzPct val="80000"/>
+        <a:buFont typeface="Wingdings 3" charset="2"/>
+        <a:buChar char=""/>
+        <a:defRPr sz="1400" b="0" i="0" kern="1200">
+          <a:solidFill>
+            <a:schemeClr val="tx1"/>
+          </a:solidFill>
+          <a:latin typeface="+mj-lt"/>
+          <a:ea typeface="+mj-ea"/>
+          <a:cs typeface="+mj-cs"/>
+        </a:defRPr>
+      </a:lvl8pPr>
+      <a:lvl9pPr marL="3886200" indent="-228600" algn="l" defTabSz="457200" rtl="0" eaLnBrk="1" latinLnBrk="0" hangingPunct="1">
+        <a:spcBef>
+          <a:spcPts val="1000"/>
+        </a:spcBef>
+        <a:spcAft>
+          <a:spcPts val="0"/>
+        </a:spcAft>
+        <a:buClr>
+          <a:schemeClr val="bg2">
+            <a:lumMod val="40000"/>
+            <a:lumOff val="60000"/>
+          </a:schemeClr>
+        </a:buClr>
+        <a:buSzPct val="80000"/>
+        <a:buFont typeface="Wingdings 3" charset="2"/>
+        <a:buChar char=""/>
+        <a:defRPr sz="1400" b="0" i="0" kern="1200">
+          <a:solidFill>
+            <a:schemeClr val="tx1"/>
+          </a:solidFill>
+          <a:latin typeface="+mj-lt"/>
+          <a:ea typeface="+mj-ea"/>
+          <a:cs typeface="+mj-cs"/>
+        </a:defRPr>
+      </a:lvl9pPr>
+    </p:bodyStyle>
+    <p:otherStyle>
+      <a:defPPr>
+        <a:defRPr lang="en-US"/>
+      </a:defPPr>
+      <a:lvl1pPr marL="0" algn="l" defTabSz="457200" rtl="0" eaLnBrk="1" latinLnBrk="0" hangingPunct="1">
+        <a:defRPr sz="1800" kern="1200">
           <a:solidFill>
             <a:schemeClr val="tx1"/>
           </a:solidFill>
@@ -3527,16 +6538,8 @@
           <a:cs typeface="+mn-cs"/>
         </a:defRPr>
       </a:lvl1pPr>
-      <a:lvl2pPr marL="685800" indent="-228600" algn="l" defTabSz="914400" rtl="0" eaLnBrk="1" latinLnBrk="0" hangingPunct="1">
-        <a:lnSpc>
-          <a:spcPct val="90000"/>
-        </a:lnSpc>
-        <a:spcBef>
-          <a:spcPts val="500"/>
-        </a:spcBef>
-        <a:buFont typeface="Arial" panose="020B0604020202020204" pitchFamily="34" charset="0"/>
-        <a:buChar char="•"/>
-        <a:defRPr sz="2400" kern="1200">
+      <a:lvl2pPr marL="457200" algn="l" defTabSz="457200" rtl="0" eaLnBrk="1" latinLnBrk="0" hangingPunct="1">
+        <a:defRPr sz="1800" kern="1200">
           <a:solidFill>
             <a:schemeClr val="tx1"/>
           </a:solidFill>
@@ -3545,16 +6548,8 @@
           <a:cs typeface="+mn-cs"/>
         </a:defRPr>
       </a:lvl2pPr>
-      <a:lvl3pPr marL="1143000" indent="-228600" algn="l" defTabSz="914400" rtl="0" eaLnBrk="1" latinLnBrk="0" hangingPunct="1">
-        <a:lnSpc>
-          <a:spcPct val="90000"/>
-        </a:lnSpc>
-        <a:spcBef>
-          <a:spcPts val="500"/>
-        </a:spcBef>
-        <a:buFont typeface="Arial" panose="020B0604020202020204" pitchFamily="34" charset="0"/>
-        <a:buChar char="•"/>
-        <a:defRPr sz="2000" kern="1200">
+      <a:lvl3pPr marL="914400" algn="l" defTabSz="457200" rtl="0" eaLnBrk="1" latinLnBrk="0" hangingPunct="1">
+        <a:defRPr sz="1800" kern="1200">
           <a:solidFill>
             <a:schemeClr val="tx1"/>
           </a:solidFill>
@@ -3563,15 +6558,7 @@
           <a:cs typeface="+mn-cs"/>
         </a:defRPr>
       </a:lvl3pPr>
-      <a:lvl4pPr marL="1600200" indent="-228600" algn="l" defTabSz="914400" rtl="0" eaLnBrk="1" latinLnBrk="0" hangingPunct="1">
-        <a:lnSpc>
-          <a:spcPct val="90000"/>
-        </a:lnSpc>
-        <a:spcBef>
-          <a:spcPts val="500"/>
-        </a:spcBef>
-        <a:buFont typeface="Arial" panose="020B0604020202020204" pitchFamily="34" charset="0"/>
-        <a:buChar char="•"/>
+      <a:lvl4pPr marL="1371600" algn="l" defTabSz="457200" rtl="0" eaLnBrk="1" latinLnBrk="0" hangingPunct="1">
         <a:defRPr sz="1800" kern="1200">
           <a:solidFill>
             <a:schemeClr val="tx1"/>
@@ -3581,15 +6568,7 @@
           <a:cs typeface="+mn-cs"/>
         </a:defRPr>
       </a:lvl4pPr>
-      <a:lvl5pPr marL="2057400" indent="-228600" algn="l" defTabSz="914400" rtl="0" eaLnBrk="1" latinLnBrk="0" hangingPunct="1">
-        <a:lnSpc>
-          <a:spcPct val="90000"/>
-        </a:lnSpc>
-        <a:spcBef>
-          <a:spcPts val="500"/>
-        </a:spcBef>
-        <a:buFont typeface="Arial" panose="020B0604020202020204" pitchFamily="34" charset="0"/>
-        <a:buChar char="•"/>
+      <a:lvl5pPr marL="1828800" algn="l" defTabSz="457200" rtl="0" eaLnBrk="1" latinLnBrk="0" hangingPunct="1">
         <a:defRPr sz="1800" kern="1200">
           <a:solidFill>
             <a:schemeClr val="tx1"/>
@@ -3599,15 +6578,7 @@
           <a:cs typeface="+mn-cs"/>
         </a:defRPr>
       </a:lvl5pPr>
-      <a:lvl6pPr marL="2514600" indent="-228600" algn="l" defTabSz="914400" rtl="0" eaLnBrk="1" latinLnBrk="0" hangingPunct="1">
-        <a:lnSpc>
-          <a:spcPct val="90000"/>
-        </a:lnSpc>
-        <a:spcBef>
-          <a:spcPts val="500"/>
-        </a:spcBef>
-        <a:buFont typeface="Arial" panose="020B0604020202020204" pitchFamily="34" charset="0"/>
-        <a:buChar char="•"/>
+      <a:lvl6pPr marL="2286000" algn="l" defTabSz="457200" rtl="0" eaLnBrk="1" latinLnBrk="0" hangingPunct="1">
         <a:defRPr sz="1800" kern="1200">
           <a:solidFill>
             <a:schemeClr val="tx1"/>
@@ -3617,15 +6588,7 @@
           <a:cs typeface="+mn-cs"/>
         </a:defRPr>
       </a:lvl6pPr>
-      <a:lvl7pPr marL="2971800" indent="-228600" algn="l" defTabSz="914400" rtl="0" eaLnBrk="1" latinLnBrk="0" hangingPunct="1">
-        <a:lnSpc>
-          <a:spcPct val="90000"/>
-        </a:lnSpc>
-        <a:spcBef>
-          <a:spcPts val="500"/>
-        </a:spcBef>
-        <a:buFont typeface="Arial" panose="020B0604020202020204" pitchFamily="34" charset="0"/>
-        <a:buChar char="•"/>
+      <a:lvl7pPr marL="2743200" algn="l" defTabSz="457200" rtl="0" eaLnBrk="1" latinLnBrk="0" hangingPunct="1">
         <a:defRPr sz="1800" kern="1200">
           <a:solidFill>
             <a:schemeClr val="tx1"/>
@@ -3635,15 +6598,7 @@
           <a:cs typeface="+mn-cs"/>
         </a:defRPr>
       </a:lvl7pPr>
-      <a:lvl8pPr marL="3429000" indent="-228600" algn="l" defTabSz="914400" rtl="0" eaLnBrk="1" latinLnBrk="0" hangingPunct="1">
-        <a:lnSpc>
-          <a:spcPct val="90000"/>
-        </a:lnSpc>
-        <a:spcBef>
-          <a:spcPts val="500"/>
-        </a:spcBef>
-        <a:buFont typeface="Arial" panose="020B0604020202020204" pitchFamily="34" charset="0"/>
-        <a:buChar char="•"/>
+      <a:lvl8pPr marL="3200400" algn="l" defTabSz="457200" rtl="0" eaLnBrk="1" latinLnBrk="0" hangingPunct="1">
         <a:defRPr sz="1800" kern="1200">
           <a:solidFill>
             <a:schemeClr val="tx1"/>
@@ -3653,110 +6608,7 @@
           <a:cs typeface="+mn-cs"/>
         </a:defRPr>
       </a:lvl8pPr>
-      <a:lvl9pPr marL="3886200" indent="-228600" algn="l" defTabSz="914400" rtl="0" eaLnBrk="1" latinLnBrk="0" hangingPunct="1">
-        <a:lnSpc>
-          <a:spcPct val="90000"/>
-        </a:lnSpc>
-        <a:spcBef>
-          <a:spcPts val="500"/>
-        </a:spcBef>
-        <a:buFont typeface="Arial" panose="020B0604020202020204" pitchFamily="34" charset="0"/>
-        <a:buChar char="•"/>
-        <a:defRPr sz="1800" kern="1200">
-          <a:solidFill>
-            <a:schemeClr val="tx1"/>
-          </a:solidFill>
-          <a:latin typeface="+mn-lt"/>
-          <a:ea typeface="+mn-ea"/>
-          <a:cs typeface="+mn-cs"/>
-        </a:defRPr>
-      </a:lvl9pPr>
-    </p:bodyStyle>
-    <p:otherStyle>
-      <a:defPPr>
-        <a:defRPr lang="en-US"/>
-      </a:defPPr>
-      <a:lvl1pPr marL="0" algn="l" defTabSz="914400" rtl="0" eaLnBrk="1" latinLnBrk="0" hangingPunct="1">
-        <a:defRPr sz="1800" kern="1200">
-          <a:solidFill>
-            <a:schemeClr val="tx1"/>
-          </a:solidFill>
-          <a:latin typeface="+mn-lt"/>
-          <a:ea typeface="+mn-ea"/>
-          <a:cs typeface="+mn-cs"/>
-        </a:defRPr>
-      </a:lvl1pPr>
-      <a:lvl2pPr marL="457200" algn="l" defTabSz="914400" rtl="0" eaLnBrk="1" latinLnBrk="0" hangingPunct="1">
-        <a:defRPr sz="1800" kern="1200">
-          <a:solidFill>
-            <a:schemeClr val="tx1"/>
-          </a:solidFill>
-          <a:latin typeface="+mn-lt"/>
-          <a:ea typeface="+mn-ea"/>
-          <a:cs typeface="+mn-cs"/>
-        </a:defRPr>
-      </a:lvl2pPr>
-      <a:lvl3pPr marL="914400" algn="l" defTabSz="914400" rtl="0" eaLnBrk="1" latinLnBrk="0" hangingPunct="1">
-        <a:defRPr sz="1800" kern="1200">
-          <a:solidFill>
-            <a:schemeClr val="tx1"/>
-          </a:solidFill>
-          <a:latin typeface="+mn-lt"/>
-          <a:ea typeface="+mn-ea"/>
-          <a:cs typeface="+mn-cs"/>
-        </a:defRPr>
-      </a:lvl3pPr>
-      <a:lvl4pPr marL="1371600" algn="l" defTabSz="914400" rtl="0" eaLnBrk="1" latinLnBrk="0" hangingPunct="1">
-        <a:defRPr sz="1800" kern="1200">
-          <a:solidFill>
-            <a:schemeClr val="tx1"/>
-          </a:solidFill>
-          <a:latin typeface="+mn-lt"/>
-          <a:ea typeface="+mn-ea"/>
-          <a:cs typeface="+mn-cs"/>
-        </a:defRPr>
-      </a:lvl4pPr>
-      <a:lvl5pPr marL="1828800" algn="l" defTabSz="914400" rtl="0" eaLnBrk="1" latinLnBrk="0" hangingPunct="1">
-        <a:defRPr sz="1800" kern="1200">
-          <a:solidFill>
-            <a:schemeClr val="tx1"/>
-          </a:solidFill>
-          <a:latin typeface="+mn-lt"/>
-          <a:ea typeface="+mn-ea"/>
-          <a:cs typeface="+mn-cs"/>
-        </a:defRPr>
-      </a:lvl5pPr>
-      <a:lvl6pPr marL="2286000" algn="l" defTabSz="914400" rtl="0" eaLnBrk="1" latinLnBrk="0" hangingPunct="1">
-        <a:defRPr sz="1800" kern="1200">
-          <a:solidFill>
-            <a:schemeClr val="tx1"/>
-          </a:solidFill>
-          <a:latin typeface="+mn-lt"/>
-          <a:ea typeface="+mn-ea"/>
-          <a:cs typeface="+mn-cs"/>
-        </a:defRPr>
-      </a:lvl6pPr>
-      <a:lvl7pPr marL="2743200" algn="l" defTabSz="914400" rtl="0" eaLnBrk="1" latinLnBrk="0" hangingPunct="1">
-        <a:defRPr sz="1800" kern="1200">
-          <a:solidFill>
-            <a:schemeClr val="tx1"/>
-          </a:solidFill>
-          <a:latin typeface="+mn-lt"/>
-          <a:ea typeface="+mn-ea"/>
-          <a:cs typeface="+mn-cs"/>
-        </a:defRPr>
-      </a:lvl7pPr>
-      <a:lvl8pPr marL="3200400" algn="l" defTabSz="914400" rtl="0" eaLnBrk="1" latinLnBrk="0" hangingPunct="1">
-        <a:defRPr sz="1800" kern="1200">
-          <a:solidFill>
-            <a:schemeClr val="tx1"/>
-          </a:solidFill>
-          <a:latin typeface="+mn-lt"/>
-          <a:ea typeface="+mn-ea"/>
-          <a:cs typeface="+mn-cs"/>
-        </a:defRPr>
-      </a:lvl8pPr>
-      <a:lvl9pPr marL="3657600" algn="l" defTabSz="914400" rtl="0" eaLnBrk="1" latinLnBrk="0" hangingPunct="1">
+      <a:lvl9pPr marL="3657600" algn="l" defTabSz="457200" rtl="0" eaLnBrk="1" latinLnBrk="0" hangingPunct="1">
         <a:defRPr sz="1800" kern="1200">
           <a:solidFill>
             <a:schemeClr val="tx1"/>
@@ -3874,6 +6726,22 @@
               </a:rPr>
               <a:t>192524284</a:t>
             </a:r>
+          </a:p>
+          <a:p>
+            <a:r>
+              <a:rPr lang="en-US" dirty="0">
+                <a:latin typeface="Times New Roman" panose="02020603050405020304" pitchFamily="18" charset="0"/>
+                <a:cs typeface="Times New Roman" panose="02020603050405020304" pitchFamily="18" charset="0"/>
+              </a:rPr>
+              <a:t>GUIDED BY : R. </a:t>
+            </a:r>
+            <a:r>
+              <a:rPr lang="en-US" dirty="0" err="1">
+                <a:latin typeface="Times New Roman" panose="02020603050405020304" pitchFamily="18" charset="0"/>
+                <a:cs typeface="Times New Roman" panose="02020603050405020304" pitchFamily="18" charset="0"/>
+              </a:rPr>
+              <a:t>kesavan</a:t>
+            </a:r>
             <a:endParaRPr lang="en-IN" dirty="0">
               <a:latin typeface="Times New Roman" panose="02020603050405020304" pitchFamily="18" charset="0"/>
               <a:cs typeface="Times New Roman" panose="02020603050405020304" pitchFamily="18" charset="0"/>
@@ -3965,7 +6833,7 @@
         <p:spPr/>
         <p:txBody>
           <a:bodyPr>
-            <a:normAutofit fontScale="92500" lnSpcReduction="20000"/>
+            <a:normAutofit lnSpcReduction="10000"/>
           </a:bodyPr>
           <a:lstStyle/>
           <a:p>
@@ -4155,7 +7023,7 @@
         </p:spPr>
         <p:txBody>
           <a:bodyPr>
-            <a:normAutofit/>
+            <a:normAutofit fontScale="90000"/>
           </a:bodyPr>
           <a:lstStyle/>
           <a:p>
@@ -4331,7 +7199,7 @@
         </p:spPr>
         <p:txBody>
           <a:bodyPr>
-            <a:normAutofit fontScale="92500" lnSpcReduction="20000"/>
+            <a:normAutofit/>
           </a:bodyPr>
           <a:lstStyle/>
           <a:p>
@@ -4548,48 +7416,6 @@
           </a:p>
         </p:txBody>
       </p:sp>
-      <p:sp>
-        <p:nvSpPr>
-          <p:cNvPr id="3" name="Subtitle 2">
-            <a:extLst>
-              <a:ext uri="{FF2B5EF4-FFF2-40B4-BE49-F238E27FC236}">
-                <a16:creationId xmlns:a16="http://schemas.microsoft.com/office/drawing/2014/main" id="{E4B2A50F-E8ED-1B71-356C-D724D49FF054}"/>
-              </a:ext>
-            </a:extLst>
-          </p:cNvPr>
-          <p:cNvSpPr>
-            <a:spLocks noGrp="1"/>
-          </p:cNvSpPr>
-          <p:nvPr>
-            <p:ph type="subTitle" idx="1"/>
-          </p:nvPr>
-        </p:nvSpPr>
-        <p:spPr>
-          <a:xfrm>
-            <a:off x="7792278" y="4542182"/>
-            <a:ext cx="4055165" cy="715617"/>
-          </a:xfrm>
-        </p:spPr>
-        <p:txBody>
-          <a:bodyPr>
-            <a:normAutofit fontScale="92500" lnSpcReduction="20000"/>
-          </a:bodyPr>
-          <a:lstStyle/>
-          <a:p>
-            <a:r>
-              <a:rPr lang="en-US" dirty="0"/>
-              <a:t>S Lakshmi priya</a:t>
-            </a:r>
-          </a:p>
-          <a:p>
-            <a:r>
-              <a:rPr lang="en-US" dirty="0"/>
-              <a:t>192524284</a:t>
-            </a:r>
-            <a:endParaRPr lang="en-IN" dirty="0"/>
-          </a:p>
-        </p:txBody>
-      </p:sp>
     </p:spTree>
     <p:extLst>
       <p:ext uri="{BB962C8B-B14F-4D97-AF65-F5344CB8AC3E}">
@@ -4674,7 +7500,7 @@
         <p:spPr/>
         <p:txBody>
           <a:bodyPr>
-            <a:normAutofit fontScale="85000" lnSpcReduction="20000"/>
+            <a:normAutofit fontScale="92500" lnSpcReduction="10000"/>
           </a:bodyPr>
           <a:lstStyle/>
           <a:p>
@@ -5021,29 +7847,34 @@
             <p:ph idx="1"/>
           </p:nvPr>
         </p:nvSpPr>
-        <p:spPr/>
+        <p:spPr>
+          <a:xfrm>
+            <a:off x="838199" y="1825624"/>
+            <a:ext cx="11128513" cy="4505601"/>
+          </a:xfrm>
+        </p:spPr>
         <p:txBody>
           <a:bodyPr>
-            <a:normAutofit fontScale="92500" lnSpcReduction="20000"/>
+            <a:noAutofit/>
           </a:bodyPr>
           <a:lstStyle/>
           <a:p>
             <a:r>
-              <a:rPr lang="en-IN" dirty="0">
+              <a:rPr lang="en-IN" sz="2400" dirty="0">
                 <a:latin typeface="Times New Roman" panose="02020603050405020304" pitchFamily="18" charset="0"/>
                 <a:cs typeface="Times New Roman" panose="02020603050405020304" pitchFamily="18" charset="0"/>
               </a:rPr>
               <a:t>The software components of a </a:t>
             </a:r>
             <a:r>
-              <a:rPr lang="en-IN" b="1" dirty="0">
+              <a:rPr lang="en-IN" sz="2400" b="1" dirty="0">
                 <a:latin typeface="Times New Roman" panose="02020603050405020304" pitchFamily="18" charset="0"/>
                 <a:cs typeface="Times New Roman" panose="02020603050405020304" pitchFamily="18" charset="0"/>
               </a:rPr>
               <a:t>DBMS</a:t>
             </a:r>
             <a:r>
-              <a:rPr lang="en-IN" dirty="0">
+              <a:rPr lang="en-IN" sz="2400" dirty="0">
                 <a:latin typeface="Times New Roman" panose="02020603050405020304" pitchFamily="18" charset="0"/>
                 <a:cs typeface="Times New Roman" panose="02020603050405020304" pitchFamily="18" charset="0"/>
               </a:rPr>
@@ -5052,7 +7883,7 @@
           </a:p>
           <a:p>
             <a:r>
-              <a:rPr lang="en-IN" dirty="0">
+              <a:rPr lang="en-IN" sz="2400" dirty="0">
                 <a:latin typeface="Times New Roman" panose="02020603050405020304" pitchFamily="18" charset="0"/>
                 <a:cs typeface="Times New Roman" panose="02020603050405020304" pitchFamily="18" charset="0"/>
               </a:rPr>
@@ -5061,21 +7892,21 @@
           </a:p>
           <a:p>
             <a:r>
-              <a:rPr lang="en-IN" dirty="0">
+              <a:rPr lang="en-IN" sz="2400" dirty="0">
                 <a:latin typeface="Times New Roman" panose="02020603050405020304" pitchFamily="18" charset="0"/>
                 <a:cs typeface="Times New Roman" panose="02020603050405020304" pitchFamily="18" charset="0"/>
               </a:rPr>
               <a:t> These components ensure accurate storage, retrieval, and updating of data. The </a:t>
             </a:r>
             <a:r>
-              <a:rPr lang="en-IN" b="1" dirty="0">
+              <a:rPr lang="en-IN" sz="2400" b="1" dirty="0">
                 <a:latin typeface="Times New Roman" panose="02020603050405020304" pitchFamily="18" charset="0"/>
                 <a:cs typeface="Times New Roman" panose="02020603050405020304" pitchFamily="18" charset="0"/>
               </a:rPr>
               <a:t>Transaction Manager</a:t>
             </a:r>
             <a:r>
-              <a:rPr lang="en-IN" dirty="0">
+              <a:rPr lang="en-IN" sz="2400" dirty="0">
                 <a:latin typeface="Times New Roman" panose="02020603050405020304" pitchFamily="18" charset="0"/>
                 <a:cs typeface="Times New Roman" panose="02020603050405020304" pitchFamily="18" charset="0"/>
               </a:rPr>
@@ -5084,35 +7915,35 @@
           </a:p>
           <a:p>
             <a:r>
-              <a:rPr lang="en-IN" dirty="0">
+              <a:rPr lang="en-IN" sz="2400" dirty="0">
                 <a:latin typeface="Times New Roman" panose="02020603050405020304" pitchFamily="18" charset="0"/>
                 <a:cs typeface="Times New Roman" panose="02020603050405020304" pitchFamily="18" charset="0"/>
               </a:rPr>
               <a:t> The </a:t>
             </a:r>
             <a:r>
-              <a:rPr lang="en-IN" b="1" dirty="0">
+              <a:rPr lang="en-IN" sz="2400" b="1" dirty="0">
                 <a:latin typeface="Times New Roman" panose="02020603050405020304" pitchFamily="18" charset="0"/>
                 <a:cs typeface="Times New Roman" panose="02020603050405020304" pitchFamily="18" charset="0"/>
               </a:rPr>
               <a:t>Recovery Manager</a:t>
             </a:r>
             <a:r>
-              <a:rPr lang="en-IN" dirty="0">
+              <a:rPr lang="en-IN" sz="2400" dirty="0">
                 <a:latin typeface="Times New Roman" panose="02020603050405020304" pitchFamily="18" charset="0"/>
                 <a:cs typeface="Times New Roman" panose="02020603050405020304" pitchFamily="18" charset="0"/>
               </a:rPr>
               <a:t> protects data and restores the database after failures. The </a:t>
             </a:r>
             <a:r>
-              <a:rPr lang="en-IN" b="1" dirty="0">
+              <a:rPr lang="en-IN" sz="2400" b="1" dirty="0">
                 <a:latin typeface="Times New Roman" panose="02020603050405020304" pitchFamily="18" charset="0"/>
                 <a:cs typeface="Times New Roman" panose="02020603050405020304" pitchFamily="18" charset="0"/>
               </a:rPr>
               <a:t>Security Manager</a:t>
             </a:r>
             <a:r>
-              <a:rPr lang="en-IN" dirty="0">
+              <a:rPr lang="en-IN" sz="2400" dirty="0">
                 <a:latin typeface="Times New Roman" panose="02020603050405020304" pitchFamily="18" charset="0"/>
                 <a:cs typeface="Times New Roman" panose="02020603050405020304" pitchFamily="18" charset="0"/>
               </a:rPr>
@@ -5121,7 +7952,7 @@
           </a:p>
           <a:p>
             <a:r>
-              <a:rPr lang="en-IN" dirty="0">
+              <a:rPr lang="en-IN" sz="2400" dirty="0">
                 <a:latin typeface="Times New Roman" panose="02020603050405020304" pitchFamily="18" charset="0"/>
                 <a:cs typeface="Times New Roman" panose="02020603050405020304" pitchFamily="18" charset="0"/>
               </a:rPr>
@@ -5129,15 +7960,14 @@
             </a:r>
           </a:p>
           <a:p>
-            <a:r>
-              <a:rPr lang="en-IN" dirty="0">
-                <a:latin typeface="Times New Roman" panose="02020603050405020304" pitchFamily="18" charset="0"/>
-                <a:cs typeface="Times New Roman" panose="02020603050405020304" pitchFamily="18" charset="0"/>
-              </a:rPr>
-              <a:t>They help maintain data integrity, security, and efficient resource utilization</a:t>
-            </a:r>
-            <a:r>
-              <a:rPr lang="en-IN" dirty="0"/>
+            <a:pPr marL="0" indent="0">
+              <a:buNone/>
+            </a:pPr>
+            <a:r>
+              <a:rPr lang="en-IN" sz="2400" dirty="0">
+                <a:latin typeface="Times New Roman" panose="02020603050405020304" pitchFamily="18" charset="0"/>
+                <a:cs typeface="Times New Roman" panose="02020603050405020304" pitchFamily="18" charset="0"/>
+              </a:rPr>
               <a:t>.</a:t>
             </a:r>
           </a:p>
@@ -5210,46 +8040,6 @@
           </a:p>
         </p:txBody>
       </p:sp>
-      <p:sp>
-        <p:nvSpPr>
-          <p:cNvPr id="3" name="Subtitle 2">
-            <a:extLst>
-              <a:ext uri="{FF2B5EF4-FFF2-40B4-BE49-F238E27FC236}">
-                <a16:creationId xmlns:a16="http://schemas.microsoft.com/office/drawing/2014/main" id="{096A5315-3F9C-7A71-0781-C3C7635C050E}"/>
-              </a:ext>
-            </a:extLst>
-          </p:cNvPr>
-          <p:cNvSpPr>
-            <a:spLocks noGrp="1"/>
-          </p:cNvSpPr>
-          <p:nvPr>
-            <p:ph type="subTitle" idx="1"/>
-          </p:nvPr>
-        </p:nvSpPr>
-        <p:spPr>
-          <a:xfrm>
-            <a:off x="7633252" y="4333460"/>
-            <a:ext cx="4303644" cy="924339"/>
-          </a:xfrm>
-        </p:spPr>
-        <p:txBody>
-          <a:bodyPr/>
-          <a:lstStyle/>
-          <a:p>
-            <a:r>
-              <a:rPr lang="en-US" dirty="0"/>
-              <a:t>S Lakshmi priya</a:t>
-            </a:r>
-          </a:p>
-          <a:p>
-            <a:r>
-              <a:rPr lang="en-US" dirty="0"/>
-              <a:t>192524284</a:t>
-            </a:r>
-            <a:endParaRPr lang="en-IN" dirty="0"/>
-          </a:p>
-        </p:txBody>
-      </p:sp>
     </p:spTree>
     <p:extLst>
       <p:ext uri="{BB962C8B-B14F-4D97-AF65-F5344CB8AC3E}">
@@ -5334,7 +8124,7 @@
         <p:spPr/>
         <p:txBody>
           <a:bodyPr>
-            <a:normAutofit fontScale="85000" lnSpcReduction="20000"/>
+            <a:normAutofit fontScale="92500" lnSpcReduction="20000"/>
           </a:bodyPr>
           <a:lstStyle/>
           <a:p>
@@ -5574,10 +8364,10 @@
       </p:sp>
       <p:pic>
         <p:nvPicPr>
-          <p:cNvPr id="4" name="Picture 3">
+          <p:cNvPr id="5" name="Picture 4">
             <a:extLst>
               <a:ext uri="{FF2B5EF4-FFF2-40B4-BE49-F238E27FC236}">
-                <a16:creationId xmlns:a16="http://schemas.microsoft.com/office/drawing/2014/main" id="{44FBBC45-3BAC-D9B4-966F-EE0221C24C73}"/>
+                <a16:creationId xmlns:a16="http://schemas.microsoft.com/office/drawing/2014/main" id="{EF93C610-FD67-F096-8CC5-763379E06B57}"/>
               </a:ext>
             </a:extLst>
           </p:cNvPr>
@@ -5594,8 +8384,8 @@
         </p:blipFill>
         <p:spPr>
           <a:xfrm>
-            <a:off x="1371600" y="1987825"/>
-            <a:ext cx="10515600" cy="4505049"/>
+            <a:off x="838199" y="1798982"/>
+            <a:ext cx="10919791" cy="4870174"/>
           </a:xfrm>
           <a:prstGeom prst="rect">
             <a:avLst/>
@@ -6057,7 +8847,7 @@
         <p:spPr/>
         <p:txBody>
           <a:bodyPr>
-            <a:normAutofit fontScale="92500" lnSpcReduction="10000"/>
+            <a:normAutofit/>
           </a:bodyPr>
           <a:lstStyle/>
           <a:p>
@@ -6188,6 +8978,77 @@
     <p:extLst>
       <p:ext uri="{BB962C8B-B14F-4D97-AF65-F5344CB8AC3E}">
         <p14:creationId xmlns:p14="http://schemas.microsoft.com/office/powerpoint/2010/main" val="2538712348"/>
+      </p:ext>
+    </p:extLst>
+  </p:cSld>
+  <p:clrMapOvr>
+    <a:masterClrMapping/>
+  </p:clrMapOvr>
+</p:sld>
+</file>
+
+<file path=ppt/slides/slide21.xml><?xml version="1.0" encoding="utf-8"?>
+<p:sld xmlns:a="http://schemas.openxmlformats.org/drawingml/2006/main" xmlns:r="http://schemas.openxmlformats.org/officeDocument/2006/relationships" xmlns:p="http://schemas.openxmlformats.org/presentationml/2006/main">
+  <p:cSld>
+    <p:spTree>
+      <p:nvGrpSpPr>
+        <p:cNvPr id="1" name=""/>
+        <p:cNvGrpSpPr/>
+        <p:nvPr/>
+      </p:nvGrpSpPr>
+      <p:grpSpPr>
+        <a:xfrm>
+          <a:off x="0" y="0"/>
+          <a:ext cx="0" cy="0"/>
+          <a:chOff x="0" y="0"/>
+          <a:chExt cx="0" cy="0"/>
+        </a:xfrm>
+      </p:grpSpPr>
+      <p:sp>
+        <p:nvSpPr>
+          <p:cNvPr id="3" name="TextBox 2">
+            <a:extLst>
+              <a:ext uri="{FF2B5EF4-FFF2-40B4-BE49-F238E27FC236}">
+                <a16:creationId xmlns:a16="http://schemas.microsoft.com/office/drawing/2014/main" id="{4A9069D1-4E77-5CA7-F157-621587741273}"/>
+              </a:ext>
+            </a:extLst>
+          </p:cNvPr>
+          <p:cNvSpPr txBox="1"/>
+          <p:nvPr/>
+        </p:nvSpPr>
+        <p:spPr>
+          <a:xfrm>
+            <a:off x="2971800" y="2315818"/>
+            <a:ext cx="6174684" cy="1200329"/>
+          </a:xfrm>
+          <a:prstGeom prst="rect">
+            <a:avLst/>
+          </a:prstGeom>
+          <a:noFill/>
+        </p:spPr>
+        <p:txBody>
+          <a:bodyPr wrap="square">
+            <a:spAutoFit/>
+          </a:bodyPr>
+          <a:lstStyle/>
+          <a:p>
+            <a:pPr>
+              <a:buNone/>
+            </a:pPr>
+            <a:r>
+              <a:rPr lang="en-IN" sz="7200" dirty="0">
+                <a:latin typeface="Times New Roman" panose="02020603050405020304" pitchFamily="18" charset="0"/>
+                <a:cs typeface="Times New Roman" panose="02020603050405020304" pitchFamily="18" charset="0"/>
+              </a:rPr>
+              <a:t>THANK YOU</a:t>
+            </a:r>
+          </a:p>
+        </p:txBody>
+      </p:sp>
+    </p:spTree>
+    <p:extLst>
+      <p:ext uri="{BB962C8B-B14F-4D97-AF65-F5344CB8AC3E}">
+        <p14:creationId xmlns:p14="http://schemas.microsoft.com/office/powerpoint/2010/main" val="586358492"/>
       </p:ext>
     </p:extLst>
   </p:cSld>
@@ -6263,10 +9124,10 @@
       </p:sp>
       <p:pic>
         <p:nvPicPr>
-          <p:cNvPr id="6" name="Picture 5">
+          <p:cNvPr id="4" name="Picture 3">
             <a:extLst>
               <a:ext uri="{FF2B5EF4-FFF2-40B4-BE49-F238E27FC236}">
-                <a16:creationId xmlns:a16="http://schemas.microsoft.com/office/drawing/2014/main" id="{11D612EB-FBCD-2228-321E-BE997DF405EE}"/>
+                <a16:creationId xmlns:a16="http://schemas.microsoft.com/office/drawing/2014/main" id="{F27E8E98-093F-0404-035B-D377E9996C7A}"/>
               </a:ext>
             </a:extLst>
           </p:cNvPr>
@@ -6283,8 +9144,8 @@
         </p:blipFill>
         <p:spPr>
           <a:xfrm>
-            <a:off x="983974" y="1098734"/>
-            <a:ext cx="9929191" cy="5053587"/>
+            <a:off x="1083365" y="1371600"/>
+            <a:ext cx="10565296" cy="4658088"/>
           </a:xfrm>
           <a:prstGeom prst="rect">
             <a:avLst/>
@@ -6380,7 +9241,7 @@
         <p:spPr/>
         <p:txBody>
           <a:bodyPr>
-            <a:normAutofit/>
+            <a:normAutofit lnSpcReduction="10000"/>
           </a:bodyPr>
           <a:lstStyle/>
           <a:p>
@@ -6506,57 +9367,6 @@
           </a:p>
         </p:txBody>
       </p:sp>
-      <p:sp>
-        <p:nvSpPr>
-          <p:cNvPr id="3" name="Subtitle 2">
-            <a:extLst>
-              <a:ext uri="{FF2B5EF4-FFF2-40B4-BE49-F238E27FC236}">
-                <a16:creationId xmlns:a16="http://schemas.microsoft.com/office/drawing/2014/main" id="{EE42B7C4-900A-5781-7784-7BC3C5A8013D}"/>
-              </a:ext>
-            </a:extLst>
-          </p:cNvPr>
-          <p:cNvSpPr>
-            <a:spLocks noGrp="1"/>
-          </p:cNvSpPr>
-          <p:nvPr>
-            <p:ph type="subTitle" idx="1"/>
-          </p:nvPr>
-        </p:nvSpPr>
-        <p:spPr>
-          <a:xfrm>
-            <a:off x="6758608" y="4611756"/>
-            <a:ext cx="5108495" cy="646043"/>
-          </a:xfrm>
-        </p:spPr>
-        <p:txBody>
-          <a:bodyPr>
-            <a:noAutofit/>
-          </a:bodyPr>
-          <a:lstStyle/>
-          <a:p>
-            <a:r>
-              <a:rPr lang="en-US" sz="2800" dirty="0">
-                <a:latin typeface="Times New Roman" panose="02020603050405020304" pitchFamily="18" charset="0"/>
-                <a:cs typeface="Times New Roman" panose="02020603050405020304" pitchFamily="18" charset="0"/>
-              </a:rPr>
-              <a:t>S Lakshmi priya </a:t>
-            </a:r>
-          </a:p>
-          <a:p>
-            <a:r>
-              <a:rPr lang="en-US" sz="2800" dirty="0">
-                <a:latin typeface="Times New Roman" panose="02020603050405020304" pitchFamily="18" charset="0"/>
-                <a:cs typeface="Times New Roman" panose="02020603050405020304" pitchFamily="18" charset="0"/>
-              </a:rPr>
-              <a:t>192524284</a:t>
-            </a:r>
-            <a:endParaRPr lang="en-IN" sz="2800" dirty="0">
-              <a:latin typeface="Times New Roman" panose="02020603050405020304" pitchFamily="18" charset="0"/>
-              <a:cs typeface="Times New Roman" panose="02020603050405020304" pitchFamily="18" charset="0"/>
-            </a:endParaRPr>
-          </a:p>
-        </p:txBody>
-      </p:sp>
     </p:spTree>
     <p:extLst>
       <p:ext uri="{BB962C8B-B14F-4D97-AF65-F5344CB8AC3E}">
@@ -6673,6 +9483,12 @@
             </a:r>
           </a:p>
           <a:p>
+            <a:endParaRPr lang="en-IN" sz="2400" dirty="0">
+              <a:latin typeface="Times New Roman" panose="02020603050405020304" pitchFamily="18" charset="0"/>
+              <a:cs typeface="Times New Roman" panose="02020603050405020304" pitchFamily="18" charset="0"/>
+            </a:endParaRPr>
+          </a:p>
+          <a:p>
             <a:r>
               <a:rPr lang="en-IN" sz="2400" dirty="0">
                 <a:latin typeface="Times New Roman" panose="02020603050405020304" pitchFamily="18" charset="0"/>
@@ -6710,6 +9526,15 @@
             </a:r>
           </a:p>
           <a:p>
+            <a:pPr marL="0" indent="0">
+              <a:buNone/>
+            </a:pPr>
+            <a:endParaRPr lang="en-IN" sz="2400" dirty="0">
+              <a:latin typeface="Times New Roman" panose="02020603050405020304" pitchFamily="18" charset="0"/>
+              <a:cs typeface="Times New Roman" panose="02020603050405020304" pitchFamily="18" charset="0"/>
+            </a:endParaRPr>
+          </a:p>
+          <a:p>
             <a:r>
               <a:rPr lang="en-IN" sz="2400" dirty="0">
                 <a:latin typeface="Times New Roman" panose="02020603050405020304" pitchFamily="18" charset="0"/>
@@ -6729,157 +9554,31 @@
                 <a:latin typeface="Times New Roman" panose="02020603050405020304" pitchFamily="18" charset="0"/>
                 <a:cs typeface="Times New Roman" panose="02020603050405020304" pitchFamily="18" charset="0"/>
               </a:rPr>
-              <a:t> divides a higher-level entity into lower-level entities based on their unique characteristics.</a:t>
-            </a:r>
-          </a:p>
-          <a:p>
+              <a:t> divides a higher-level entity into </a:t>
+            </a:r>
+            <a:r>
+              <a:rPr lang="en-IN" sz="2400" dirty="0" err="1">
+                <a:latin typeface="Times New Roman" panose="02020603050405020304" pitchFamily="18" charset="0"/>
+                <a:cs typeface="Times New Roman" panose="02020603050405020304" pitchFamily="18" charset="0"/>
+              </a:rPr>
+              <a:t>lowerlevel</a:t>
+            </a:r>
             <a:r>
               <a:rPr lang="en-IN" sz="2400" dirty="0">
                 <a:latin typeface="Times New Roman" panose="02020603050405020304" pitchFamily="18" charset="0"/>
                 <a:cs typeface="Times New Roman" panose="02020603050405020304" pitchFamily="18" charset="0"/>
               </a:rPr>
-              <a:t> In a </a:t>
-            </a:r>
-            <a:r>
-              <a:rPr lang="en-IN" sz="2400" b="1" dirty="0">
-                <a:latin typeface="Times New Roman" panose="02020603050405020304" pitchFamily="18" charset="0"/>
-                <a:cs typeface="Times New Roman" panose="02020603050405020304" pitchFamily="18" charset="0"/>
-              </a:rPr>
-              <a:t>University Management System</a:t>
-            </a:r>
-            <a:r>
-              <a:rPr lang="en-IN" sz="2400" dirty="0">
-                <a:latin typeface="Times New Roman" panose="02020603050405020304" pitchFamily="18" charset="0"/>
-                <a:cs typeface="Times New Roman" panose="02020603050405020304" pitchFamily="18" charset="0"/>
-              </a:rPr>
-              <a:t>, the common entity is </a:t>
-            </a:r>
-            <a:r>
-              <a:rPr lang="en-IN" sz="2400" b="1" dirty="0">
-                <a:latin typeface="Times New Roman" panose="02020603050405020304" pitchFamily="18" charset="0"/>
-                <a:cs typeface="Times New Roman" panose="02020603050405020304" pitchFamily="18" charset="0"/>
-              </a:rPr>
-              <a:t>Person</a:t>
-            </a:r>
-            <a:r>
-              <a:rPr lang="en-IN" sz="2400" dirty="0">
-                <a:latin typeface="Times New Roman" panose="02020603050405020304" pitchFamily="18" charset="0"/>
-                <a:cs typeface="Times New Roman" panose="02020603050405020304" pitchFamily="18" charset="0"/>
-              </a:rPr>
-              <a:t>, which can be specialized into </a:t>
-            </a:r>
-            <a:r>
-              <a:rPr lang="en-IN" sz="2400" b="1" dirty="0">
-                <a:latin typeface="Times New Roman" panose="02020603050405020304" pitchFamily="18" charset="0"/>
-                <a:cs typeface="Times New Roman" panose="02020603050405020304" pitchFamily="18" charset="0"/>
-              </a:rPr>
-              <a:t>Student</a:t>
-            </a:r>
-            <a:r>
-              <a:rPr lang="en-IN" sz="2400" dirty="0">
-                <a:latin typeface="Times New Roman" panose="02020603050405020304" pitchFamily="18" charset="0"/>
-                <a:cs typeface="Times New Roman" panose="02020603050405020304" pitchFamily="18" charset="0"/>
-              </a:rPr>
-              <a:t>, </a:t>
-            </a:r>
-            <a:r>
-              <a:rPr lang="en-IN" sz="2400" b="1" dirty="0">
-                <a:latin typeface="Times New Roman" panose="02020603050405020304" pitchFamily="18" charset="0"/>
-                <a:cs typeface="Times New Roman" panose="02020603050405020304" pitchFamily="18" charset="0"/>
-              </a:rPr>
-              <a:t>Faculty</a:t>
-            </a:r>
-            <a:r>
-              <a:rPr lang="en-IN" sz="2400" dirty="0">
-                <a:latin typeface="Times New Roman" panose="02020603050405020304" pitchFamily="18" charset="0"/>
-                <a:cs typeface="Times New Roman" panose="02020603050405020304" pitchFamily="18" charset="0"/>
-              </a:rPr>
-              <a:t>, and </a:t>
-            </a:r>
-            <a:r>
-              <a:rPr lang="en-IN" sz="2400" b="1" dirty="0">
-                <a:latin typeface="Times New Roman" panose="02020603050405020304" pitchFamily="18" charset="0"/>
-                <a:cs typeface="Times New Roman" panose="02020603050405020304" pitchFamily="18" charset="0"/>
-              </a:rPr>
-              <a:t>Staff</a:t>
-            </a:r>
-            <a:r>
-              <a:rPr lang="en-IN" sz="2400" dirty="0">
-                <a:latin typeface="Times New Roman" panose="02020603050405020304" pitchFamily="18" charset="0"/>
-                <a:cs typeface="Times New Roman" panose="02020603050405020304" pitchFamily="18" charset="0"/>
-              </a:rPr>
-              <a:t>. Each specialized entity inherits the common attributes of the </a:t>
-            </a:r>
-            <a:r>
-              <a:rPr lang="en-IN" sz="2400" b="1" dirty="0">
-                <a:latin typeface="Times New Roman" panose="02020603050405020304" pitchFamily="18" charset="0"/>
-                <a:cs typeface="Times New Roman" panose="02020603050405020304" pitchFamily="18" charset="0"/>
-              </a:rPr>
-              <a:t>Person</a:t>
-            </a:r>
-            <a:r>
-              <a:rPr lang="en-IN" sz="2400" dirty="0">
-                <a:latin typeface="Times New Roman" panose="02020603050405020304" pitchFamily="18" charset="0"/>
-                <a:cs typeface="Times New Roman" panose="02020603050405020304" pitchFamily="18" charset="0"/>
-              </a:rPr>
-              <a:t> entity, such as </a:t>
-            </a:r>
-            <a:r>
-              <a:rPr lang="en-IN" sz="2400" b="1" dirty="0">
-                <a:latin typeface="Times New Roman" panose="02020603050405020304" pitchFamily="18" charset="0"/>
-                <a:cs typeface="Times New Roman" panose="02020603050405020304" pitchFamily="18" charset="0"/>
-              </a:rPr>
-              <a:t>Person ID, Name, Address, and Contact Number</a:t>
-            </a:r>
-            <a:r>
-              <a:rPr lang="en-IN" sz="2400" dirty="0">
-                <a:latin typeface="Times New Roman" panose="02020603050405020304" pitchFamily="18" charset="0"/>
-                <a:cs typeface="Times New Roman" panose="02020603050405020304" pitchFamily="18" charset="0"/>
-              </a:rPr>
-              <a:t>. Specialized entities also have their own unique attributes, such as </a:t>
-            </a:r>
-            <a:r>
-              <a:rPr lang="en-IN" sz="2400" b="1" dirty="0">
-                <a:latin typeface="Times New Roman" panose="02020603050405020304" pitchFamily="18" charset="0"/>
-                <a:cs typeface="Times New Roman" panose="02020603050405020304" pitchFamily="18" charset="0"/>
-              </a:rPr>
-              <a:t>Roll Number</a:t>
-            </a:r>
-            <a:r>
-              <a:rPr lang="en-IN" sz="2400" dirty="0">
-                <a:latin typeface="Times New Roman" panose="02020603050405020304" pitchFamily="18" charset="0"/>
-                <a:cs typeface="Times New Roman" panose="02020603050405020304" pitchFamily="18" charset="0"/>
-              </a:rPr>
-              <a:t> for Students, </a:t>
-            </a:r>
-            <a:r>
-              <a:rPr lang="en-IN" sz="2400" b="1" dirty="0">
-                <a:latin typeface="Times New Roman" panose="02020603050405020304" pitchFamily="18" charset="0"/>
-                <a:cs typeface="Times New Roman" panose="02020603050405020304" pitchFamily="18" charset="0"/>
-              </a:rPr>
-              <a:t>Department</a:t>
-            </a:r>
-            <a:r>
-              <a:rPr lang="en-IN" sz="2400" dirty="0">
-                <a:latin typeface="Times New Roman" panose="02020603050405020304" pitchFamily="18" charset="0"/>
-                <a:cs typeface="Times New Roman" panose="02020603050405020304" pitchFamily="18" charset="0"/>
-              </a:rPr>
-              <a:t> for Faculty, and </a:t>
-            </a:r>
-            <a:r>
-              <a:rPr lang="en-IN" sz="2400" b="1" dirty="0">
-                <a:latin typeface="Times New Roman" panose="02020603050405020304" pitchFamily="18" charset="0"/>
-                <a:cs typeface="Times New Roman" panose="02020603050405020304" pitchFamily="18" charset="0"/>
-              </a:rPr>
-              <a:t>Designation</a:t>
-            </a:r>
-            <a:r>
-              <a:rPr lang="en-IN" sz="2400" dirty="0">
-                <a:latin typeface="Times New Roman" panose="02020603050405020304" pitchFamily="18" charset="0"/>
-                <a:cs typeface="Times New Roman" panose="02020603050405020304" pitchFamily="18" charset="0"/>
-              </a:rPr>
-              <a:t> for Staff.</a:t>
-            </a:r>
+              <a:t> entities based on their unique characteristics.</a:t>
+            </a:r>
+          </a:p>
+          <a:p>
+            <a:pPr marL="0" indent="0">
+              <a:buNone/>
+            </a:pPr>
+            <a:endParaRPr lang="en-IN" sz="2400" dirty="0">
+              <a:latin typeface="Times New Roman" panose="02020603050405020304" pitchFamily="18" charset="0"/>
+              <a:cs typeface="Times New Roman" panose="02020603050405020304" pitchFamily="18" charset="0"/>
+            </a:endParaRPr>
           </a:p>
         </p:txBody>
       </p:sp>
@@ -6950,10 +9649,10 @@
       </p:sp>
       <p:pic>
         <p:nvPicPr>
-          <p:cNvPr id="4" name="Picture 3">
+          <p:cNvPr id="5" name="Picture 4">
             <a:extLst>
               <a:ext uri="{FF2B5EF4-FFF2-40B4-BE49-F238E27FC236}">
-                <a16:creationId xmlns:a16="http://schemas.microsoft.com/office/drawing/2014/main" id="{2BFB2341-0819-3B4F-E988-39C02F9AAD2E}"/>
+                <a16:creationId xmlns:a16="http://schemas.microsoft.com/office/drawing/2014/main" id="{A250FD5E-4AAB-97DE-0A88-8D486B542886}"/>
               </a:ext>
             </a:extLst>
           </p:cNvPr>
@@ -6970,8 +9669,8 @@
         </p:blipFill>
         <p:spPr>
           <a:xfrm>
-            <a:off x="2146854" y="1997764"/>
-            <a:ext cx="8905460" cy="4291769"/>
+            <a:off x="1262270" y="1570383"/>
+            <a:ext cx="10091529" cy="4445015"/>
           </a:xfrm>
           <a:prstGeom prst="rect">
             <a:avLst/>
@@ -7059,10 +9758,15 @@
             <p:ph idx="1"/>
           </p:nvPr>
         </p:nvSpPr>
-        <p:spPr/>
+        <p:spPr>
+          <a:xfrm>
+            <a:off x="838199" y="1825625"/>
+            <a:ext cx="11128513" cy="4351338"/>
+          </a:xfrm>
+        </p:spPr>
         <p:txBody>
           <a:bodyPr>
-            <a:normAutofit fontScale="85000" lnSpcReduction="20000"/>
+            <a:normAutofit/>
           </a:bodyPr>
           <a:lstStyle/>
           <a:p>
@@ -7187,15 +9891,6 @@
                 <a:cs typeface="Times New Roman" panose="02020603050405020304" pitchFamily="18" charset="0"/>
               </a:rPr>
               <a:t>It supports efficient storage and retrieval of university information.</a:t>
-            </a:r>
-          </a:p>
-          <a:p>
-            <a:r>
-              <a:rPr lang="en-IN" dirty="0">
-                <a:latin typeface="Times New Roman" panose="02020603050405020304" pitchFamily="18" charset="0"/>
-                <a:cs typeface="Times New Roman" panose="02020603050405020304" pitchFamily="18" charset="0"/>
-              </a:rPr>
-              <a:t> It accurately represents the structure and operations of a university management system.</a:t>
             </a:r>
           </a:p>
         </p:txBody>
@@ -7281,46 +9976,6 @@
           </a:p>
         </p:txBody>
       </p:sp>
-      <p:sp>
-        <p:nvSpPr>
-          <p:cNvPr id="3" name="Subtitle 2">
-            <a:extLst>
-              <a:ext uri="{FF2B5EF4-FFF2-40B4-BE49-F238E27FC236}">
-                <a16:creationId xmlns:a16="http://schemas.microsoft.com/office/drawing/2014/main" id="{B5688D99-DAC5-A898-E7A4-ACA7BD32C9E9}"/>
-              </a:ext>
-            </a:extLst>
-          </p:cNvPr>
-          <p:cNvSpPr>
-            <a:spLocks noGrp="1"/>
-          </p:cNvSpPr>
-          <p:nvPr>
-            <p:ph type="subTitle" idx="1"/>
-          </p:nvPr>
-        </p:nvSpPr>
-        <p:spPr>
-          <a:xfrm>
-            <a:off x="5871077" y="4771541"/>
-            <a:ext cx="6418058" cy="964096"/>
-          </a:xfrm>
-        </p:spPr>
-        <p:txBody>
-          <a:bodyPr/>
-          <a:lstStyle/>
-          <a:p>
-            <a:r>
-              <a:rPr lang="en-US" dirty="0"/>
-              <a:t>S Lakshmi priya </a:t>
-            </a:r>
-          </a:p>
-          <a:p>
-            <a:r>
-              <a:rPr lang="en-US" dirty="0"/>
-              <a:t>192524284</a:t>
-            </a:r>
-            <a:endParaRPr lang="en-IN" dirty="0"/>
-          </a:p>
-        </p:txBody>
-      </p:sp>
     </p:spTree>
     <p:extLst>
       <p:ext uri="{BB962C8B-B14F-4D97-AF65-F5344CB8AC3E}">
@@ -7335,9 +9990,9 @@
 </file>
 
 <file path=ppt/theme/theme1.xml><?xml version="1.0" encoding="utf-8"?>
-<a:theme xmlns:a="http://schemas.openxmlformats.org/drawingml/2006/main" name="Office Theme">
+<a:theme xmlns:a="http://schemas.openxmlformats.org/drawingml/2006/main" name="Ion">
   <a:themeElements>
-    <a:clrScheme name="Office">
+    <a:clrScheme name="Ion">
       <a:dk1>
         <a:sysClr val="windowText" lastClr="000000"/>
       </a:dk1>
@@ -7345,44 +10000,44 @@
         <a:sysClr val="window" lastClr="FFFFFF"/>
       </a:lt1>
       <a:dk2>
-        <a:srgbClr val="0E2841"/>
+        <a:srgbClr val="1E5155"/>
       </a:dk2>
       <a:lt2>
-        <a:srgbClr val="E8E8E8"/>
+        <a:srgbClr val="EBEBEB"/>
       </a:lt2>
       <a:accent1>
-        <a:srgbClr val="156082"/>
+        <a:srgbClr val="B01513"/>
       </a:accent1>
       <a:accent2>
-        <a:srgbClr val="E97132"/>
+        <a:srgbClr val="EA6312"/>
       </a:accent2>
       <a:accent3>
-        <a:srgbClr val="196B24"/>
+        <a:srgbClr val="E6B729"/>
       </a:accent3>
       <a:accent4>
-        <a:srgbClr val="0F9ED5"/>
+        <a:srgbClr val="6AAC90"/>
       </a:accent4>
       <a:accent5>
-        <a:srgbClr val="A02B93"/>
+        <a:srgbClr val="54849A"/>
       </a:accent5>
       <a:accent6>
-        <a:srgbClr val="4EA72E"/>
+        <a:srgbClr val="9E5E9B"/>
       </a:accent6>
       <a:hlink>
-        <a:srgbClr val="467886"/>
+        <a:srgbClr val="58C1BA"/>
       </a:hlink>
       <a:folHlink>
-        <a:srgbClr val="96607D"/>
+        <a:srgbClr val="9DFFCB"/>
       </a:folHlink>
     </a:clrScheme>
-    <a:fontScheme name="Office">
+    <a:fontScheme name="Ion">
       <a:majorFont>
-        <a:latin typeface="Aptos Display" panose="02110004020202020204"/>
+        <a:latin typeface="Century Gothic" panose="020B0502020202020204"/>
         <a:ea typeface=""/>
         <a:cs typeface=""/>
-        <a:font script="Jpan" typeface="游ゴシック Light"/>
+        <a:font script="Jpan" typeface="メイリオ"/>
         <a:font script="Hang" typeface="맑은 고딕"/>
-        <a:font script="Hans" typeface="等线 Light"/>
+        <a:font script="Hans" typeface="宋体"/>
         <a:font script="Hant" typeface="新細明體"/>
         <a:font script="Arab" typeface="Times New Roman"/>
         <a:font script="Hebr" typeface="Times New Roman"/>
@@ -7410,31 +10065,14 @@
         <a:font script="Viet" typeface="Times New Roman"/>
         <a:font script="Uigh" typeface="Microsoft Uighur"/>
         <a:font script="Geor" typeface="Sylfaen"/>
-        <a:font script="Armn" typeface="Arial"/>
-        <a:font script="Bugi" typeface="Leelawadee UI"/>
-        <a:font script="Bopo" typeface="Microsoft JhengHei"/>
-        <a:font script="Java" typeface="Javanese Text"/>
-        <a:font script="Lisu" typeface="Segoe UI"/>
-        <a:font script="Mymr" typeface="Myanmar Text"/>
-        <a:font script="Nkoo" typeface="Ebrima"/>
-        <a:font script="Olck" typeface="Nirmala UI"/>
-        <a:font script="Osma" typeface="Ebrima"/>
-        <a:font script="Phag" typeface="Phagspa"/>
-        <a:font script="Syrn" typeface="Estrangelo Edessa"/>
-        <a:font script="Syrj" typeface="Estrangelo Edessa"/>
-        <a:font script="Syre" typeface="Estrangelo Edessa"/>
-        <a:font script="Sora" typeface="Nirmala UI"/>
-        <a:font script="Tale" typeface="Microsoft Tai Le"/>
-        <a:font script="Talu" typeface="Microsoft New Tai Lue"/>
-        <a:font script="Tfng" typeface="Ebrima"/>
       </a:majorFont>
       <a:minorFont>
-        <a:latin typeface="Aptos" panose="02110004020202020204"/>
+        <a:latin typeface="Century Gothic" panose="020B0502020202020204"/>
         <a:ea typeface=""/>
         <a:cs typeface=""/>
-        <a:font script="Jpan" typeface="游ゴシック"/>
+        <a:font script="Jpan" typeface="メイリオ"/>
         <a:font script="Hang" typeface="맑은 고딕"/>
-        <a:font script="Hans" typeface="等线"/>
+        <a:font script="Hans" typeface="宋体"/>
         <a:font script="Hant" typeface="新細明體"/>
         <a:font script="Arab" typeface="Arial"/>
         <a:font script="Hebr" typeface="Arial"/>
@@ -7462,26 +10100,9 @@
         <a:font script="Viet" typeface="Arial"/>
         <a:font script="Uigh" typeface="Microsoft Uighur"/>
         <a:font script="Geor" typeface="Sylfaen"/>
-        <a:font script="Armn" typeface="Arial"/>
-        <a:font script="Bugi" typeface="Leelawadee UI"/>
-        <a:font script="Bopo" typeface="Microsoft JhengHei"/>
-        <a:font script="Java" typeface="Javanese Text"/>
-        <a:font script="Lisu" typeface="Segoe UI"/>
-        <a:font script="Mymr" typeface="Myanmar Text"/>
-        <a:font script="Nkoo" typeface="Ebrima"/>
-        <a:font script="Olck" typeface="Nirmala UI"/>
-        <a:font script="Osma" typeface="Ebrima"/>
-        <a:font script="Phag" typeface="Phagspa"/>
-        <a:font script="Syrn" typeface="Estrangelo Edessa"/>
-        <a:font script="Syrj" typeface="Estrangelo Edessa"/>
-        <a:font script="Syre" typeface="Estrangelo Edessa"/>
-        <a:font script="Sora" typeface="Nirmala UI"/>
-        <a:font script="Tale" typeface="Microsoft Tai Le"/>
-        <a:font script="Talu" typeface="Microsoft New Tai Lue"/>
-        <a:font script="Tfng" typeface="Ebrima"/>
       </a:minorFont>
     </a:fontScheme>
-    <a:fmtScheme name="Office">
+    <a:fmtScheme name="Ion">
       <a:fillStyleLst>
         <a:solidFill>
           <a:schemeClr val="phClr"/>
@@ -7490,23 +10111,15 @@
           <a:gsLst>
             <a:gs pos="0">
               <a:schemeClr val="phClr">
-                <a:lumMod val="110000"/>
-                <a:satMod val="105000"/>
-                <a:tint val="67000"/>
-              </a:schemeClr>
-            </a:gs>
-            <a:gs pos="50000">
-              <a:schemeClr val="phClr">
-                <a:lumMod val="105000"/>
-                <a:satMod val="103000"/>
-                <a:tint val="73000"/>
+                <a:tint val="64000"/>
+                <a:lumMod val="118000"/>
               </a:schemeClr>
             </a:gs>
             <a:gs pos="100000">
               <a:schemeClr val="phClr">
-                <a:lumMod val="105000"/>
-                <a:satMod val="109000"/>
-                <a:tint val="81000"/>
+                <a:tint val="92000"/>
+                <a:alpha val="100000"/>
+                <a:lumMod val="110000"/>
               </a:schemeClr>
             </a:gs>
           </a:gsLst>
@@ -7516,23 +10129,14 @@
           <a:gsLst>
             <a:gs pos="0">
               <a:schemeClr val="phClr">
-                <a:satMod val="103000"/>
-                <a:lumMod val="102000"/>
-                <a:tint val="94000"/>
-              </a:schemeClr>
-            </a:gs>
-            <a:gs pos="50000">
-              <a:schemeClr val="phClr">
-                <a:satMod val="110000"/>
-                <a:lumMod val="100000"/>
-                <a:shade val="100000"/>
+                <a:tint val="98000"/>
+                <a:lumMod val="114000"/>
               </a:schemeClr>
             </a:gs>
             <a:gs pos="100000">
               <a:schemeClr val="phClr">
-                <a:lumMod val="99000"/>
-                <a:satMod val="120000"/>
-                <a:shade val="78000"/>
+                <a:shade val="90000"/>
+                <a:lumMod val="84000"/>
               </a:schemeClr>
             </a:gs>
           </a:gsLst>
@@ -7540,26 +10144,23 @@
         </a:gradFill>
       </a:fillStyleLst>
       <a:lnStyleLst>
-        <a:ln w="12700" cap="flat" cmpd="sng" algn="ctr">
+        <a:ln w="9525" cap="rnd" cmpd="sng" algn="ctr">
           <a:solidFill>
             <a:schemeClr val="phClr"/>
           </a:solidFill>
           <a:prstDash val="solid"/>
-          <a:miter lim="800000"/>
         </a:ln>
-        <a:ln w="19050" cap="flat" cmpd="sng" algn="ctr">
+        <a:ln w="19050" cap="rnd" cmpd="sng" algn="ctr">
           <a:solidFill>
             <a:schemeClr val="phClr"/>
           </a:solidFill>
           <a:prstDash val="solid"/>
-          <a:miter lim="800000"/>
         </a:ln>
-        <a:ln w="25400" cap="flat" cmpd="sng" algn="ctr">
+        <a:ln w="28575" cap="rnd" cmpd="sng" algn="ctr">
           <a:solidFill>
             <a:schemeClr val="phClr"/>
           </a:solidFill>
           <a:prstDash val="solid"/>
-          <a:miter lim="800000"/>
         </a:ln>
       </a:lnStyleLst>
       <a:effectStyleLst>
@@ -7567,83 +10168,88 @@
           <a:effectLst/>
         </a:effectStyle>
         <a:effectStyle>
-          <a:effectLst/>
+          <a:effectLst>
+            <a:outerShdw blurRad="38100" dist="25400" dir="5400000" rotWithShape="0">
+              <a:srgbClr val="000000">
+                <a:alpha val="45000"/>
+              </a:srgbClr>
+            </a:outerShdw>
+          </a:effectLst>
         </a:effectStyle>
         <a:effectStyle>
           <a:effectLst>
-            <a:outerShdw blurRad="57150" dist="19050" dir="5400000" algn="ctr" rotWithShape="0">
+            <a:outerShdw blurRad="63500" dist="38100" dir="5400000" rotWithShape="0">
               <a:srgbClr val="000000">
-                <a:alpha val="63000"/>
+                <a:alpha val="60000"/>
               </a:srgbClr>
             </a:outerShdw>
           </a:effectLst>
+          <a:scene3d>
+            <a:camera prst="orthographicFront">
+              <a:rot lat="0" lon="0" rev="0"/>
+            </a:camera>
+            <a:lightRig rig="threePt" dir="tl"/>
+          </a:scene3d>
+          <a:sp3d prstMaterial="plastic">
+            <a:bevelT w="0" h="0"/>
+          </a:sp3d>
         </a:effectStyle>
       </a:effectStyleLst>
       <a:bgFillStyleLst>
         <a:solidFill>
           <a:schemeClr val="phClr"/>
         </a:solidFill>
-        <a:solidFill>
-          <a:schemeClr val="phClr">
-            <a:tint val="95000"/>
-            <a:satMod val="170000"/>
-          </a:schemeClr>
-        </a:solidFill>
         <a:gradFill rotWithShape="1">
           <a:gsLst>
             <a:gs pos="0">
               <a:schemeClr val="phClr">
-                <a:tint val="93000"/>
-                <a:satMod val="150000"/>
-                <a:shade val="98000"/>
-                <a:lumMod val="102000"/>
-              </a:schemeClr>
-            </a:gs>
-            <a:gs pos="50000">
-              <a:schemeClr val="phClr">
-                <a:tint val="98000"/>
+                <a:tint val="97000"/>
+                <a:hueMod val="88000"/>
                 <a:satMod val="130000"/>
-                <a:shade val="90000"/>
-                <a:lumMod val="103000"/>
+                <a:lumMod val="124000"/>
               </a:schemeClr>
             </a:gs>
             <a:gs pos="100000">
               <a:schemeClr val="phClr">
-                <a:shade val="63000"/>
-                <a:satMod val="120000"/>
+                <a:tint val="96000"/>
+                <a:shade val="88000"/>
+                <a:hueMod val="108000"/>
+                <a:satMod val="164000"/>
+                <a:lumMod val="76000"/>
               </a:schemeClr>
             </a:gs>
           </a:gsLst>
-          <a:lin ang="5400000" scaled="0"/>
+          <a:path path="circle">
+            <a:fillToRect l="45000" t="65000" r="125000" b="100000"/>
+          </a:path>
         </a:gradFill>
+        <a:blipFill rotWithShape="1">
+          <a:blip xmlns:r="http://schemas.openxmlformats.org/officeDocument/2006/relationships" r:embed="rId1">
+            <a:duotone>
+              <a:schemeClr val="phClr">
+                <a:shade val="69000"/>
+                <a:hueMod val="108000"/>
+                <a:satMod val="164000"/>
+                <a:lumMod val="74000"/>
+              </a:schemeClr>
+              <a:schemeClr val="phClr">
+                <a:tint val="96000"/>
+                <a:hueMod val="88000"/>
+                <a:satMod val="140000"/>
+                <a:lumMod val="132000"/>
+              </a:schemeClr>
+            </a:duotone>
+          </a:blip>
+          <a:stretch/>
+        </a:blipFill>
       </a:bgFillStyleLst>
     </a:fmtScheme>
   </a:themeElements>
-  <a:objectDefaults>
-    <a:lnDef>
-      <a:spPr/>
-      <a:bodyPr/>
-      <a:lstStyle/>
-      <a:style>
-        <a:lnRef idx="2">
-          <a:schemeClr val="accent1"/>
-        </a:lnRef>
-        <a:fillRef idx="0">
-          <a:schemeClr val="accent1"/>
-        </a:fillRef>
-        <a:effectRef idx="1">
-          <a:schemeClr val="accent1"/>
-        </a:effectRef>
-        <a:fontRef idx="minor">
-          <a:schemeClr val="tx1"/>
-        </a:fontRef>
-      </a:style>
-    </a:lnDef>
-  </a:objectDefaults>
+  <a:objectDefaults/>
   <a:extraClrSchemeLst/>
   <a:extLst>
     <a:ext uri="{05A4C25C-085E-4340-85A3-A5531E510DB2}">
-      <thm15:themeFamily xmlns:thm15="http://schemas.microsoft.com/office/thememl/2012/main" name="Office Theme" id="{2E142A2C-CD16-42D6-873A-C26D2A0506FA}" vid="{1BDDFF52-6CD6-40A5-AB3C-68EB2F1E4D0A}"/>
+      <thm15:themeFamily xmlns:thm15="http://schemas.microsoft.com/office/thememl/2012/main" name="Ion" id="{B8441ADB-2E43-4AF7-B97A-BD870242C6A8}" vid="{292E63A9-BB86-4E3D-B92A-7223C6510D2E}"/>
     </a:ext>
   </a:extLst>
 </a:theme>
